--- a/canva/aki-omocha-template.pptx
+++ b/canva/aki-omocha-template.pptx
@@ -3273,7 +3273,7 @@
       </p:sp>
       <p:pic>
         <p:nvPicPr>
-          <p:cNvPr id="23" name="Image 6" descr="illust/kinoko.png">    </p:cNvPr>
+          <p:cNvPr id="23" name="Image 6" descr="illust/kinomi.png">    </p:cNvPr>
           <p:cNvPicPr>
             <a:picLocks noChangeAspect="1"/>
           </p:cNvPicPr>
@@ -3328,7 +3328,7 @@
                 <a:ea typeface="Zen Maru Gothic" pitchFamily="34" charset="-122"/>
                 <a:cs typeface="Zen Maru Gothic" pitchFamily="34" charset="-120"/>
               </a:rPr>
-              <a:t>きのこ</a:t>
+              <a:t>きのみ</a:t>
             </a:r>
             <a:endParaRPr lang="en-US" sz="1400" dirty="0"/>
           </a:p>
@@ -7936,7 +7936,7 @@
       </p:pic>
       <p:pic>
         <p:nvPicPr>
-          <p:cNvPr id="6" name="Image 2" descr="illust/kinoko.png">    </p:cNvPr>
+          <p:cNvPr id="6" name="Image 2" descr="illust/kinomi.png">    </p:cNvPr>
           <p:cNvPicPr>
             <a:picLocks noChangeAspect="1"/>
           </p:cNvPicPr>

--- a/canva/aki-omocha-template.pptx
+++ b/canva/aki-omocha-template.pptx
@@ -14,9 +14,13 @@
     <p:sldId id="262" r:id="rId8"/>
     <p:sldId id="263" r:id="rId9"/>
     <p:sldId id="264" r:id="rId10"/>
+    <p:sldId id="265" r:id="rId11"/>
+    <p:sldId id="266" r:id="rId12"/>
+    <p:sldId id="267" r:id="rId13"/>
+    <p:sldId id="268" r:id="rId14"/>
   </p:sldIdLst>
   <p:notesMasterIdLst>
-    <p:notesMasterId r:id="rId11"/>
+    <p:notesMasterId r:id="rId15"/>
   </p:notesMasterIdLst>
   <p:sldSz cx="9144000" cy="5143500"/>
   <p:notesSz cx="5143500" cy="9144000"/>
@@ -552,6 +556,358 @@
 </p:notes>
 </file>
 
+<file path=ppt/notesSlides/notesSlide10.xml><?xml version="1.0" encoding="utf-8"?>
+<p:notes xmlns:a="http://schemas.openxmlformats.org/drawingml/2006/main" xmlns:r="http://schemas.openxmlformats.org/officeDocument/2006/relationships" xmlns:p="http://schemas.openxmlformats.org/presentationml/2006/main">
+  <p:cSld>
+    <p:spTree>
+      <p:nvGrpSpPr>
+        <p:cNvPr id="1" name=""/>
+        <p:cNvGrpSpPr/>
+        <p:nvPr/>
+      </p:nvGrpSpPr>
+      <p:grpSpPr>
+        <a:xfrm>
+          <a:off x="0" y="0"/>
+          <a:ext cx="0" cy="0"/>
+          <a:chOff x="0" y="0"/>
+          <a:chExt cx="0" cy="0"/>
+        </a:xfrm>
+      </p:grpSpPr>
+      <p:sp>
+        <p:nvSpPr>
+          <p:cNvPr id="2" name="Slide Image Placeholder 1"/>
+          <p:cNvSpPr>
+            <a:spLocks noGrp="1" noRot="1" noChangeAspect="1"/>
+          </p:cNvSpPr>
+          <p:nvPr>
+            <p:ph type="sldImg"/>
+          </p:nvPr>
+        </p:nvSpPr>
+        <p:spPr/>
+      </p:sp>
+      <p:sp>
+        <p:nvSpPr>
+          <p:cNvPr id="3" name="Notes Placeholder 2"/>
+          <p:cNvSpPr>
+            <a:spLocks noGrp="1"/>
+          </p:cNvSpPr>
+          <p:nvPr>
+            <p:ph type="body" idx="1"/>
+          </p:nvPr>
+        </p:nvSpPr>
+        <p:spPr/>
+        <p:txBody>
+          <a:bodyPr/>
+          <a:lstStyle/>
+          <a:p>
+            <a:r>
+              <a:rPr lang="en-US" dirty="0"/>
+              <a:t>遊び方。動画を入れるとよく伝わります。</a:t>
+            </a:r>
+            <a:endParaRPr lang="en-US" dirty="0"/>
+          </a:p>
+        </p:txBody>
+      </p:sp>
+      <p:sp>
+        <p:nvSpPr>
+          <p:cNvPr id="4" name="Slide Number Placeholder 3"/>
+          <p:cNvSpPr>
+            <a:spLocks noGrp="1"/>
+          </p:cNvSpPr>
+          <p:nvPr>
+            <p:ph type="sldNum" sz="quarter" idx="10"/>
+          </p:nvPr>
+        </p:nvSpPr>
+        <p:spPr/>
+        <p:txBody>
+          <a:bodyPr/>
+          <a:lstStyle/>
+          <a:p>
+            <a:fld id="{F7021451-1387-4CA6-816F-3879F97B5CBC}" type="slidenum">
+              <a:rPr lang="en-US"/>
+              <a:t>10</a:t>
+            </a:fld>
+            <a:endParaRPr lang="en-US"/>
+          </a:p>
+        </p:txBody>
+      </p:sp>
+    </p:spTree>
+    <p:extLst>
+      <p:ext uri="{BB962C8B-B14F-4D97-AF65-F5344CB8AC3E}">
+        <p14:creationId xmlns:p14="http://schemas.microsoft.com/office/powerpoint/2010/main" val="1024086991"/>
+      </p:ext>
+    </p:extLst>
+  </p:cSld>
+  <p:clrMapOvr>
+    <a:masterClrMapping/>
+  </p:clrMapOvr>
+</p:notes>
+</file>
+
+<file path=ppt/notesSlides/notesSlide11.xml><?xml version="1.0" encoding="utf-8"?>
+<p:notes xmlns:a="http://schemas.openxmlformats.org/drawingml/2006/main" xmlns:r="http://schemas.openxmlformats.org/officeDocument/2006/relationships" xmlns:p="http://schemas.openxmlformats.org/presentationml/2006/main">
+  <p:cSld>
+    <p:spTree>
+      <p:nvGrpSpPr>
+        <p:cNvPr id="1" name=""/>
+        <p:cNvGrpSpPr/>
+        <p:nvPr/>
+      </p:nvGrpSpPr>
+      <p:grpSpPr>
+        <a:xfrm>
+          <a:off x="0" y="0"/>
+          <a:ext cx="0" cy="0"/>
+          <a:chOff x="0" y="0"/>
+          <a:chExt cx="0" cy="0"/>
+        </a:xfrm>
+      </p:grpSpPr>
+      <p:sp>
+        <p:nvSpPr>
+          <p:cNvPr id="2" name="Slide Image Placeholder 1"/>
+          <p:cNvSpPr>
+            <a:spLocks noGrp="1" noRot="1" noChangeAspect="1"/>
+          </p:cNvSpPr>
+          <p:nvPr>
+            <p:ph type="sldImg"/>
+          </p:nvPr>
+        </p:nvSpPr>
+        <p:spPr/>
+      </p:sp>
+      <p:sp>
+        <p:nvSpPr>
+          <p:cNvPr id="3" name="Notes Placeholder 2"/>
+          <p:cNvSpPr>
+            <a:spLocks noGrp="1"/>
+          </p:cNvSpPr>
+          <p:nvPr>
+            <p:ph type="body" idx="1"/>
+          </p:nvPr>
+        </p:nvSpPr>
+        <p:spPr/>
+        <p:txBody>
+          <a:bodyPr/>
+          <a:lstStyle/>
+          <a:p>
+            <a:r>
+              <a:rPr lang="en-US" dirty="0"/>
+              <a:t>工夫と難しかったところ。1年生には「くふう＝がんばったところ」と言い換えると伝わります。</a:t>
+            </a:r>
+            <a:endParaRPr lang="en-US" dirty="0"/>
+          </a:p>
+        </p:txBody>
+      </p:sp>
+      <p:sp>
+        <p:nvSpPr>
+          <p:cNvPr id="4" name="Slide Number Placeholder 3"/>
+          <p:cNvSpPr>
+            <a:spLocks noGrp="1"/>
+          </p:cNvSpPr>
+          <p:nvPr>
+            <p:ph type="sldNum" sz="quarter" idx="10"/>
+          </p:nvPr>
+        </p:nvSpPr>
+        <p:spPr/>
+        <p:txBody>
+          <a:bodyPr/>
+          <a:lstStyle/>
+          <a:p>
+            <a:fld id="{F7021451-1387-4CA6-816F-3879F97B5CBC}" type="slidenum">
+              <a:rPr lang="en-US"/>
+              <a:t>11</a:t>
+            </a:fld>
+            <a:endParaRPr lang="en-US"/>
+          </a:p>
+        </p:txBody>
+      </p:sp>
+    </p:spTree>
+    <p:extLst>
+      <p:ext uri="{BB962C8B-B14F-4D97-AF65-F5344CB8AC3E}">
+        <p14:creationId xmlns:p14="http://schemas.microsoft.com/office/powerpoint/2010/main" val="1024086991"/>
+      </p:ext>
+    </p:extLst>
+  </p:cSld>
+  <p:clrMapOvr>
+    <a:masterClrMapping/>
+  </p:clrMapOvr>
+</p:notes>
+</file>
+
+<file path=ppt/notesSlides/notesSlide12.xml><?xml version="1.0" encoding="utf-8"?>
+<p:notes xmlns:a="http://schemas.openxmlformats.org/drawingml/2006/main" xmlns:r="http://schemas.openxmlformats.org/officeDocument/2006/relationships" xmlns:p="http://schemas.openxmlformats.org/presentationml/2006/main">
+  <p:cSld>
+    <p:spTree>
+      <p:nvGrpSpPr>
+        <p:cNvPr id="1" name=""/>
+        <p:cNvGrpSpPr/>
+        <p:nvPr/>
+      </p:nvGrpSpPr>
+      <p:grpSpPr>
+        <a:xfrm>
+          <a:off x="0" y="0"/>
+          <a:ext cx="0" cy="0"/>
+          <a:chOff x="0" y="0"/>
+          <a:chExt cx="0" cy="0"/>
+        </a:xfrm>
+      </p:grpSpPr>
+      <p:sp>
+        <p:nvSpPr>
+          <p:cNvPr id="2" name="Slide Image Placeholder 1"/>
+          <p:cNvSpPr>
+            <a:spLocks noGrp="1" noRot="1" noChangeAspect="1"/>
+          </p:cNvSpPr>
+          <p:nvPr>
+            <p:ph type="sldImg"/>
+          </p:nvPr>
+        </p:nvSpPr>
+        <p:spPr/>
+      </p:sp>
+      <p:sp>
+        <p:nvSpPr>
+          <p:cNvPr id="3" name="Notes Placeholder 2"/>
+          <p:cNvSpPr>
+            <a:spLocks noGrp="1"/>
+          </p:cNvSpPr>
+          <p:nvPr>
+            <p:ph type="body" idx="1"/>
+          </p:nvPr>
+        </p:nvSpPr>
+        <p:spPr/>
+        <p:txBody>
+          <a:bodyPr/>
+          <a:lstStyle/>
+          <a:p>
+            <a:r>
+              <a:rPr lang="en-US" dirty="0"/>
+              <a:t>感想。ことばカードで選べるので、書くのが苦手な子も完成できます。</a:t>
+            </a:r>
+            <a:endParaRPr lang="en-US" dirty="0"/>
+          </a:p>
+        </p:txBody>
+      </p:sp>
+      <p:sp>
+        <p:nvSpPr>
+          <p:cNvPr id="4" name="Slide Number Placeholder 3"/>
+          <p:cNvSpPr>
+            <a:spLocks noGrp="1"/>
+          </p:cNvSpPr>
+          <p:nvPr>
+            <p:ph type="sldNum" sz="quarter" idx="10"/>
+          </p:nvPr>
+        </p:nvSpPr>
+        <p:spPr/>
+        <p:txBody>
+          <a:bodyPr/>
+          <a:lstStyle/>
+          <a:p>
+            <a:fld id="{F7021451-1387-4CA6-816F-3879F97B5CBC}" type="slidenum">
+              <a:rPr lang="en-US"/>
+              <a:t>12</a:t>
+            </a:fld>
+            <a:endParaRPr lang="en-US"/>
+          </a:p>
+        </p:txBody>
+      </p:sp>
+    </p:spTree>
+    <p:extLst>
+      <p:ext uri="{BB962C8B-B14F-4D97-AF65-F5344CB8AC3E}">
+        <p14:creationId xmlns:p14="http://schemas.microsoft.com/office/powerpoint/2010/main" val="1024086991"/>
+      </p:ext>
+    </p:extLst>
+  </p:cSld>
+  <p:clrMapOvr>
+    <a:masterClrMapping/>
+  </p:clrMapOvr>
+</p:notes>
+</file>
+
+<file path=ppt/notesSlides/notesSlide13.xml><?xml version="1.0" encoding="utf-8"?>
+<p:notes xmlns:a="http://schemas.openxmlformats.org/drawingml/2006/main" xmlns:r="http://schemas.openxmlformats.org/officeDocument/2006/relationships" xmlns:p="http://schemas.openxmlformats.org/presentationml/2006/main">
+  <p:cSld>
+    <p:spTree>
+      <p:nvGrpSpPr>
+        <p:cNvPr id="1" name=""/>
+        <p:cNvGrpSpPr/>
+        <p:nvPr/>
+      </p:nvGrpSpPr>
+      <p:grpSpPr>
+        <a:xfrm>
+          <a:off x="0" y="0"/>
+          <a:ext cx="0" cy="0"/>
+          <a:chOff x="0" y="0"/>
+          <a:chExt cx="0" cy="0"/>
+        </a:xfrm>
+      </p:grpSpPr>
+      <p:sp>
+        <p:nvSpPr>
+          <p:cNvPr id="2" name="Slide Image Placeholder 1"/>
+          <p:cNvSpPr>
+            <a:spLocks noGrp="1" noRot="1" noChangeAspect="1"/>
+          </p:cNvSpPr>
+          <p:nvPr>
+            <p:ph type="sldImg"/>
+          </p:nvPr>
+        </p:nvSpPr>
+        <p:spPr/>
+      </p:sp>
+      <p:sp>
+        <p:nvSpPr>
+          <p:cNvPr id="3" name="Notes Placeholder 2"/>
+          <p:cNvSpPr>
+            <a:spLocks noGrp="1"/>
+          </p:cNvSpPr>
+          <p:nvPr>
+            <p:ph type="body" idx="1"/>
+          </p:nvPr>
+        </p:nvSpPr>
+        <p:spPr/>
+        <p:txBody>
+          <a:bodyPr/>
+          <a:lstStyle/>
+          <a:p>
+            <a:r>
+              <a:rPr lang="en-US" dirty="0"/>
+              <a:t>終わりのページ。</a:t>
+            </a:r>
+            <a:endParaRPr lang="en-US" dirty="0"/>
+          </a:p>
+        </p:txBody>
+      </p:sp>
+      <p:sp>
+        <p:nvSpPr>
+          <p:cNvPr id="4" name="Slide Number Placeholder 3"/>
+          <p:cNvSpPr>
+            <a:spLocks noGrp="1"/>
+          </p:cNvSpPr>
+          <p:nvPr>
+            <p:ph type="sldNum" sz="quarter" idx="10"/>
+          </p:nvPr>
+        </p:nvSpPr>
+        <p:spPr/>
+        <p:txBody>
+          <a:bodyPr/>
+          <a:lstStyle/>
+          <a:p>
+            <a:fld id="{F7021451-1387-4CA6-816F-3879F97B5CBC}" type="slidenum">
+              <a:rPr lang="en-US"/>
+              <a:t>13</a:t>
+            </a:fld>
+            <a:endParaRPr lang="en-US"/>
+          </a:p>
+        </p:txBody>
+      </p:sp>
+    </p:spTree>
+    <p:extLst>
+      <p:ext uri="{BB962C8B-B14F-4D97-AF65-F5344CB8AC3E}">
+        <p14:creationId xmlns:p14="http://schemas.microsoft.com/office/powerpoint/2010/main" val="1024086991"/>
+      </p:ext>
+    </p:extLst>
+  </p:cSld>
+  <p:clrMapOvr>
+    <a:masterClrMapping/>
+  </p:clrMapOvr>
+</p:notes>
+</file>
+
 <file path=ppt/notesSlides/notesSlide2.xml><?xml version="1.0" encoding="utf-8"?>
 <p:notes xmlns:a="http://schemas.openxmlformats.org/drawingml/2006/main" xmlns:r="http://schemas.openxmlformats.org/officeDocument/2006/relationships" xmlns:p="http://schemas.openxmlformats.org/presentationml/2006/main">
   <p:cSld>
@@ -950,7 +1306,7 @@
           <a:p>
             <a:r>
               <a:rPr lang="en-US" dirty="0"/>
-              <a:t>遊び方。動画を入れるとよく伝わります。</a:t>
+              <a:t>うまくいかなかったことのページ。ここが一番大事です。失敗の写真があれば貼ります。</a:t>
             </a:r>
             <a:endParaRPr lang="en-US" dirty="0"/>
           </a:p>
@@ -1038,7 +1394,7 @@
           <a:p>
             <a:r>
               <a:rPr lang="en-US" dirty="0"/>
-              <a:t>工夫と難しかったところ。1年生には「くふう＝がんばったところ」と言い換えると伝わります。</a:t>
+              <a:t>考えたことを吹き出しに。「友だちが教えてくれた」を入れると、学び合いが見えます。</a:t>
             </a:r>
             <a:endParaRPr lang="en-US" dirty="0"/>
           </a:p>
@@ -1126,7 +1482,7 @@
           <a:p>
             <a:r>
               <a:rPr lang="en-US" dirty="0"/>
-              <a:t>感想。ことばカードで選べるので、書くのが苦手な子も完成できます。</a:t>
+              <a:t>直す前と後の写真を並べます。変化が一目で伝わります。</a:t>
             </a:r>
             <a:endParaRPr lang="en-US" dirty="0"/>
           </a:p>
@@ -1214,7 +1570,7 @@
           <a:p>
             <a:r>
               <a:rPr lang="en-US" dirty="0"/>
-              <a:t>終わりのページ。</a:t>
+              <a:t>試した回数と気持ちの変化。星はコピー＆ペーストで増やせます。</a:t>
             </a:r>
             <a:endParaRPr lang="en-US" dirty="0"/>
           </a:p>
@@ -2277,12 +2633,2637 @@
                 <a:ea typeface="Zen Maru Gothic" pitchFamily="34" charset="-122"/>
                 <a:cs typeface="Zen Maru Gothic" pitchFamily="34" charset="-120"/>
               </a:rPr>
-              <a:t>もじを うたなくても できるよ。うちたい 子は うっても いいよ。</a:t>
+              <a:t>もじを うたなくても できるよ。「こまった」「かんがえた」ページも つくって みてね。</a:t>
             </a:r>
             <a:endParaRPr lang="en-US" sz="1300" dirty="0"/>
           </a:p>
         </p:txBody>
       </p:sp>
+    </p:spTree>
+  </p:cSld>
+  <p:clrMapOvr>
+    <a:masterClrMapping/>
+  </p:clrMapOvr>
+</p:sld>
+</file>
+
+<file path=ppt/slides/slide10.xml><?xml version="1.0" encoding="utf-8"?>
+<p:sld xmlns:a="http://schemas.openxmlformats.org/drawingml/2006/main" xmlns:r="http://schemas.openxmlformats.org/officeDocument/2006/relationships" xmlns:p="http://schemas.openxmlformats.org/presentationml/2006/main">
+  <p:cSld name="Slide 10">
+    <p:bg>
+      <p:bgPr>
+        <a:solidFill>
+          <a:srgbClr val="FFF6E5"/>
+        </a:solidFill>
+      </p:bgPr>
+    </p:bg>
+    <p:spTree>
+      <p:nvGrpSpPr>
+        <p:cNvPr id="1" name=""/>
+        <p:cNvGrpSpPr/>
+        <p:nvPr/>
+      </p:nvGrpSpPr>
+      <p:grpSpPr>
+        <a:xfrm>
+          <a:off x="0" y="0"/>
+          <a:ext cx="0" cy="0"/>
+          <a:chOff x="0" y="0"/>
+          <a:chExt cx="0" cy="0"/>
+        </a:xfrm>
+      </p:grpSpPr>
+      <p:sp>
+        <p:nvSpPr>
+          <p:cNvPr id="2" name="Shape 0"/>
+          <p:cNvSpPr/>
+          <p:nvPr/>
+        </p:nvSpPr>
+        <p:spPr>
+          <a:xfrm>
+            <a:off x="347472" y="201168"/>
+            <a:ext cx="8449056" cy="658368"/>
+          </a:xfrm>
+          <a:prstGeom prst="roundRect">
+            <a:avLst>
+              <a:gd name="adj" fmla="val 22222"/>
+            </a:avLst>
+          </a:prstGeom>
+          <a:solidFill>
+            <a:srgbClr val="9C27B0"/>
+          </a:solidFill>
+          <a:ln w="12700">
+            <a:solidFill>
+              <a:srgbClr val="9C27B0"/>
+            </a:solidFill>
+            <a:prstDash val="solid"/>
+          </a:ln>
+        </p:spPr>
+      </p:sp>
+      <p:sp>
+        <p:nvSpPr>
+          <p:cNvPr id="3" name="Text 1"/>
+          <p:cNvSpPr/>
+          <p:nvPr/>
+        </p:nvSpPr>
+        <p:spPr>
+          <a:xfrm>
+            <a:off x="347472" y="201168"/>
+            <a:ext cx="8449056" cy="658368"/>
+          </a:xfrm>
+          <a:prstGeom prst="rect">
+            <a:avLst/>
+          </a:prstGeom>
+          <a:noFill/>
+          <a:ln/>
+        </p:spPr>
+        <p:txBody>
+          <a:bodyPr wrap="square" lIns="0" tIns="0" rIns="0" bIns="0" rtlCol="0" anchor="ctr"/>
+          <a:lstStyle/>
+          <a:p>
+            <a:pPr algn="ctr" indent="0" marL="0">
+              <a:buNone/>
+            </a:pPr>
+            <a:r>
+              <a:rPr lang="en-US" sz="2600" b="1" dirty="0">
+                <a:solidFill>
+                  <a:srgbClr val="FFFFFF"/>
+                </a:solidFill>
+                <a:latin typeface="Zen Maru Gothic" pitchFamily="34" charset="0"/>
+                <a:ea typeface="Zen Maru Gothic" pitchFamily="34" charset="-122"/>
+                <a:cs typeface="Zen Maru Gothic" pitchFamily="34" charset="-120"/>
+              </a:rPr>
+              <a:t>あそびかた</a:t>
+            </a:r>
+            <a:endParaRPr lang="en-US" sz="2600" dirty="0"/>
+          </a:p>
+        </p:txBody>
+      </p:sp>
+      <p:sp>
+        <p:nvSpPr>
+          <p:cNvPr id="4" name="Shape 2"/>
+          <p:cNvSpPr/>
+          <p:nvPr/>
+        </p:nvSpPr>
+        <p:spPr>
+          <a:xfrm>
+            <a:off x="4709160" y="1024128"/>
+            <a:ext cx="3931920" cy="2880360"/>
+          </a:xfrm>
+          <a:prstGeom prst="roundRect">
+            <a:avLst>
+              <a:gd name="adj" fmla="val 4444"/>
+            </a:avLst>
+          </a:prstGeom>
+          <a:solidFill>
+            <a:srgbClr val="ECEFF1"/>
+          </a:solidFill>
+          <a:ln w="31750">
+            <a:solidFill>
+              <a:srgbClr val="90A4AE"/>
+            </a:solidFill>
+            <a:prstDash val="dash"/>
+          </a:ln>
+        </p:spPr>
+      </p:sp>
+      <p:sp>
+        <p:nvSpPr>
+          <p:cNvPr id="5" name="Text 3"/>
+          <p:cNvSpPr/>
+          <p:nvPr/>
+        </p:nvSpPr>
+        <p:spPr>
+          <a:xfrm>
+            <a:off x="4709160" y="1024128"/>
+            <a:ext cx="3931920" cy="2880360"/>
+          </a:xfrm>
+          <a:prstGeom prst="rect">
+            <a:avLst/>
+          </a:prstGeom>
+          <a:noFill/>
+          <a:ln/>
+        </p:spPr>
+        <p:txBody>
+          <a:bodyPr wrap="square" lIns="0" tIns="0" rIns="0" bIns="0" rtlCol="0" anchor="ctr"/>
+          <a:lstStyle/>
+          <a:p>
+            <a:pPr algn="ctr" indent="0" marL="0">
+              <a:lnSpc>
+                <a:spcPct val="130000"/>
+              </a:lnSpc>
+              <a:buNone/>
+            </a:pPr>
+            <a:r>
+              <a:rPr lang="en-US" sz="1500" dirty="0">
+                <a:solidFill>
+                  <a:srgbClr val="607D8B"/>
+                </a:solidFill>
+                <a:latin typeface="Zen Maru Gothic" pitchFamily="34" charset="0"/>
+                <a:ea typeface="Zen Maru Gothic" pitchFamily="34" charset="-122"/>
+                <a:cs typeface="Zen Maru Gothic" pitchFamily="34" charset="-120"/>
+              </a:rPr>
+              <a:t>しゃしんを</a:t>
+            </a:r>
+            <a:endParaRPr lang="en-US" sz="1500" dirty="0"/>
+          </a:p>
+          <a:p>
+            <a:pPr algn="ctr" indent="0" marL="0">
+              <a:lnSpc>
+                <a:spcPct val="130000"/>
+              </a:lnSpc>
+              <a:buNone/>
+            </a:pPr>
+            <a:r>
+              <a:rPr lang="en-US" sz="1500" dirty="0">
+                <a:solidFill>
+                  <a:srgbClr val="607D8B"/>
+                </a:solidFill>
+                <a:latin typeface="Zen Maru Gothic" pitchFamily="34" charset="0"/>
+                <a:ea typeface="Zen Maru Gothic" pitchFamily="34" charset="-122"/>
+                <a:cs typeface="Zen Maru Gothic" pitchFamily="34" charset="-120"/>
+              </a:rPr>
+              <a:t>ここに</a:t>
+            </a:r>
+            <a:endParaRPr lang="en-US" sz="1500" dirty="0"/>
+          </a:p>
+        </p:txBody>
+      </p:sp>
+      <p:sp>
+        <p:nvSpPr>
+          <p:cNvPr id="6" name="Shape 4"/>
+          <p:cNvSpPr/>
+          <p:nvPr/>
+        </p:nvSpPr>
+        <p:spPr>
+          <a:xfrm>
+            <a:off x="502920" y="1024128"/>
+            <a:ext cx="3931920" cy="1280160"/>
+          </a:xfrm>
+          <a:prstGeom prst="roundRect">
+            <a:avLst>
+              <a:gd name="adj" fmla="val 8571"/>
+            </a:avLst>
+          </a:prstGeom>
+          <a:solidFill>
+            <a:srgbClr val="FFFFFF"/>
+          </a:solidFill>
+          <a:ln w="31750">
+            <a:solidFill>
+              <a:srgbClr val="FFB74D"/>
+            </a:solidFill>
+            <a:prstDash val="dash"/>
+          </a:ln>
+        </p:spPr>
+      </p:sp>
+      <p:sp>
+        <p:nvSpPr>
+          <p:cNvPr id="7" name="Text 5"/>
+          <p:cNvSpPr/>
+          <p:nvPr/>
+        </p:nvSpPr>
+        <p:spPr>
+          <a:xfrm>
+            <a:off x="612648" y="1024128"/>
+            <a:ext cx="3712464" cy="1280160"/>
+          </a:xfrm>
+          <a:prstGeom prst="rect">
+            <a:avLst/>
+          </a:prstGeom>
+          <a:noFill/>
+          <a:ln/>
+        </p:spPr>
+        <p:txBody>
+          <a:bodyPr wrap="square" lIns="0" tIns="0" rIns="0" bIns="0" rtlCol="0" anchor="ctr"/>
+          <a:lstStyle/>
+          <a:p>
+            <a:pPr algn="ctr" indent="0" marL="0">
+              <a:buNone/>
+            </a:pPr>
+            <a:r>
+              <a:rPr lang="en-US" sz="1900" dirty="0">
+                <a:solidFill>
+                  <a:srgbClr val="9E9E9E"/>
+                </a:solidFill>
+                <a:latin typeface="Zen Maru Gothic" pitchFamily="34" charset="0"/>
+                <a:ea typeface="Zen Maru Gothic" pitchFamily="34" charset="-122"/>
+                <a:cs typeface="Zen Maru Gothic" pitchFamily="34" charset="-120"/>
+              </a:rPr>
+              <a:t>（　　　　　　）と</a:t>
+            </a:r>
+            <a:endParaRPr lang="en-US" sz="1900" dirty="0"/>
+          </a:p>
+          <a:p>
+            <a:pPr algn="ctr" indent="0" marL="0">
+              <a:buNone/>
+            </a:pPr>
+            <a:r>
+              <a:rPr lang="en-US" sz="1900" dirty="0">
+                <a:solidFill>
+                  <a:srgbClr val="9E9E9E"/>
+                </a:solidFill>
+                <a:latin typeface="Zen Maru Gothic" pitchFamily="34" charset="0"/>
+                <a:ea typeface="Zen Maru Gothic" pitchFamily="34" charset="-122"/>
+                <a:cs typeface="Zen Maru Gothic" pitchFamily="34" charset="-120"/>
+              </a:rPr>
+              <a:t>あそびます</a:t>
+            </a:r>
+            <a:endParaRPr lang="en-US" sz="1900" dirty="0"/>
+          </a:p>
+        </p:txBody>
+      </p:sp>
+      <p:sp>
+        <p:nvSpPr>
+          <p:cNvPr id="8" name="Shape 6"/>
+          <p:cNvSpPr/>
+          <p:nvPr/>
+        </p:nvSpPr>
+        <p:spPr>
+          <a:xfrm>
+            <a:off x="502920" y="2487168"/>
+            <a:ext cx="3931920" cy="1417320"/>
+          </a:xfrm>
+          <a:prstGeom prst="roundRect">
+            <a:avLst>
+              <a:gd name="adj" fmla="val 7742"/>
+            </a:avLst>
+          </a:prstGeom>
+          <a:solidFill>
+            <a:srgbClr val="FFFFFF"/>
+          </a:solidFill>
+          <a:ln w="31750">
+            <a:solidFill>
+              <a:srgbClr val="FFB74D"/>
+            </a:solidFill>
+            <a:prstDash val="dash"/>
+          </a:ln>
+        </p:spPr>
+      </p:sp>
+      <p:sp>
+        <p:nvSpPr>
+          <p:cNvPr id="9" name="Text 7"/>
+          <p:cNvSpPr/>
+          <p:nvPr/>
+        </p:nvSpPr>
+        <p:spPr>
+          <a:xfrm>
+            <a:off x="612648" y="2487168"/>
+            <a:ext cx="3712464" cy="1417320"/>
+          </a:xfrm>
+          <a:prstGeom prst="rect">
+            <a:avLst/>
+          </a:prstGeom>
+          <a:noFill/>
+          <a:ln/>
+        </p:spPr>
+        <p:txBody>
+          <a:bodyPr wrap="square" lIns="0" tIns="0" rIns="0" bIns="0" rtlCol="0" anchor="ctr"/>
+          <a:lstStyle/>
+          <a:p>
+            <a:pPr algn="ctr" indent="0" marL="0">
+              <a:buNone/>
+            </a:pPr>
+            <a:r>
+              <a:rPr lang="en-US" sz="1900" dirty="0">
+                <a:solidFill>
+                  <a:srgbClr val="9E9E9E"/>
+                </a:solidFill>
+                <a:latin typeface="Zen Maru Gothic" pitchFamily="34" charset="0"/>
+                <a:ea typeface="Zen Maru Gothic" pitchFamily="34" charset="-122"/>
+                <a:cs typeface="Zen Maru Gothic" pitchFamily="34" charset="-120"/>
+              </a:rPr>
+              <a:t>（　　　　　　）が</a:t>
+            </a:r>
+            <a:endParaRPr lang="en-US" sz="1900" dirty="0"/>
+          </a:p>
+          <a:p>
+            <a:pPr algn="ctr" indent="0" marL="0">
+              <a:buNone/>
+            </a:pPr>
+            <a:r>
+              <a:rPr lang="en-US" sz="1900" dirty="0">
+                <a:solidFill>
+                  <a:srgbClr val="9E9E9E"/>
+                </a:solidFill>
+                <a:latin typeface="Zen Maru Gothic" pitchFamily="34" charset="0"/>
+                <a:ea typeface="Zen Maru Gothic" pitchFamily="34" charset="-122"/>
+                <a:cs typeface="Zen Maru Gothic" pitchFamily="34" charset="-120"/>
+              </a:rPr>
+              <a:t>おもしろいよ</a:t>
+            </a:r>
+            <a:endParaRPr lang="en-US" sz="1900" dirty="0"/>
+          </a:p>
+        </p:txBody>
+      </p:sp>
+      <p:sp>
+        <p:nvSpPr>
+          <p:cNvPr id="10" name="Shape 8"/>
+          <p:cNvSpPr/>
+          <p:nvPr/>
+        </p:nvSpPr>
+        <p:spPr>
+          <a:xfrm>
+            <a:off x="347472" y="4210812"/>
+            <a:ext cx="8449056" cy="786384"/>
+          </a:xfrm>
+          <a:prstGeom prst="roundRect">
+            <a:avLst>
+              <a:gd name="adj" fmla="val 16279"/>
+            </a:avLst>
+          </a:prstGeom>
+          <a:solidFill>
+            <a:srgbClr val="FFE9C7"/>
+          </a:solidFill>
+          <a:ln w="12700">
+            <a:solidFill>
+              <a:srgbClr val="FFE9C7"/>
+            </a:solidFill>
+            <a:prstDash val="solid"/>
+          </a:ln>
+        </p:spPr>
+      </p:sp>
+      <p:sp>
+        <p:nvSpPr>
+          <p:cNvPr id="11" name="Text 9"/>
+          <p:cNvSpPr/>
+          <p:nvPr/>
+        </p:nvSpPr>
+        <p:spPr>
+          <a:xfrm>
+            <a:off x="457200" y="4238244"/>
+            <a:ext cx="8229600" cy="219456"/>
+          </a:xfrm>
+          <a:prstGeom prst="rect">
+            <a:avLst/>
+          </a:prstGeom>
+          <a:noFill/>
+          <a:ln/>
+        </p:spPr>
+        <p:txBody>
+          <a:bodyPr wrap="square" lIns="0" tIns="0" rIns="0" bIns="0" rtlCol="0" anchor="ctr"/>
+          <a:lstStyle/>
+          <a:p>
+            <a:pPr algn="l" indent="0" marL="0">
+              <a:buNone/>
+            </a:pPr>
+            <a:r>
+              <a:rPr lang="en-US" sz="1100" dirty="0">
+                <a:solidFill>
+                  <a:srgbClr val="8D6E63"/>
+                </a:solidFill>
+                <a:latin typeface="Zen Maru Gothic" pitchFamily="34" charset="0"/>
+                <a:ea typeface="Zen Maru Gothic" pitchFamily="34" charset="-122"/>
+                <a:cs typeface="Zen Maru Gothic" pitchFamily="34" charset="-120"/>
+              </a:rPr>
+              <a:t>ことばカード … つかう ことばを、上の（　）の ところへ ドラッグしよう</a:t>
+            </a:r>
+            <a:endParaRPr lang="en-US" sz="1100" dirty="0"/>
+          </a:p>
+        </p:txBody>
+      </p:sp>
+      <p:sp>
+        <p:nvSpPr>
+          <p:cNvPr id="12" name="Shape 10"/>
+          <p:cNvSpPr/>
+          <p:nvPr/>
+        </p:nvSpPr>
+        <p:spPr>
+          <a:xfrm>
+            <a:off x="457200" y="4503420"/>
+            <a:ext cx="1313688" cy="420624"/>
+          </a:xfrm>
+          <a:prstGeom prst="roundRect">
+            <a:avLst>
+              <a:gd name="adj" fmla="val 43478"/>
+            </a:avLst>
+          </a:prstGeom>
+          <a:solidFill>
+            <a:srgbClr val="FFFFFF"/>
+          </a:solidFill>
+          <a:ln w="25400">
+            <a:solidFill>
+              <a:srgbClr val="FFCC80"/>
+            </a:solidFill>
+            <a:prstDash val="solid"/>
+          </a:ln>
+        </p:spPr>
+      </p:sp>
+      <p:sp>
+        <p:nvSpPr>
+          <p:cNvPr id="13" name="Text 11"/>
+          <p:cNvSpPr/>
+          <p:nvPr/>
+        </p:nvSpPr>
+        <p:spPr>
+          <a:xfrm>
+            <a:off x="484632" y="4503420"/>
+            <a:ext cx="1258824" cy="420624"/>
+          </a:xfrm>
+          <a:prstGeom prst="rect">
+            <a:avLst/>
+          </a:prstGeom>
+          <a:noFill/>
+          <a:ln/>
+        </p:spPr>
+        <p:txBody>
+          <a:bodyPr wrap="square" lIns="0" tIns="0" rIns="0" bIns="0" rtlCol="0" anchor="ctr"/>
+          <a:lstStyle/>
+          <a:p>
+            <a:pPr algn="ctr" indent="0" marL="0">
+              <a:buNone/>
+            </a:pPr>
+            <a:r>
+              <a:rPr lang="en-US" sz="1100" b="1" dirty="0">
+                <a:solidFill>
+                  <a:srgbClr val="6D4C41"/>
+                </a:solidFill>
+                <a:latin typeface="Zen Maru Gothic" pitchFamily="34" charset="0"/>
+                <a:ea typeface="Zen Maru Gothic" pitchFamily="34" charset="-122"/>
+                <a:cs typeface="Zen Maru Gothic" pitchFamily="34" charset="-120"/>
+              </a:rPr>
+              <a:t>くるくる まわる</a:t>
+            </a:r>
+            <a:endParaRPr lang="en-US" sz="1100" dirty="0"/>
+          </a:p>
+        </p:txBody>
+      </p:sp>
+      <p:sp>
+        <p:nvSpPr>
+          <p:cNvPr id="14" name="Shape 12"/>
+          <p:cNvSpPr/>
+          <p:nvPr/>
+        </p:nvSpPr>
+        <p:spPr>
+          <a:xfrm>
+            <a:off x="1844040" y="4503420"/>
+            <a:ext cx="1313688" cy="420624"/>
+          </a:xfrm>
+          <a:prstGeom prst="roundRect">
+            <a:avLst>
+              <a:gd name="adj" fmla="val 43478"/>
+            </a:avLst>
+          </a:prstGeom>
+          <a:solidFill>
+            <a:srgbClr val="FFFFFF"/>
+          </a:solidFill>
+          <a:ln w="25400">
+            <a:solidFill>
+              <a:srgbClr val="FFCC80"/>
+            </a:solidFill>
+            <a:prstDash val="solid"/>
+          </a:ln>
+        </p:spPr>
+      </p:sp>
+      <p:sp>
+        <p:nvSpPr>
+          <p:cNvPr id="15" name="Text 13"/>
+          <p:cNvSpPr/>
+          <p:nvPr/>
+        </p:nvSpPr>
+        <p:spPr>
+          <a:xfrm>
+            <a:off x="1871472" y="4503420"/>
+            <a:ext cx="1258824" cy="420624"/>
+          </a:xfrm>
+          <a:prstGeom prst="rect">
+            <a:avLst/>
+          </a:prstGeom>
+          <a:noFill/>
+          <a:ln/>
+        </p:spPr>
+        <p:txBody>
+          <a:bodyPr wrap="square" lIns="0" tIns="0" rIns="0" bIns="0" rtlCol="0" anchor="ctr"/>
+          <a:lstStyle/>
+          <a:p>
+            <a:pPr algn="ctr" indent="0" marL="0">
+              <a:buNone/>
+            </a:pPr>
+            <a:r>
+              <a:rPr lang="en-US" sz="1200" b="1" dirty="0">
+                <a:solidFill>
+                  <a:srgbClr val="6D4C41"/>
+                </a:solidFill>
+                <a:latin typeface="Zen Maru Gothic" pitchFamily="34" charset="0"/>
+                <a:ea typeface="Zen Maru Gothic" pitchFamily="34" charset="-122"/>
+                <a:cs typeface="Zen Maru Gothic" pitchFamily="34" charset="-120"/>
+              </a:rPr>
+              <a:t>ころがる</a:t>
+            </a:r>
+            <a:endParaRPr lang="en-US" sz="1200" dirty="0"/>
+          </a:p>
+        </p:txBody>
+      </p:sp>
+      <p:sp>
+        <p:nvSpPr>
+          <p:cNvPr id="16" name="Shape 14"/>
+          <p:cNvSpPr/>
+          <p:nvPr/>
+        </p:nvSpPr>
+        <p:spPr>
+          <a:xfrm>
+            <a:off x="3230880" y="4503420"/>
+            <a:ext cx="1313688" cy="420624"/>
+          </a:xfrm>
+          <a:prstGeom prst="roundRect">
+            <a:avLst>
+              <a:gd name="adj" fmla="val 43478"/>
+            </a:avLst>
+          </a:prstGeom>
+          <a:solidFill>
+            <a:srgbClr val="FFFFFF"/>
+          </a:solidFill>
+          <a:ln w="25400">
+            <a:solidFill>
+              <a:srgbClr val="FFCC80"/>
+            </a:solidFill>
+            <a:prstDash val="solid"/>
+          </a:ln>
+        </p:spPr>
+      </p:sp>
+      <p:sp>
+        <p:nvSpPr>
+          <p:cNvPr id="17" name="Text 15"/>
+          <p:cNvSpPr/>
+          <p:nvPr/>
+        </p:nvSpPr>
+        <p:spPr>
+          <a:xfrm>
+            <a:off x="3258312" y="4503420"/>
+            <a:ext cx="1258824" cy="420624"/>
+          </a:xfrm>
+          <a:prstGeom prst="rect">
+            <a:avLst/>
+          </a:prstGeom>
+          <a:noFill/>
+          <a:ln/>
+        </p:spPr>
+        <p:txBody>
+          <a:bodyPr wrap="square" lIns="0" tIns="0" rIns="0" bIns="0" rtlCol="0" anchor="ctr"/>
+          <a:lstStyle/>
+          <a:p>
+            <a:pPr algn="ctr" indent="0" marL="0">
+              <a:buNone/>
+            </a:pPr>
+            <a:r>
+              <a:rPr lang="en-US" sz="1100" b="1" dirty="0">
+                <a:solidFill>
+                  <a:srgbClr val="6D4C41"/>
+                </a:solidFill>
+                <a:latin typeface="Zen Maru Gothic" pitchFamily="34" charset="0"/>
+                <a:ea typeface="Zen Maru Gothic" pitchFamily="34" charset="-122"/>
+                <a:cs typeface="Zen Maru Gothic" pitchFamily="34" charset="-120"/>
+              </a:rPr>
+              <a:t>ぴょんと とぶ</a:t>
+            </a:r>
+            <a:endParaRPr lang="en-US" sz="1100" dirty="0"/>
+          </a:p>
+        </p:txBody>
+      </p:sp>
+      <p:sp>
+        <p:nvSpPr>
+          <p:cNvPr id="18" name="Shape 16"/>
+          <p:cNvSpPr/>
+          <p:nvPr/>
+        </p:nvSpPr>
+        <p:spPr>
+          <a:xfrm>
+            <a:off x="4617720" y="4503420"/>
+            <a:ext cx="1313688" cy="420624"/>
+          </a:xfrm>
+          <a:prstGeom prst="roundRect">
+            <a:avLst>
+              <a:gd name="adj" fmla="val 43478"/>
+            </a:avLst>
+          </a:prstGeom>
+          <a:solidFill>
+            <a:srgbClr val="FFFFFF"/>
+          </a:solidFill>
+          <a:ln w="25400">
+            <a:solidFill>
+              <a:srgbClr val="FFCC80"/>
+            </a:solidFill>
+            <a:prstDash val="solid"/>
+          </a:ln>
+        </p:spPr>
+      </p:sp>
+      <p:sp>
+        <p:nvSpPr>
+          <p:cNvPr id="19" name="Text 17"/>
+          <p:cNvSpPr/>
+          <p:nvPr/>
+        </p:nvSpPr>
+        <p:spPr>
+          <a:xfrm>
+            <a:off x="4645152" y="4503420"/>
+            <a:ext cx="1258824" cy="420624"/>
+          </a:xfrm>
+          <a:prstGeom prst="rect">
+            <a:avLst/>
+          </a:prstGeom>
+          <a:noFill/>
+          <a:ln/>
+        </p:spPr>
+        <p:txBody>
+          <a:bodyPr wrap="square" lIns="0" tIns="0" rIns="0" bIns="0" rtlCol="0" anchor="ctr"/>
+          <a:lstStyle/>
+          <a:p>
+            <a:pPr algn="ctr" indent="0" marL="0">
+              <a:buNone/>
+            </a:pPr>
+            <a:r>
+              <a:rPr lang="en-US" sz="1200" b="1" dirty="0">
+                <a:solidFill>
+                  <a:srgbClr val="6D4C41"/>
+                </a:solidFill>
+                <a:latin typeface="Zen Maru Gothic" pitchFamily="34" charset="0"/>
+                <a:ea typeface="Zen Maru Gothic" pitchFamily="34" charset="-122"/>
+                <a:cs typeface="Zen Maru Gothic" pitchFamily="34" charset="-120"/>
+              </a:rPr>
+              <a:t>おとが なる</a:t>
+            </a:r>
+            <a:endParaRPr lang="en-US" sz="1200" dirty="0"/>
+          </a:p>
+        </p:txBody>
+      </p:sp>
+      <p:sp>
+        <p:nvSpPr>
+          <p:cNvPr id="20" name="Shape 18"/>
+          <p:cNvSpPr/>
+          <p:nvPr/>
+        </p:nvSpPr>
+        <p:spPr>
+          <a:xfrm>
+            <a:off x="6004560" y="4503420"/>
+            <a:ext cx="1313688" cy="420624"/>
+          </a:xfrm>
+          <a:prstGeom prst="roundRect">
+            <a:avLst>
+              <a:gd name="adj" fmla="val 43478"/>
+            </a:avLst>
+          </a:prstGeom>
+          <a:solidFill>
+            <a:srgbClr val="FFFFFF"/>
+          </a:solidFill>
+          <a:ln w="25400">
+            <a:solidFill>
+              <a:srgbClr val="FFCC80"/>
+            </a:solidFill>
+            <a:prstDash val="solid"/>
+          </a:ln>
+        </p:spPr>
+      </p:sp>
+      <p:sp>
+        <p:nvSpPr>
+          <p:cNvPr id="21" name="Text 19"/>
+          <p:cNvSpPr/>
+          <p:nvPr/>
+        </p:nvSpPr>
+        <p:spPr>
+          <a:xfrm>
+            <a:off x="6031992" y="4503420"/>
+            <a:ext cx="1258824" cy="420624"/>
+          </a:xfrm>
+          <a:prstGeom prst="rect">
+            <a:avLst/>
+          </a:prstGeom>
+          <a:noFill/>
+          <a:ln/>
+        </p:spPr>
+        <p:txBody>
+          <a:bodyPr wrap="square" lIns="0" tIns="0" rIns="0" bIns="0" rtlCol="0" anchor="ctr"/>
+          <a:lstStyle/>
+          <a:p>
+            <a:pPr algn="ctr" indent="0" marL="0">
+              <a:buNone/>
+            </a:pPr>
+            <a:r>
+              <a:rPr lang="en-US" sz="1100" b="1" dirty="0">
+                <a:solidFill>
+                  <a:srgbClr val="6D4C41"/>
+                </a:solidFill>
+                <a:latin typeface="Zen Maru Gothic" pitchFamily="34" charset="0"/>
+                <a:ea typeface="Zen Maru Gothic" pitchFamily="34" charset="-122"/>
+                <a:cs typeface="Zen Maru Gothic" pitchFamily="34" charset="-120"/>
+              </a:rPr>
+              <a:t>かぶって あそぶ</a:t>
+            </a:r>
+            <a:endParaRPr lang="en-US" sz="1100" dirty="0"/>
+          </a:p>
+        </p:txBody>
+      </p:sp>
+      <p:sp>
+        <p:nvSpPr>
+          <p:cNvPr id="22" name="Shape 20"/>
+          <p:cNvSpPr/>
+          <p:nvPr/>
+        </p:nvSpPr>
+        <p:spPr>
+          <a:xfrm>
+            <a:off x="7391400" y="4503420"/>
+            <a:ext cx="1313688" cy="420624"/>
+          </a:xfrm>
+          <a:prstGeom prst="roundRect">
+            <a:avLst>
+              <a:gd name="adj" fmla="val 43478"/>
+            </a:avLst>
+          </a:prstGeom>
+          <a:solidFill>
+            <a:srgbClr val="FFFFFF"/>
+          </a:solidFill>
+          <a:ln w="25400">
+            <a:solidFill>
+              <a:srgbClr val="FFCC80"/>
+            </a:solidFill>
+            <a:prstDash val="solid"/>
+          </a:ln>
+        </p:spPr>
+      </p:sp>
+      <p:sp>
+        <p:nvSpPr>
+          <p:cNvPr id="23" name="Text 21"/>
+          <p:cNvSpPr/>
+          <p:nvPr/>
+        </p:nvSpPr>
+        <p:spPr>
+          <a:xfrm>
+            <a:off x="7418832" y="4503420"/>
+            <a:ext cx="1258824" cy="420624"/>
+          </a:xfrm>
+          <a:prstGeom prst="rect">
+            <a:avLst/>
+          </a:prstGeom>
+          <a:noFill/>
+          <a:ln/>
+        </p:spPr>
+        <p:txBody>
+          <a:bodyPr wrap="square" lIns="0" tIns="0" rIns="0" bIns="0" rtlCol="0" anchor="ctr"/>
+          <a:lstStyle/>
+          <a:p>
+            <a:pPr algn="ctr" indent="0" marL="0">
+              <a:buNone/>
+            </a:pPr>
+            <a:r>
+              <a:rPr lang="en-US" sz="1100" b="1" dirty="0">
+                <a:solidFill>
+                  <a:srgbClr val="6D4C41"/>
+                </a:solidFill>
+                <a:latin typeface="Zen Maru Gothic" pitchFamily="34" charset="0"/>
+                <a:ea typeface="Zen Maru Gothic" pitchFamily="34" charset="-122"/>
+                <a:cs typeface="Zen Maru Gothic" pitchFamily="34" charset="-120"/>
+              </a:rPr>
+              <a:t>ゆらゆら する</a:t>
+            </a:r>
+            <a:endParaRPr lang="en-US" sz="1100" dirty="0"/>
+          </a:p>
+        </p:txBody>
+      </p:sp>
+    </p:spTree>
+  </p:cSld>
+  <p:clrMapOvr>
+    <a:masterClrMapping/>
+  </p:clrMapOvr>
+</p:sld>
+</file>
+
+<file path=ppt/slides/slide11.xml><?xml version="1.0" encoding="utf-8"?>
+<p:sld xmlns:a="http://schemas.openxmlformats.org/drawingml/2006/main" xmlns:r="http://schemas.openxmlformats.org/officeDocument/2006/relationships" xmlns:p="http://schemas.openxmlformats.org/presentationml/2006/main">
+  <p:cSld name="Slide 11">
+    <p:bg>
+      <p:bgPr>
+        <a:solidFill>
+          <a:srgbClr val="FFF6E5"/>
+        </a:solidFill>
+      </p:bgPr>
+    </p:bg>
+    <p:spTree>
+      <p:nvGrpSpPr>
+        <p:cNvPr id="1" name=""/>
+        <p:cNvGrpSpPr/>
+        <p:nvPr/>
+      </p:nvGrpSpPr>
+      <p:grpSpPr>
+        <a:xfrm>
+          <a:off x="0" y="0"/>
+          <a:ext cx="0" cy="0"/>
+          <a:chOff x="0" y="0"/>
+          <a:chExt cx="0" cy="0"/>
+        </a:xfrm>
+      </p:grpSpPr>
+      <p:sp>
+        <p:nvSpPr>
+          <p:cNvPr id="2" name="Shape 0"/>
+          <p:cNvSpPr/>
+          <p:nvPr/>
+        </p:nvSpPr>
+        <p:spPr>
+          <a:xfrm>
+            <a:off x="347472" y="201168"/>
+            <a:ext cx="8449056" cy="658368"/>
+          </a:xfrm>
+          <a:prstGeom prst="roundRect">
+            <a:avLst>
+              <a:gd name="adj" fmla="val 22222"/>
+            </a:avLst>
+          </a:prstGeom>
+          <a:solidFill>
+            <a:srgbClr val="FF9800"/>
+          </a:solidFill>
+          <a:ln w="12700">
+            <a:solidFill>
+              <a:srgbClr val="FF9800"/>
+            </a:solidFill>
+            <a:prstDash val="solid"/>
+          </a:ln>
+        </p:spPr>
+      </p:sp>
+      <p:sp>
+        <p:nvSpPr>
+          <p:cNvPr id="3" name="Text 1"/>
+          <p:cNvSpPr/>
+          <p:nvPr/>
+        </p:nvSpPr>
+        <p:spPr>
+          <a:xfrm>
+            <a:off x="347472" y="201168"/>
+            <a:ext cx="8449056" cy="658368"/>
+          </a:xfrm>
+          <a:prstGeom prst="rect">
+            <a:avLst/>
+          </a:prstGeom>
+          <a:noFill/>
+          <a:ln/>
+        </p:spPr>
+        <p:txBody>
+          <a:bodyPr wrap="square" lIns="0" tIns="0" rIns="0" bIns="0" rtlCol="0" anchor="ctr"/>
+          <a:lstStyle/>
+          <a:p>
+            <a:pPr algn="ctr" indent="0" marL="0">
+              <a:buNone/>
+            </a:pPr>
+            <a:r>
+              <a:rPr lang="en-US" sz="2600" b="1" dirty="0">
+                <a:solidFill>
+                  <a:srgbClr val="FFFFFF"/>
+                </a:solidFill>
+                <a:latin typeface="Zen Maru Gothic" pitchFamily="34" charset="0"/>
+                <a:ea typeface="Zen Maru Gothic" pitchFamily="34" charset="-122"/>
+                <a:cs typeface="Zen Maru Gothic" pitchFamily="34" charset="-120"/>
+              </a:rPr>
+              <a:t>くふうした ところ</a:t>
+            </a:r>
+            <a:endParaRPr lang="en-US" sz="2600" dirty="0"/>
+          </a:p>
+        </p:txBody>
+      </p:sp>
+      <p:sp>
+        <p:nvSpPr>
+          <p:cNvPr id="4" name="Shape 2"/>
+          <p:cNvSpPr/>
+          <p:nvPr/>
+        </p:nvSpPr>
+        <p:spPr>
+          <a:xfrm>
+            <a:off x="502920" y="1051560"/>
+            <a:ext cx="5120640" cy="1325880"/>
+          </a:xfrm>
+          <a:prstGeom prst="roundRect">
+            <a:avLst>
+              <a:gd name="adj" fmla="val 8276"/>
+            </a:avLst>
+          </a:prstGeom>
+          <a:solidFill>
+            <a:srgbClr val="FFFFFF"/>
+          </a:solidFill>
+          <a:ln w="31750">
+            <a:solidFill>
+              <a:srgbClr val="FFB74D"/>
+            </a:solidFill>
+            <a:prstDash val="dash"/>
+          </a:ln>
+        </p:spPr>
+      </p:sp>
+      <p:sp>
+        <p:nvSpPr>
+          <p:cNvPr id="5" name="Text 3"/>
+          <p:cNvSpPr/>
+          <p:nvPr/>
+        </p:nvSpPr>
+        <p:spPr>
+          <a:xfrm>
+            <a:off x="612648" y="1051560"/>
+            <a:ext cx="4901184" cy="1325880"/>
+          </a:xfrm>
+          <a:prstGeom prst="rect">
+            <a:avLst/>
+          </a:prstGeom>
+          <a:noFill/>
+          <a:ln/>
+        </p:spPr>
+        <p:txBody>
+          <a:bodyPr wrap="square" lIns="0" tIns="0" rIns="0" bIns="0" rtlCol="0" anchor="ctr"/>
+          <a:lstStyle/>
+          <a:p>
+            <a:pPr algn="ctr" indent="0" marL="0">
+              <a:buNone/>
+            </a:pPr>
+            <a:r>
+              <a:rPr lang="en-US" sz="2000" dirty="0">
+                <a:solidFill>
+                  <a:srgbClr val="9E9E9E"/>
+                </a:solidFill>
+                <a:latin typeface="Zen Maru Gothic" pitchFamily="34" charset="0"/>
+                <a:ea typeface="Zen Maru Gothic" pitchFamily="34" charset="-122"/>
+                <a:cs typeface="Zen Maru Gothic" pitchFamily="34" charset="-120"/>
+              </a:rPr>
+              <a:t>（　　　　　　　　）を</a:t>
+            </a:r>
+            <a:endParaRPr lang="en-US" sz="2000" dirty="0"/>
+          </a:p>
+          <a:p>
+            <a:pPr algn="ctr" indent="0" marL="0">
+              <a:buNone/>
+            </a:pPr>
+            <a:r>
+              <a:rPr lang="en-US" sz="2000" dirty="0">
+                <a:solidFill>
+                  <a:srgbClr val="9E9E9E"/>
+                </a:solidFill>
+                <a:latin typeface="Zen Maru Gothic" pitchFamily="34" charset="0"/>
+                <a:ea typeface="Zen Maru Gothic" pitchFamily="34" charset="-122"/>
+                <a:cs typeface="Zen Maru Gothic" pitchFamily="34" charset="-120"/>
+              </a:rPr>
+              <a:t>くふうしました</a:t>
+            </a:r>
+            <a:endParaRPr lang="en-US" sz="2000" dirty="0"/>
+          </a:p>
+        </p:txBody>
+      </p:sp>
+      <p:sp>
+        <p:nvSpPr>
+          <p:cNvPr id="6" name="Shape 4"/>
+          <p:cNvSpPr/>
+          <p:nvPr/>
+        </p:nvSpPr>
+        <p:spPr>
+          <a:xfrm>
+            <a:off x="502920" y="2514600"/>
+            <a:ext cx="5120640" cy="1371600"/>
+          </a:xfrm>
+          <a:prstGeom prst="roundRect">
+            <a:avLst>
+              <a:gd name="adj" fmla="val 8000"/>
+            </a:avLst>
+          </a:prstGeom>
+          <a:solidFill>
+            <a:srgbClr val="FFFFFF"/>
+          </a:solidFill>
+          <a:ln w="31750">
+            <a:solidFill>
+              <a:srgbClr val="FFB74D"/>
+            </a:solidFill>
+            <a:prstDash val="dash"/>
+          </a:ln>
+        </p:spPr>
+      </p:sp>
+      <p:sp>
+        <p:nvSpPr>
+          <p:cNvPr id="7" name="Text 5"/>
+          <p:cNvSpPr/>
+          <p:nvPr/>
+        </p:nvSpPr>
+        <p:spPr>
+          <a:xfrm>
+            <a:off x="612648" y="2514600"/>
+            <a:ext cx="4901184" cy="1371600"/>
+          </a:xfrm>
+          <a:prstGeom prst="rect">
+            <a:avLst/>
+          </a:prstGeom>
+          <a:noFill/>
+          <a:ln/>
+        </p:spPr>
+        <p:txBody>
+          <a:bodyPr wrap="square" lIns="0" tIns="0" rIns="0" bIns="0" rtlCol="0" anchor="ctr"/>
+          <a:lstStyle/>
+          <a:p>
+            <a:pPr algn="ctr" indent="0" marL="0">
+              <a:buNone/>
+            </a:pPr>
+            <a:r>
+              <a:rPr lang="en-US" sz="2000" dirty="0">
+                <a:solidFill>
+                  <a:srgbClr val="9E9E9E"/>
+                </a:solidFill>
+                <a:latin typeface="Zen Maru Gothic" pitchFamily="34" charset="0"/>
+                <a:ea typeface="Zen Maru Gothic" pitchFamily="34" charset="-122"/>
+                <a:cs typeface="Zen Maru Gothic" pitchFamily="34" charset="-120"/>
+              </a:rPr>
+              <a:t>（　　　　　　　　）が</a:t>
+            </a:r>
+            <a:endParaRPr lang="en-US" sz="2000" dirty="0"/>
+          </a:p>
+          <a:p>
+            <a:pPr algn="ctr" indent="0" marL="0">
+              <a:buNone/>
+            </a:pPr>
+            <a:r>
+              <a:rPr lang="en-US" sz="2000" dirty="0">
+                <a:solidFill>
+                  <a:srgbClr val="9E9E9E"/>
+                </a:solidFill>
+                <a:latin typeface="Zen Maru Gothic" pitchFamily="34" charset="0"/>
+                <a:ea typeface="Zen Maru Gothic" pitchFamily="34" charset="-122"/>
+                <a:cs typeface="Zen Maru Gothic" pitchFamily="34" charset="-120"/>
+              </a:rPr>
+              <a:t>むずかしかったよ</a:t>
+            </a:r>
+            <a:endParaRPr lang="en-US" sz="2000" dirty="0"/>
+          </a:p>
+        </p:txBody>
+      </p:sp>
+      <p:pic>
+        <p:nvPicPr>
+          <p:cNvPr id="8" name="Image 0" descr="illust/yajirobe.png">    </p:cNvPr>
+          <p:cNvPicPr>
+            <a:picLocks noChangeAspect="1"/>
+          </p:cNvPicPr>
+          <p:nvPr/>
+        </p:nvPicPr>
+        <p:blipFill>
+          <a:blip r:embed="rId1"/>
+          <a:stretch>
+            <a:fillRect/>
+          </a:stretch>
+        </p:blipFill>
+        <p:spPr>
+          <a:xfrm>
+            <a:off x="6035040" y="1234440"/>
+            <a:ext cx="1371600" cy="1371600"/>
+          </a:xfrm>
+          <a:prstGeom prst="rect">
+            <a:avLst/>
+          </a:prstGeom>
+        </p:spPr>
+      </p:pic>
+      <p:pic>
+        <p:nvPicPr>
+          <p:cNvPr id="9" name="Image 1" descr="illust/komma.png">    </p:cNvPr>
+          <p:cNvPicPr>
+            <a:picLocks noChangeAspect="1"/>
+          </p:cNvPicPr>
+          <p:nvPr/>
+        </p:nvPicPr>
+        <p:blipFill>
+          <a:blip r:embed="rId2"/>
+          <a:stretch>
+            <a:fillRect/>
+          </a:stretch>
+        </p:blipFill>
+        <p:spPr>
+          <a:xfrm>
+            <a:off x="7315200" y="2377440"/>
+            <a:ext cx="1280160" cy="1280160"/>
+          </a:xfrm>
+          <a:prstGeom prst="rect">
+            <a:avLst/>
+          </a:prstGeom>
+        </p:spPr>
+      </p:pic>
+      <p:sp>
+        <p:nvSpPr>
+          <p:cNvPr id="10" name="Shape 6"/>
+          <p:cNvSpPr/>
+          <p:nvPr/>
+        </p:nvSpPr>
+        <p:spPr>
+          <a:xfrm>
+            <a:off x="347472" y="4210812"/>
+            <a:ext cx="8449056" cy="786384"/>
+          </a:xfrm>
+          <a:prstGeom prst="roundRect">
+            <a:avLst>
+              <a:gd name="adj" fmla="val 16279"/>
+            </a:avLst>
+          </a:prstGeom>
+          <a:solidFill>
+            <a:srgbClr val="FFE9C7"/>
+          </a:solidFill>
+          <a:ln w="12700">
+            <a:solidFill>
+              <a:srgbClr val="FFE9C7"/>
+            </a:solidFill>
+            <a:prstDash val="solid"/>
+          </a:ln>
+        </p:spPr>
+      </p:sp>
+      <p:sp>
+        <p:nvSpPr>
+          <p:cNvPr id="11" name="Text 7"/>
+          <p:cNvSpPr/>
+          <p:nvPr/>
+        </p:nvSpPr>
+        <p:spPr>
+          <a:xfrm>
+            <a:off x="457200" y="4238244"/>
+            <a:ext cx="8229600" cy="219456"/>
+          </a:xfrm>
+          <a:prstGeom prst="rect">
+            <a:avLst/>
+          </a:prstGeom>
+          <a:noFill/>
+          <a:ln/>
+        </p:spPr>
+        <p:txBody>
+          <a:bodyPr wrap="square" lIns="0" tIns="0" rIns="0" bIns="0" rtlCol="0" anchor="ctr"/>
+          <a:lstStyle/>
+          <a:p>
+            <a:pPr algn="l" indent="0" marL="0">
+              <a:buNone/>
+            </a:pPr>
+            <a:r>
+              <a:rPr lang="en-US" sz="1100" dirty="0">
+                <a:solidFill>
+                  <a:srgbClr val="8D6E63"/>
+                </a:solidFill>
+                <a:latin typeface="Zen Maru Gothic" pitchFamily="34" charset="0"/>
+                <a:ea typeface="Zen Maru Gothic" pitchFamily="34" charset="-122"/>
+                <a:cs typeface="Zen Maru Gothic" pitchFamily="34" charset="-120"/>
+              </a:rPr>
+              <a:t>ことばカード … つかう ことばを、上の（　）の ところへ ドラッグしよう</a:t>
+            </a:r>
+            <a:endParaRPr lang="en-US" sz="1100" dirty="0"/>
+          </a:p>
+        </p:txBody>
+      </p:sp>
+      <p:sp>
+        <p:nvSpPr>
+          <p:cNvPr id="12" name="Shape 8"/>
+          <p:cNvSpPr/>
+          <p:nvPr/>
+        </p:nvSpPr>
+        <p:spPr>
+          <a:xfrm>
+            <a:off x="457200" y="4503420"/>
+            <a:ext cx="1313688" cy="420624"/>
+          </a:xfrm>
+          <a:prstGeom prst="roundRect">
+            <a:avLst>
+              <a:gd name="adj" fmla="val 43478"/>
+            </a:avLst>
+          </a:prstGeom>
+          <a:solidFill>
+            <a:srgbClr val="FFFFFF"/>
+          </a:solidFill>
+          <a:ln w="25400">
+            <a:solidFill>
+              <a:srgbClr val="FFCC80"/>
+            </a:solidFill>
+            <a:prstDash val="solid"/>
+          </a:ln>
+        </p:spPr>
+      </p:sp>
+      <p:sp>
+        <p:nvSpPr>
+          <p:cNvPr id="13" name="Text 9"/>
+          <p:cNvSpPr/>
+          <p:nvPr/>
+        </p:nvSpPr>
+        <p:spPr>
+          <a:xfrm>
+            <a:off x="484632" y="4503420"/>
+            <a:ext cx="1258824" cy="420624"/>
+          </a:xfrm>
+          <a:prstGeom prst="rect">
+            <a:avLst/>
+          </a:prstGeom>
+          <a:noFill/>
+          <a:ln/>
+        </p:spPr>
+        <p:txBody>
+          <a:bodyPr wrap="square" lIns="0" tIns="0" rIns="0" bIns="0" rtlCol="0" anchor="ctr"/>
+          <a:lstStyle/>
+          <a:p>
+            <a:pPr algn="ctr" indent="0" marL="0">
+              <a:buNone/>
+            </a:pPr>
+            <a:r>
+              <a:rPr lang="en-US" sz="1200" b="1" dirty="0">
+                <a:solidFill>
+                  <a:srgbClr val="6D4C41"/>
+                </a:solidFill>
+                <a:latin typeface="Zen Maru Gothic" pitchFamily="34" charset="0"/>
+                <a:ea typeface="Zen Maru Gothic" pitchFamily="34" charset="-122"/>
+                <a:cs typeface="Zen Maru Gothic" pitchFamily="34" charset="-120"/>
+              </a:rPr>
+              <a:t>いろ</a:t>
+            </a:r>
+            <a:endParaRPr lang="en-US" sz="1200" dirty="0"/>
+          </a:p>
+        </p:txBody>
+      </p:sp>
+      <p:sp>
+        <p:nvSpPr>
+          <p:cNvPr id="14" name="Shape 10"/>
+          <p:cNvSpPr/>
+          <p:nvPr/>
+        </p:nvSpPr>
+        <p:spPr>
+          <a:xfrm>
+            <a:off x="1844040" y="4503420"/>
+            <a:ext cx="1313688" cy="420624"/>
+          </a:xfrm>
+          <a:prstGeom prst="roundRect">
+            <a:avLst>
+              <a:gd name="adj" fmla="val 43478"/>
+            </a:avLst>
+          </a:prstGeom>
+          <a:solidFill>
+            <a:srgbClr val="FFFFFF"/>
+          </a:solidFill>
+          <a:ln w="25400">
+            <a:solidFill>
+              <a:srgbClr val="FFCC80"/>
+            </a:solidFill>
+            <a:prstDash val="solid"/>
+          </a:ln>
+        </p:spPr>
+      </p:sp>
+      <p:sp>
+        <p:nvSpPr>
+          <p:cNvPr id="15" name="Text 11"/>
+          <p:cNvSpPr/>
+          <p:nvPr/>
+        </p:nvSpPr>
+        <p:spPr>
+          <a:xfrm>
+            <a:off x="1871472" y="4503420"/>
+            <a:ext cx="1258824" cy="420624"/>
+          </a:xfrm>
+          <a:prstGeom prst="rect">
+            <a:avLst/>
+          </a:prstGeom>
+          <a:noFill/>
+          <a:ln/>
+        </p:spPr>
+        <p:txBody>
+          <a:bodyPr wrap="square" lIns="0" tIns="0" rIns="0" bIns="0" rtlCol="0" anchor="ctr"/>
+          <a:lstStyle/>
+          <a:p>
+            <a:pPr algn="ctr" indent="0" marL="0">
+              <a:buNone/>
+            </a:pPr>
+            <a:r>
+              <a:rPr lang="en-US" sz="1200" b="1" dirty="0">
+                <a:solidFill>
+                  <a:srgbClr val="6D4C41"/>
+                </a:solidFill>
+                <a:latin typeface="Zen Maru Gothic" pitchFamily="34" charset="0"/>
+                <a:ea typeface="Zen Maru Gothic" pitchFamily="34" charset="-122"/>
+                <a:cs typeface="Zen Maru Gothic" pitchFamily="34" charset="-120"/>
+              </a:rPr>
+              <a:t>おおきさ</a:t>
+            </a:r>
+            <a:endParaRPr lang="en-US" sz="1200" dirty="0"/>
+          </a:p>
+        </p:txBody>
+      </p:sp>
+      <p:sp>
+        <p:nvSpPr>
+          <p:cNvPr id="16" name="Shape 12"/>
+          <p:cNvSpPr/>
+          <p:nvPr/>
+        </p:nvSpPr>
+        <p:spPr>
+          <a:xfrm>
+            <a:off x="3230880" y="4503420"/>
+            <a:ext cx="1313688" cy="420624"/>
+          </a:xfrm>
+          <a:prstGeom prst="roundRect">
+            <a:avLst>
+              <a:gd name="adj" fmla="val 43478"/>
+            </a:avLst>
+          </a:prstGeom>
+          <a:solidFill>
+            <a:srgbClr val="FFFFFF"/>
+          </a:solidFill>
+          <a:ln w="25400">
+            <a:solidFill>
+              <a:srgbClr val="FFCC80"/>
+            </a:solidFill>
+            <a:prstDash val="solid"/>
+          </a:ln>
+        </p:spPr>
+      </p:sp>
+      <p:sp>
+        <p:nvSpPr>
+          <p:cNvPr id="17" name="Text 13"/>
+          <p:cNvSpPr/>
+          <p:nvPr/>
+        </p:nvSpPr>
+        <p:spPr>
+          <a:xfrm>
+            <a:off x="3258312" y="4503420"/>
+            <a:ext cx="1258824" cy="420624"/>
+          </a:xfrm>
+          <a:prstGeom prst="rect">
+            <a:avLst/>
+          </a:prstGeom>
+          <a:noFill/>
+          <a:ln/>
+        </p:spPr>
+        <p:txBody>
+          <a:bodyPr wrap="square" lIns="0" tIns="0" rIns="0" bIns="0" rtlCol="0" anchor="ctr"/>
+          <a:lstStyle/>
+          <a:p>
+            <a:pPr algn="ctr" indent="0" marL="0">
+              <a:buNone/>
+            </a:pPr>
+            <a:r>
+              <a:rPr lang="en-US" sz="1200" b="1" dirty="0">
+                <a:solidFill>
+                  <a:srgbClr val="6D4C41"/>
+                </a:solidFill>
+                <a:latin typeface="Zen Maru Gothic" pitchFamily="34" charset="0"/>
+                <a:ea typeface="Zen Maru Gothic" pitchFamily="34" charset="-122"/>
+                <a:cs typeface="Zen Maru Gothic" pitchFamily="34" charset="-120"/>
+              </a:rPr>
+              <a:t>もよう</a:t>
+            </a:r>
+            <a:endParaRPr lang="en-US" sz="1200" dirty="0"/>
+          </a:p>
+        </p:txBody>
+      </p:sp>
+      <p:sp>
+        <p:nvSpPr>
+          <p:cNvPr id="18" name="Shape 14"/>
+          <p:cNvSpPr/>
+          <p:nvPr/>
+        </p:nvSpPr>
+        <p:spPr>
+          <a:xfrm>
+            <a:off x="4617720" y="4503420"/>
+            <a:ext cx="1313688" cy="420624"/>
+          </a:xfrm>
+          <a:prstGeom prst="roundRect">
+            <a:avLst>
+              <a:gd name="adj" fmla="val 43478"/>
+            </a:avLst>
+          </a:prstGeom>
+          <a:solidFill>
+            <a:srgbClr val="FFFFFF"/>
+          </a:solidFill>
+          <a:ln w="25400">
+            <a:solidFill>
+              <a:srgbClr val="FFCC80"/>
+            </a:solidFill>
+            <a:prstDash val="solid"/>
+          </a:ln>
+        </p:spPr>
+      </p:sp>
+      <p:sp>
+        <p:nvSpPr>
+          <p:cNvPr id="19" name="Text 15"/>
+          <p:cNvSpPr/>
+          <p:nvPr/>
+        </p:nvSpPr>
+        <p:spPr>
+          <a:xfrm>
+            <a:off x="4645152" y="4503420"/>
+            <a:ext cx="1258824" cy="420624"/>
+          </a:xfrm>
+          <a:prstGeom prst="rect">
+            <a:avLst/>
+          </a:prstGeom>
+          <a:noFill/>
+          <a:ln/>
+        </p:spPr>
+        <p:txBody>
+          <a:bodyPr wrap="square" lIns="0" tIns="0" rIns="0" bIns="0" rtlCol="0" anchor="ctr"/>
+          <a:lstStyle/>
+          <a:p>
+            <a:pPr algn="ctr" indent="0" marL="0">
+              <a:buNone/>
+            </a:pPr>
+            <a:r>
+              <a:rPr lang="en-US" sz="1100" b="1" dirty="0">
+                <a:solidFill>
+                  <a:srgbClr val="6D4C41"/>
+                </a:solidFill>
+                <a:latin typeface="Zen Maru Gothic" pitchFamily="34" charset="0"/>
+                <a:ea typeface="Zen Maru Gothic" pitchFamily="34" charset="-122"/>
+                <a:cs typeface="Zen Maru Gothic" pitchFamily="34" charset="-120"/>
+              </a:rPr>
+              <a:t>ひもの ながさ</a:t>
+            </a:r>
+            <a:endParaRPr lang="en-US" sz="1100" dirty="0"/>
+          </a:p>
+        </p:txBody>
+      </p:sp>
+      <p:sp>
+        <p:nvSpPr>
+          <p:cNvPr id="20" name="Shape 16"/>
+          <p:cNvSpPr/>
+          <p:nvPr/>
+        </p:nvSpPr>
+        <p:spPr>
+          <a:xfrm>
+            <a:off x="6004560" y="4503420"/>
+            <a:ext cx="1313688" cy="420624"/>
+          </a:xfrm>
+          <a:prstGeom prst="roundRect">
+            <a:avLst>
+              <a:gd name="adj" fmla="val 43478"/>
+            </a:avLst>
+          </a:prstGeom>
+          <a:solidFill>
+            <a:srgbClr val="FFFFFF"/>
+          </a:solidFill>
+          <a:ln w="25400">
+            <a:solidFill>
+              <a:srgbClr val="FFCC80"/>
+            </a:solidFill>
+            <a:prstDash val="solid"/>
+          </a:ln>
+        </p:spPr>
+      </p:sp>
+      <p:sp>
+        <p:nvSpPr>
+          <p:cNvPr id="21" name="Text 17"/>
+          <p:cNvSpPr/>
+          <p:nvPr/>
+        </p:nvSpPr>
+        <p:spPr>
+          <a:xfrm>
+            <a:off x="6031992" y="4503420"/>
+            <a:ext cx="1258824" cy="420624"/>
+          </a:xfrm>
+          <a:prstGeom prst="rect">
+            <a:avLst/>
+          </a:prstGeom>
+          <a:noFill/>
+          <a:ln/>
+        </p:spPr>
+        <p:txBody>
+          <a:bodyPr wrap="square" lIns="0" tIns="0" rIns="0" bIns="0" rtlCol="0" anchor="ctr"/>
+          <a:lstStyle/>
+          <a:p>
+            <a:pPr algn="ctr" indent="0" marL="0">
+              <a:buNone/>
+            </a:pPr>
+            <a:r>
+              <a:rPr lang="en-US" sz="1200" b="1" dirty="0">
+                <a:solidFill>
+                  <a:srgbClr val="6D4C41"/>
+                </a:solidFill>
+                <a:latin typeface="Zen Maru Gothic" pitchFamily="34" charset="0"/>
+                <a:ea typeface="Zen Maru Gothic" pitchFamily="34" charset="-122"/>
+                <a:cs typeface="Zen Maru Gothic" pitchFamily="34" charset="-120"/>
+              </a:rPr>
+              <a:t>かざり</a:t>
+            </a:r>
+            <a:endParaRPr lang="en-US" sz="1200" dirty="0"/>
+          </a:p>
+        </p:txBody>
+      </p:sp>
+      <p:sp>
+        <p:nvSpPr>
+          <p:cNvPr id="22" name="Shape 18"/>
+          <p:cNvSpPr/>
+          <p:nvPr/>
+        </p:nvSpPr>
+        <p:spPr>
+          <a:xfrm>
+            <a:off x="7391400" y="4503420"/>
+            <a:ext cx="1313688" cy="420624"/>
+          </a:xfrm>
+          <a:prstGeom prst="roundRect">
+            <a:avLst>
+              <a:gd name="adj" fmla="val 43478"/>
+            </a:avLst>
+          </a:prstGeom>
+          <a:solidFill>
+            <a:srgbClr val="FFFFFF"/>
+          </a:solidFill>
+          <a:ln w="25400">
+            <a:solidFill>
+              <a:srgbClr val="FFCC80"/>
+            </a:solidFill>
+            <a:prstDash val="solid"/>
+          </a:ln>
+        </p:spPr>
+      </p:sp>
+      <p:sp>
+        <p:nvSpPr>
+          <p:cNvPr id="23" name="Text 19"/>
+          <p:cNvSpPr/>
+          <p:nvPr/>
+        </p:nvSpPr>
+        <p:spPr>
+          <a:xfrm>
+            <a:off x="7418832" y="4503420"/>
+            <a:ext cx="1258824" cy="420624"/>
+          </a:xfrm>
+          <a:prstGeom prst="rect">
+            <a:avLst/>
+          </a:prstGeom>
+          <a:noFill/>
+          <a:ln/>
+        </p:spPr>
+        <p:txBody>
+          <a:bodyPr wrap="square" lIns="0" tIns="0" rIns="0" bIns="0" rtlCol="0" anchor="ctr"/>
+          <a:lstStyle/>
+          <a:p>
+            <a:pPr algn="ctr" indent="0" marL="0">
+              <a:buNone/>
+            </a:pPr>
+            <a:r>
+              <a:rPr lang="en-US" sz="1100" b="1" dirty="0">
+                <a:solidFill>
+                  <a:srgbClr val="6D4C41"/>
+                </a:solidFill>
+                <a:latin typeface="Zen Maru Gothic" pitchFamily="34" charset="0"/>
+                <a:ea typeface="Zen Maru Gothic" pitchFamily="34" charset="-122"/>
+                <a:cs typeface="Zen Maru Gothic" pitchFamily="34" charset="-120"/>
+              </a:rPr>
+              <a:t>あなの ばしょ</a:t>
+            </a:r>
+            <a:endParaRPr lang="en-US" sz="1100" dirty="0"/>
+          </a:p>
+        </p:txBody>
+      </p:sp>
+    </p:spTree>
+  </p:cSld>
+  <p:clrMapOvr>
+    <a:masterClrMapping/>
+  </p:clrMapOvr>
+</p:sld>
+</file>
+
+<file path=ppt/slides/slide12.xml><?xml version="1.0" encoding="utf-8"?>
+<p:sld xmlns:a="http://schemas.openxmlformats.org/drawingml/2006/main" xmlns:r="http://schemas.openxmlformats.org/officeDocument/2006/relationships" xmlns:p="http://schemas.openxmlformats.org/presentationml/2006/main">
+  <p:cSld name="Slide 12">
+    <p:bg>
+      <p:bgPr>
+        <a:solidFill>
+          <a:srgbClr val="FFF6E5"/>
+        </a:solidFill>
+      </p:bgPr>
+    </p:bg>
+    <p:spTree>
+      <p:nvGrpSpPr>
+        <p:cNvPr id="1" name=""/>
+        <p:cNvGrpSpPr/>
+        <p:nvPr/>
+      </p:nvGrpSpPr>
+      <p:grpSpPr>
+        <a:xfrm>
+          <a:off x="0" y="0"/>
+          <a:ext cx="0" cy="0"/>
+          <a:chOff x="0" y="0"/>
+          <a:chExt cx="0" cy="0"/>
+        </a:xfrm>
+      </p:grpSpPr>
+      <p:sp>
+        <p:nvSpPr>
+          <p:cNvPr id="2" name="Shape 0"/>
+          <p:cNvSpPr/>
+          <p:nvPr/>
+        </p:nvSpPr>
+        <p:spPr>
+          <a:xfrm>
+            <a:off x="347472" y="201168"/>
+            <a:ext cx="8449056" cy="658368"/>
+          </a:xfrm>
+          <a:prstGeom prst="roundRect">
+            <a:avLst>
+              <a:gd name="adj" fmla="val 22222"/>
+            </a:avLst>
+          </a:prstGeom>
+          <a:solidFill>
+            <a:srgbClr val="E91E63"/>
+          </a:solidFill>
+          <a:ln w="12700">
+            <a:solidFill>
+              <a:srgbClr val="E91E63"/>
+            </a:solidFill>
+            <a:prstDash val="solid"/>
+          </a:ln>
+        </p:spPr>
+      </p:sp>
+      <p:sp>
+        <p:nvSpPr>
+          <p:cNvPr id="3" name="Text 1"/>
+          <p:cNvSpPr/>
+          <p:nvPr/>
+        </p:nvSpPr>
+        <p:spPr>
+          <a:xfrm>
+            <a:off x="347472" y="201168"/>
+            <a:ext cx="8449056" cy="658368"/>
+          </a:xfrm>
+          <a:prstGeom prst="rect">
+            <a:avLst/>
+          </a:prstGeom>
+          <a:noFill/>
+          <a:ln/>
+        </p:spPr>
+        <p:txBody>
+          <a:bodyPr wrap="square" lIns="0" tIns="0" rIns="0" bIns="0" rtlCol="0" anchor="ctr"/>
+          <a:lstStyle/>
+          <a:p>
+            <a:pPr algn="ctr" indent="0" marL="0">
+              <a:buNone/>
+            </a:pPr>
+            <a:r>
+              <a:rPr lang="en-US" sz="2600" b="1" dirty="0">
+                <a:solidFill>
+                  <a:srgbClr val="FFFFFF"/>
+                </a:solidFill>
+                <a:latin typeface="Zen Maru Gothic" pitchFamily="34" charset="0"/>
+                <a:ea typeface="Zen Maru Gothic" pitchFamily="34" charset="-122"/>
+                <a:cs typeface="Zen Maru Gothic" pitchFamily="34" charset="-120"/>
+              </a:rPr>
+              <a:t>かんそう</a:t>
+            </a:r>
+            <a:endParaRPr lang="en-US" sz="2600" dirty="0"/>
+          </a:p>
+        </p:txBody>
+      </p:sp>
+      <p:pic>
+        <p:nvPicPr>
+          <p:cNvPr id="4" name="Image 0" descr="illust/dekita.png">    </p:cNvPr>
+          <p:cNvPicPr>
+            <a:picLocks noChangeAspect="1"/>
+          </p:cNvPicPr>
+          <p:nvPr/>
+        </p:nvPicPr>
+        <p:blipFill>
+          <a:blip r:embed="rId1"/>
+          <a:stretch>
+            <a:fillRect/>
+          </a:stretch>
+        </p:blipFill>
+        <p:spPr>
+          <a:xfrm>
+            <a:off x="7635240" y="1005840"/>
+            <a:ext cx="1005840" cy="1005840"/>
+          </a:xfrm>
+          <a:prstGeom prst="rect">
+            <a:avLst/>
+          </a:prstGeom>
+        </p:spPr>
+      </p:pic>
+      <p:sp>
+        <p:nvSpPr>
+          <p:cNvPr id="5" name="Shape 2"/>
+          <p:cNvSpPr/>
+          <p:nvPr/>
+        </p:nvSpPr>
+        <p:spPr>
+          <a:xfrm>
+            <a:off x="502920" y="1024128"/>
+            <a:ext cx="6949440" cy="960120"/>
+          </a:xfrm>
+          <a:prstGeom prst="roundRect">
+            <a:avLst>
+              <a:gd name="adj" fmla="val 11429"/>
+            </a:avLst>
+          </a:prstGeom>
+          <a:solidFill>
+            <a:srgbClr val="FFFFFF"/>
+          </a:solidFill>
+          <a:ln w="31750">
+            <a:solidFill>
+              <a:srgbClr val="FFAB91"/>
+            </a:solidFill>
+            <a:prstDash val="dash"/>
+          </a:ln>
+        </p:spPr>
+      </p:sp>
+      <p:sp>
+        <p:nvSpPr>
+          <p:cNvPr id="6" name="Text 3"/>
+          <p:cNvSpPr/>
+          <p:nvPr/>
+        </p:nvSpPr>
+        <p:spPr>
+          <a:xfrm>
+            <a:off x="612648" y="1024128"/>
+            <a:ext cx="6729984" cy="960120"/>
+          </a:xfrm>
+          <a:prstGeom prst="rect">
+            <a:avLst/>
+          </a:prstGeom>
+          <a:noFill/>
+          <a:ln/>
+        </p:spPr>
+        <p:txBody>
+          <a:bodyPr wrap="square" lIns="0" tIns="0" rIns="0" bIns="0" rtlCol="0" anchor="ctr"/>
+          <a:lstStyle/>
+          <a:p>
+            <a:pPr algn="ctr" indent="0" marL="0">
+              <a:buNone/>
+            </a:pPr>
+            <a:r>
+              <a:rPr lang="en-US" sz="1800" dirty="0">
+                <a:solidFill>
+                  <a:srgbClr val="9E9E9E"/>
+                </a:solidFill>
+                <a:latin typeface="Zen Maru Gothic" pitchFamily="34" charset="0"/>
+                <a:ea typeface="Zen Maru Gothic" pitchFamily="34" charset="-122"/>
+                <a:cs typeface="Zen Maru Gothic" pitchFamily="34" charset="-120"/>
+              </a:rPr>
+              <a:t>いちばん がんばったのは（　　　　　　　）です</a:t>
+            </a:r>
+            <a:endParaRPr lang="en-US" sz="1800" dirty="0"/>
+          </a:p>
+        </p:txBody>
+      </p:sp>
+      <p:sp>
+        <p:nvSpPr>
+          <p:cNvPr id="7" name="Shape 4"/>
+          <p:cNvSpPr/>
+          <p:nvPr/>
+        </p:nvSpPr>
+        <p:spPr>
+          <a:xfrm>
+            <a:off x="502920" y="2121408"/>
+            <a:ext cx="8138160" cy="914400"/>
+          </a:xfrm>
+          <a:prstGeom prst="roundRect">
+            <a:avLst>
+              <a:gd name="adj" fmla="val 12000"/>
+            </a:avLst>
+          </a:prstGeom>
+          <a:solidFill>
+            <a:srgbClr val="FFFFFF"/>
+          </a:solidFill>
+          <a:ln w="31750">
+            <a:solidFill>
+              <a:srgbClr val="FFB74D"/>
+            </a:solidFill>
+            <a:prstDash val="dash"/>
+          </a:ln>
+        </p:spPr>
+      </p:sp>
+      <p:sp>
+        <p:nvSpPr>
+          <p:cNvPr id="8" name="Text 5"/>
+          <p:cNvSpPr/>
+          <p:nvPr/>
+        </p:nvSpPr>
+        <p:spPr>
+          <a:xfrm>
+            <a:off x="612648" y="2121408"/>
+            <a:ext cx="7918704" cy="914400"/>
+          </a:xfrm>
+          <a:prstGeom prst="rect">
+            <a:avLst/>
+          </a:prstGeom>
+          <a:noFill/>
+          <a:ln/>
+        </p:spPr>
+        <p:txBody>
+          <a:bodyPr wrap="square" lIns="0" tIns="0" rIns="0" bIns="0" rtlCol="0" anchor="ctr"/>
+          <a:lstStyle/>
+          <a:p>
+            <a:pPr algn="ctr" indent="0" marL="0">
+              <a:buNone/>
+            </a:pPr>
+            <a:r>
+              <a:rPr lang="en-US" sz="1800" dirty="0">
+                <a:solidFill>
+                  <a:srgbClr val="9E9E9E"/>
+                </a:solidFill>
+                <a:latin typeface="Zen Maru Gothic" pitchFamily="34" charset="0"/>
+                <a:ea typeface="Zen Maru Gothic" pitchFamily="34" charset="-122"/>
+                <a:cs typeface="Zen Maru Gothic" pitchFamily="34" charset="-120"/>
+              </a:rPr>
+              <a:t>つくって みて（　　　　　　　　）でした</a:t>
+            </a:r>
+            <a:endParaRPr lang="en-US" sz="1800" dirty="0"/>
+          </a:p>
+        </p:txBody>
+      </p:sp>
+      <p:sp>
+        <p:nvSpPr>
+          <p:cNvPr id="9" name="Shape 6"/>
+          <p:cNvSpPr/>
+          <p:nvPr/>
+        </p:nvSpPr>
+        <p:spPr>
+          <a:xfrm>
+            <a:off x="502920" y="3154680"/>
+            <a:ext cx="8138160" cy="868680"/>
+          </a:xfrm>
+          <a:prstGeom prst="roundRect">
+            <a:avLst>
+              <a:gd name="adj" fmla="val 12632"/>
+            </a:avLst>
+          </a:prstGeom>
+          <a:solidFill>
+            <a:srgbClr val="FFFFFF"/>
+          </a:solidFill>
+          <a:ln w="31750">
+            <a:solidFill>
+              <a:srgbClr val="FFB74D"/>
+            </a:solidFill>
+            <a:prstDash val="dash"/>
+          </a:ln>
+        </p:spPr>
+      </p:sp>
+      <p:sp>
+        <p:nvSpPr>
+          <p:cNvPr id="10" name="Text 7"/>
+          <p:cNvSpPr/>
+          <p:nvPr/>
+        </p:nvSpPr>
+        <p:spPr>
+          <a:xfrm>
+            <a:off x="612648" y="3154680"/>
+            <a:ext cx="7918704" cy="868680"/>
+          </a:xfrm>
+          <a:prstGeom prst="rect">
+            <a:avLst/>
+          </a:prstGeom>
+          <a:noFill/>
+          <a:ln/>
+        </p:spPr>
+        <p:txBody>
+          <a:bodyPr wrap="square" lIns="0" tIns="0" rIns="0" bIns="0" rtlCol="0" anchor="ctr"/>
+          <a:lstStyle/>
+          <a:p>
+            <a:pPr algn="ctr" indent="0" marL="0">
+              <a:buNone/>
+            </a:pPr>
+            <a:r>
+              <a:rPr lang="en-US" sz="1800" dirty="0">
+                <a:solidFill>
+                  <a:srgbClr val="9E9E9E"/>
+                </a:solidFill>
+                <a:latin typeface="Zen Maru Gothic" pitchFamily="34" charset="0"/>
+                <a:ea typeface="Zen Maru Gothic" pitchFamily="34" charset="-122"/>
+                <a:cs typeface="Zen Maru Gothic" pitchFamily="34" charset="-120"/>
+              </a:rPr>
+              <a:t>つぎは（　　　　　　　　）を つくりたいです</a:t>
+            </a:r>
+            <a:endParaRPr lang="en-US" sz="1800" dirty="0"/>
+          </a:p>
+        </p:txBody>
+      </p:sp>
+      <p:sp>
+        <p:nvSpPr>
+          <p:cNvPr id="11" name="Shape 8"/>
+          <p:cNvSpPr/>
+          <p:nvPr/>
+        </p:nvSpPr>
+        <p:spPr>
+          <a:xfrm>
+            <a:off x="347472" y="4210812"/>
+            <a:ext cx="8449056" cy="786384"/>
+          </a:xfrm>
+          <a:prstGeom prst="roundRect">
+            <a:avLst>
+              <a:gd name="adj" fmla="val 16279"/>
+            </a:avLst>
+          </a:prstGeom>
+          <a:solidFill>
+            <a:srgbClr val="FFE9C7"/>
+          </a:solidFill>
+          <a:ln w="12700">
+            <a:solidFill>
+              <a:srgbClr val="FFE9C7"/>
+            </a:solidFill>
+            <a:prstDash val="solid"/>
+          </a:ln>
+        </p:spPr>
+      </p:sp>
+      <p:sp>
+        <p:nvSpPr>
+          <p:cNvPr id="12" name="Text 9"/>
+          <p:cNvSpPr/>
+          <p:nvPr/>
+        </p:nvSpPr>
+        <p:spPr>
+          <a:xfrm>
+            <a:off x="457200" y="4238244"/>
+            <a:ext cx="8229600" cy="219456"/>
+          </a:xfrm>
+          <a:prstGeom prst="rect">
+            <a:avLst/>
+          </a:prstGeom>
+          <a:noFill/>
+          <a:ln/>
+        </p:spPr>
+        <p:txBody>
+          <a:bodyPr wrap="square" lIns="0" tIns="0" rIns="0" bIns="0" rtlCol="0" anchor="ctr"/>
+          <a:lstStyle/>
+          <a:p>
+            <a:pPr algn="l" indent="0" marL="0">
+              <a:buNone/>
+            </a:pPr>
+            <a:r>
+              <a:rPr lang="en-US" sz="1100" dirty="0">
+                <a:solidFill>
+                  <a:srgbClr val="8D6E63"/>
+                </a:solidFill>
+                <a:latin typeface="Zen Maru Gothic" pitchFamily="34" charset="0"/>
+                <a:ea typeface="Zen Maru Gothic" pitchFamily="34" charset="-122"/>
+                <a:cs typeface="Zen Maru Gothic" pitchFamily="34" charset="-120"/>
+              </a:rPr>
+              <a:t>ことばカード … つかう ことばを、上の（　）の ところへ ドラッグしよう</a:t>
+            </a:r>
+            <a:endParaRPr lang="en-US" sz="1100" dirty="0"/>
+          </a:p>
+        </p:txBody>
+      </p:sp>
+      <p:sp>
+        <p:nvSpPr>
+          <p:cNvPr id="13" name="Shape 10"/>
+          <p:cNvSpPr/>
+          <p:nvPr/>
+        </p:nvSpPr>
+        <p:spPr>
+          <a:xfrm>
+            <a:off x="457200" y="4503420"/>
+            <a:ext cx="1313688" cy="420624"/>
+          </a:xfrm>
+          <a:prstGeom prst="roundRect">
+            <a:avLst>
+              <a:gd name="adj" fmla="val 43478"/>
+            </a:avLst>
+          </a:prstGeom>
+          <a:solidFill>
+            <a:srgbClr val="FFFFFF"/>
+          </a:solidFill>
+          <a:ln w="25400">
+            <a:solidFill>
+              <a:srgbClr val="FFCC80"/>
+            </a:solidFill>
+            <a:prstDash val="solid"/>
+          </a:ln>
+        </p:spPr>
+      </p:sp>
+      <p:sp>
+        <p:nvSpPr>
+          <p:cNvPr id="14" name="Text 11"/>
+          <p:cNvSpPr/>
+          <p:nvPr/>
+        </p:nvSpPr>
+        <p:spPr>
+          <a:xfrm>
+            <a:off x="484632" y="4503420"/>
+            <a:ext cx="1258824" cy="420624"/>
+          </a:xfrm>
+          <a:prstGeom prst="rect">
+            <a:avLst/>
+          </a:prstGeom>
+          <a:noFill/>
+          <a:ln/>
+        </p:spPr>
+        <p:txBody>
+          <a:bodyPr wrap="square" lIns="0" tIns="0" rIns="0" bIns="0" rtlCol="0" anchor="ctr"/>
+          <a:lstStyle/>
+          <a:p>
+            <a:pPr algn="ctr" indent="0" marL="0">
+              <a:buNone/>
+            </a:pPr>
+            <a:r>
+              <a:rPr lang="en-US" sz="1100" b="1" dirty="0">
+                <a:solidFill>
+                  <a:srgbClr val="6D4C41"/>
+                </a:solidFill>
+                <a:latin typeface="Zen Maru Gothic" pitchFamily="34" charset="0"/>
+                <a:ea typeface="Zen Maru Gothic" pitchFamily="34" charset="-122"/>
+                <a:cs typeface="Zen Maru Gothic" pitchFamily="34" charset="-120"/>
+              </a:rPr>
+              <a:t>あきらめなかった</a:t>
+            </a:r>
+            <a:endParaRPr lang="en-US" sz="1100" dirty="0"/>
+          </a:p>
+        </p:txBody>
+      </p:sp>
+      <p:sp>
+        <p:nvSpPr>
+          <p:cNvPr id="15" name="Shape 12"/>
+          <p:cNvSpPr/>
+          <p:nvPr/>
+        </p:nvSpPr>
+        <p:spPr>
+          <a:xfrm>
+            <a:off x="1844040" y="4503420"/>
+            <a:ext cx="1313688" cy="420624"/>
+          </a:xfrm>
+          <a:prstGeom prst="roundRect">
+            <a:avLst>
+              <a:gd name="adj" fmla="val 43478"/>
+            </a:avLst>
+          </a:prstGeom>
+          <a:solidFill>
+            <a:srgbClr val="FFFFFF"/>
+          </a:solidFill>
+          <a:ln w="25400">
+            <a:solidFill>
+              <a:srgbClr val="FFCC80"/>
+            </a:solidFill>
+            <a:prstDash val="solid"/>
+          </a:ln>
+        </p:spPr>
+      </p:sp>
+      <p:sp>
+        <p:nvSpPr>
+          <p:cNvPr id="16" name="Text 13"/>
+          <p:cNvSpPr/>
+          <p:nvPr/>
+        </p:nvSpPr>
+        <p:spPr>
+          <a:xfrm>
+            <a:off x="1871472" y="4503420"/>
+            <a:ext cx="1258824" cy="420624"/>
+          </a:xfrm>
+          <a:prstGeom prst="rect">
+            <a:avLst/>
+          </a:prstGeom>
+          <a:noFill/>
+          <a:ln/>
+        </p:spPr>
+        <p:txBody>
+          <a:bodyPr wrap="square" lIns="0" tIns="0" rIns="0" bIns="0" rtlCol="0" anchor="ctr"/>
+          <a:lstStyle/>
+          <a:p>
+            <a:pPr algn="ctr" indent="0" marL="0">
+              <a:buNone/>
+            </a:pPr>
+            <a:r>
+              <a:rPr lang="en-US" sz="1100" b="1" dirty="0">
+                <a:solidFill>
+                  <a:srgbClr val="6D4C41"/>
+                </a:solidFill>
+                <a:latin typeface="Zen Maru Gothic" pitchFamily="34" charset="0"/>
+                <a:ea typeface="Zen Maru Gothic" pitchFamily="34" charset="-122"/>
+                <a:cs typeface="Zen Maru Gothic" pitchFamily="34" charset="-120"/>
+              </a:rPr>
+              <a:t>なんども やった</a:t>
+            </a:r>
+            <a:endParaRPr lang="en-US" sz="1100" dirty="0"/>
+          </a:p>
+        </p:txBody>
+      </p:sp>
+      <p:sp>
+        <p:nvSpPr>
+          <p:cNvPr id="17" name="Shape 14"/>
+          <p:cNvSpPr/>
+          <p:nvPr/>
+        </p:nvSpPr>
+        <p:spPr>
+          <a:xfrm>
+            <a:off x="3230880" y="4503420"/>
+            <a:ext cx="1313688" cy="420624"/>
+          </a:xfrm>
+          <a:prstGeom prst="roundRect">
+            <a:avLst>
+              <a:gd name="adj" fmla="val 43478"/>
+            </a:avLst>
+          </a:prstGeom>
+          <a:solidFill>
+            <a:srgbClr val="FFFFFF"/>
+          </a:solidFill>
+          <a:ln w="25400">
+            <a:solidFill>
+              <a:srgbClr val="FFCC80"/>
+            </a:solidFill>
+            <a:prstDash val="solid"/>
+          </a:ln>
+        </p:spPr>
+      </p:sp>
+      <p:sp>
+        <p:nvSpPr>
+          <p:cNvPr id="18" name="Text 15"/>
+          <p:cNvSpPr/>
+          <p:nvPr/>
+        </p:nvSpPr>
+        <p:spPr>
+          <a:xfrm>
+            <a:off x="3258312" y="4503420"/>
+            <a:ext cx="1258824" cy="420624"/>
+          </a:xfrm>
+          <a:prstGeom prst="rect">
+            <a:avLst/>
+          </a:prstGeom>
+          <a:noFill/>
+          <a:ln/>
+        </p:spPr>
+        <p:txBody>
+          <a:bodyPr wrap="square" lIns="0" tIns="0" rIns="0" bIns="0" rtlCol="0" anchor="ctr"/>
+          <a:lstStyle/>
+          <a:p>
+            <a:pPr algn="ctr" indent="0" marL="0">
+              <a:buNone/>
+            </a:pPr>
+            <a:r>
+              <a:rPr lang="en-US" sz="1200" b="1" dirty="0">
+                <a:solidFill>
+                  <a:srgbClr val="6D4C41"/>
+                </a:solidFill>
+                <a:latin typeface="Zen Maru Gothic" pitchFamily="34" charset="0"/>
+                <a:ea typeface="Zen Maru Gothic" pitchFamily="34" charset="-122"/>
+                <a:cs typeface="Zen Maru Gothic" pitchFamily="34" charset="-120"/>
+              </a:rPr>
+              <a:t>そうだんした</a:t>
+            </a:r>
+            <a:endParaRPr lang="en-US" sz="1200" dirty="0"/>
+          </a:p>
+        </p:txBody>
+      </p:sp>
+      <p:sp>
+        <p:nvSpPr>
+          <p:cNvPr id="19" name="Shape 16"/>
+          <p:cNvSpPr/>
+          <p:nvPr/>
+        </p:nvSpPr>
+        <p:spPr>
+          <a:xfrm>
+            <a:off x="4617720" y="4503420"/>
+            <a:ext cx="1313688" cy="420624"/>
+          </a:xfrm>
+          <a:prstGeom prst="roundRect">
+            <a:avLst>
+              <a:gd name="adj" fmla="val 43478"/>
+            </a:avLst>
+          </a:prstGeom>
+          <a:solidFill>
+            <a:srgbClr val="FFFFFF"/>
+          </a:solidFill>
+          <a:ln w="25400">
+            <a:solidFill>
+              <a:srgbClr val="FFCC80"/>
+            </a:solidFill>
+            <a:prstDash val="solid"/>
+          </a:ln>
+        </p:spPr>
+      </p:sp>
+      <p:sp>
+        <p:nvSpPr>
+          <p:cNvPr id="20" name="Text 17"/>
+          <p:cNvSpPr/>
+          <p:nvPr/>
+        </p:nvSpPr>
+        <p:spPr>
+          <a:xfrm>
+            <a:off x="4645152" y="4503420"/>
+            <a:ext cx="1258824" cy="420624"/>
+          </a:xfrm>
+          <a:prstGeom prst="rect">
+            <a:avLst/>
+          </a:prstGeom>
+          <a:noFill/>
+          <a:ln/>
+        </p:spPr>
+        <p:txBody>
+          <a:bodyPr wrap="square" lIns="0" tIns="0" rIns="0" bIns="0" rtlCol="0" anchor="ctr"/>
+          <a:lstStyle/>
+          <a:p>
+            <a:pPr algn="ctr" indent="0" marL="0">
+              <a:buNone/>
+            </a:pPr>
+            <a:r>
+              <a:rPr lang="en-US" sz="1000" b="1" dirty="0">
+                <a:solidFill>
+                  <a:srgbClr val="6D4C41"/>
+                </a:solidFill>
+                <a:latin typeface="Zen Maru Gothic" pitchFamily="34" charset="0"/>
+                <a:ea typeface="Zen Maru Gothic" pitchFamily="34" charset="-122"/>
+                <a:cs typeface="Zen Maru Gothic" pitchFamily="34" charset="-120"/>
+              </a:rPr>
+              <a:t>さいごまで やった</a:t>
+            </a:r>
+            <a:endParaRPr lang="en-US" sz="1000" dirty="0"/>
+          </a:p>
+        </p:txBody>
+      </p:sp>
+      <p:sp>
+        <p:nvSpPr>
+          <p:cNvPr id="21" name="Shape 18"/>
+          <p:cNvSpPr/>
+          <p:nvPr/>
+        </p:nvSpPr>
+        <p:spPr>
+          <a:xfrm>
+            <a:off x="6004560" y="4503420"/>
+            <a:ext cx="1313688" cy="420624"/>
+          </a:xfrm>
+          <a:prstGeom prst="roundRect">
+            <a:avLst>
+              <a:gd name="adj" fmla="val 43478"/>
+            </a:avLst>
+          </a:prstGeom>
+          <a:solidFill>
+            <a:srgbClr val="FFFFFF"/>
+          </a:solidFill>
+          <a:ln w="25400">
+            <a:solidFill>
+              <a:srgbClr val="FFCC80"/>
+            </a:solidFill>
+            <a:prstDash val="solid"/>
+          </a:ln>
+        </p:spPr>
+      </p:sp>
+      <p:sp>
+        <p:nvSpPr>
+          <p:cNvPr id="22" name="Text 19"/>
+          <p:cNvSpPr/>
+          <p:nvPr/>
+        </p:nvSpPr>
+        <p:spPr>
+          <a:xfrm>
+            <a:off x="6031992" y="4503420"/>
+            <a:ext cx="1258824" cy="420624"/>
+          </a:xfrm>
+          <a:prstGeom prst="rect">
+            <a:avLst/>
+          </a:prstGeom>
+          <a:noFill/>
+          <a:ln/>
+        </p:spPr>
+        <p:txBody>
+          <a:bodyPr wrap="square" lIns="0" tIns="0" rIns="0" bIns="0" rtlCol="0" anchor="ctr"/>
+          <a:lstStyle/>
+          <a:p>
+            <a:pPr algn="ctr" indent="0" marL="0">
+              <a:buNone/>
+            </a:pPr>
+            <a:r>
+              <a:rPr lang="en-US" sz="1200" b="1" dirty="0">
+                <a:solidFill>
+                  <a:srgbClr val="6D4C41"/>
+                </a:solidFill>
+                <a:latin typeface="Zen Maru Gothic" pitchFamily="34" charset="0"/>
+                <a:ea typeface="Zen Maru Gothic" pitchFamily="34" charset="-122"/>
+                <a:cs typeface="Zen Maru Gothic" pitchFamily="34" charset="-120"/>
+              </a:rPr>
+              <a:t>たのしかった</a:t>
+            </a:r>
+            <a:endParaRPr lang="en-US" sz="1200" dirty="0"/>
+          </a:p>
+        </p:txBody>
+      </p:sp>
+      <p:sp>
+        <p:nvSpPr>
+          <p:cNvPr id="23" name="Shape 20"/>
+          <p:cNvSpPr/>
+          <p:nvPr/>
+        </p:nvSpPr>
+        <p:spPr>
+          <a:xfrm>
+            <a:off x="7391400" y="4503420"/>
+            <a:ext cx="1313688" cy="420624"/>
+          </a:xfrm>
+          <a:prstGeom prst="roundRect">
+            <a:avLst>
+              <a:gd name="adj" fmla="val 43478"/>
+            </a:avLst>
+          </a:prstGeom>
+          <a:solidFill>
+            <a:srgbClr val="FFFFFF"/>
+          </a:solidFill>
+          <a:ln w="25400">
+            <a:solidFill>
+              <a:srgbClr val="FFCC80"/>
+            </a:solidFill>
+            <a:prstDash val="solid"/>
+          </a:ln>
+        </p:spPr>
+      </p:sp>
+      <p:sp>
+        <p:nvSpPr>
+          <p:cNvPr id="24" name="Text 21"/>
+          <p:cNvSpPr/>
+          <p:nvPr/>
+        </p:nvSpPr>
+        <p:spPr>
+          <a:xfrm>
+            <a:off x="7418832" y="4503420"/>
+            <a:ext cx="1258824" cy="420624"/>
+          </a:xfrm>
+          <a:prstGeom prst="rect">
+            <a:avLst/>
+          </a:prstGeom>
+          <a:noFill/>
+          <a:ln/>
+        </p:spPr>
+        <p:txBody>
+          <a:bodyPr wrap="square" lIns="0" tIns="0" rIns="0" bIns="0" rtlCol="0" anchor="ctr"/>
+          <a:lstStyle/>
+          <a:p>
+            <a:pPr algn="ctr" indent="0" marL="0">
+              <a:buNone/>
+            </a:pPr>
+            <a:r>
+              <a:rPr lang="en-US" sz="1200" b="1" dirty="0">
+                <a:solidFill>
+                  <a:srgbClr val="6D4C41"/>
+                </a:solidFill>
+                <a:latin typeface="Zen Maru Gothic" pitchFamily="34" charset="0"/>
+                <a:ea typeface="Zen Maru Gothic" pitchFamily="34" charset="-122"/>
+                <a:cs typeface="Zen Maru Gothic" pitchFamily="34" charset="-120"/>
+              </a:rPr>
+              <a:t>くやしかった</a:t>
+            </a:r>
+            <a:endParaRPr lang="en-US" sz="1200" dirty="0"/>
+          </a:p>
+        </p:txBody>
+      </p:sp>
+    </p:spTree>
+  </p:cSld>
+  <p:clrMapOvr>
+    <a:masterClrMapping/>
+  </p:clrMapOvr>
+</p:sld>
+</file>
+
+<file path=ppt/slides/slide13.xml><?xml version="1.0" encoding="utf-8"?>
+<p:sld xmlns:a="http://schemas.openxmlformats.org/drawingml/2006/main" xmlns:r="http://schemas.openxmlformats.org/officeDocument/2006/relationships" xmlns:p="http://schemas.openxmlformats.org/presentationml/2006/main">
+  <p:cSld name="Slide 13">
+    <p:bg>
+      <p:bgPr>
+        <a:solidFill>
+          <a:srgbClr val="FFF6E5"/>
+        </a:solidFill>
+      </p:bgPr>
+    </p:bg>
+    <p:spTree>
+      <p:nvGrpSpPr>
+        <p:cNvPr id="1" name=""/>
+        <p:cNvGrpSpPr/>
+        <p:nvPr/>
+      </p:nvGrpSpPr>
+      <p:grpSpPr>
+        <a:xfrm>
+          <a:off x="0" y="0"/>
+          <a:ext cx="0" cy="0"/>
+          <a:chOff x="0" y="0"/>
+          <a:chExt cx="0" cy="0"/>
+        </a:xfrm>
+      </p:grpSpPr>
+      <p:sp>
+        <p:nvSpPr>
+          <p:cNvPr id="2" name="Text 0"/>
+          <p:cNvSpPr/>
+          <p:nvPr/>
+        </p:nvSpPr>
+        <p:spPr>
+          <a:xfrm>
+            <a:off x="548640" y="1417320"/>
+            <a:ext cx="8046720" cy="1005840"/>
+          </a:xfrm>
+          <a:prstGeom prst="rect">
+            <a:avLst/>
+          </a:prstGeom>
+          <a:noFill/>
+          <a:ln/>
+        </p:spPr>
+        <p:txBody>
+          <a:bodyPr wrap="square" lIns="0" tIns="0" rIns="0" bIns="0" rtlCol="0" anchor="ctr"/>
+          <a:lstStyle/>
+          <a:p>
+            <a:pPr algn="ctr" indent="0" marL="0">
+              <a:buNone/>
+            </a:pPr>
+            <a:r>
+              <a:rPr lang="en-US" sz="4200" b="1" dirty="0">
+                <a:solidFill>
+                  <a:srgbClr val="E65100"/>
+                </a:solidFill>
+                <a:latin typeface="Zen Maru Gothic" pitchFamily="34" charset="0"/>
+                <a:ea typeface="Zen Maru Gothic" pitchFamily="34" charset="-122"/>
+                <a:cs typeface="Zen Maru Gothic" pitchFamily="34" charset="-120"/>
+              </a:rPr>
+              <a:t>あそんで みて ね</a:t>
+            </a:r>
+            <a:endParaRPr lang="en-US" sz="4200" dirty="0"/>
+          </a:p>
+        </p:txBody>
+      </p:sp>
+      <p:sp>
+        <p:nvSpPr>
+          <p:cNvPr id="3" name="Text 1"/>
+          <p:cNvSpPr/>
+          <p:nvPr/>
+        </p:nvSpPr>
+        <p:spPr>
+          <a:xfrm>
+            <a:off x="548640" y="2468880"/>
+            <a:ext cx="8046720" cy="548640"/>
+          </a:xfrm>
+          <a:prstGeom prst="rect">
+            <a:avLst/>
+          </a:prstGeom>
+          <a:noFill/>
+          <a:ln/>
+        </p:spPr>
+        <p:txBody>
+          <a:bodyPr wrap="square" lIns="0" tIns="0" rIns="0" bIns="0" rtlCol="0" anchor="ctr"/>
+          <a:lstStyle/>
+          <a:p>
+            <a:pPr algn="ctr" indent="0" marL="0">
+              <a:buNone/>
+            </a:pPr>
+            <a:r>
+              <a:rPr lang="en-US" sz="2200" dirty="0">
+                <a:solidFill>
+                  <a:srgbClr val="5D4037"/>
+                </a:solidFill>
+                <a:latin typeface="Zen Maru Gothic" pitchFamily="34" charset="0"/>
+                <a:ea typeface="Zen Maru Gothic" pitchFamily="34" charset="-122"/>
+                <a:cs typeface="Zen Maru Gothic" pitchFamily="34" charset="-120"/>
+              </a:rPr>
+              <a:t>きいて くれて ありがとう</a:t>
+            </a:r>
+            <a:endParaRPr lang="en-US" sz="2200" dirty="0"/>
+          </a:p>
+        </p:txBody>
+      </p:sp>
+      <p:pic>
+        <p:nvPicPr>
+          <p:cNvPr id="4" name="Image 0" descr="illust/kendama.png">    </p:cNvPr>
+          <p:cNvPicPr>
+            <a:picLocks noChangeAspect="1"/>
+          </p:cNvPicPr>
+          <p:nvPr/>
+        </p:nvPicPr>
+        <p:blipFill>
+          <a:blip r:embed="rId1"/>
+          <a:stretch>
+            <a:fillRect/>
+          </a:stretch>
+        </p:blipFill>
+        <p:spPr>
+          <a:xfrm>
+            <a:off x="685800" y="3063240"/>
+            <a:ext cx="1280160" cy="1280160"/>
+          </a:xfrm>
+          <a:prstGeom prst="rect">
+            <a:avLst/>
+          </a:prstGeom>
+        </p:spPr>
+      </p:pic>
+      <p:pic>
+        <p:nvPicPr>
+          <p:cNvPr id="5" name="Image 1" descr="illust/maracas.png">    </p:cNvPr>
+          <p:cNvPicPr>
+            <a:picLocks noChangeAspect="1"/>
+          </p:cNvPicPr>
+          <p:nvPr/>
+        </p:nvPicPr>
+        <p:blipFill>
+          <a:blip r:embed="rId2"/>
+          <a:stretch>
+            <a:fillRect/>
+          </a:stretch>
+        </p:blipFill>
+        <p:spPr>
+          <a:xfrm>
+            <a:off x="2194560" y="3291840"/>
+            <a:ext cx="1143000" cy="1143000"/>
+          </a:xfrm>
+          <a:prstGeom prst="rect">
+            <a:avLst/>
+          </a:prstGeom>
+        </p:spPr>
+      </p:pic>
+      <p:pic>
+        <p:nvPicPr>
+          <p:cNvPr id="6" name="Image 2" descr="illust/kinomi.png">    </p:cNvPr>
+          <p:cNvPicPr>
+            <a:picLocks noChangeAspect="1"/>
+          </p:cNvPicPr>
+          <p:nvPr/>
+        </p:nvPicPr>
+        <p:blipFill>
+          <a:blip r:embed="rId3"/>
+          <a:stretch>
+            <a:fillRect/>
+          </a:stretch>
+        </p:blipFill>
+        <p:spPr>
+          <a:xfrm>
+            <a:off x="5760720" y="3383280"/>
+            <a:ext cx="1051560" cy="1051560"/>
+          </a:xfrm>
+          <a:prstGeom prst="rect">
+            <a:avLst/>
+          </a:prstGeom>
+        </p:spPr>
+      </p:pic>
+      <p:pic>
+        <p:nvPicPr>
+          <p:cNvPr id="7" name="Image 3" descr="illust/risu.png">    </p:cNvPr>
+          <p:cNvPicPr>
+            <a:picLocks noChangeAspect="1"/>
+          </p:cNvPicPr>
+          <p:nvPr/>
+        </p:nvPicPr>
+        <p:blipFill>
+          <a:blip r:embed="rId4"/>
+          <a:stretch>
+            <a:fillRect/>
+          </a:stretch>
+        </p:blipFill>
+        <p:spPr>
+          <a:xfrm>
+            <a:off x="7223760" y="3063240"/>
+            <a:ext cx="1280160" cy="1280160"/>
+          </a:xfrm>
+          <a:prstGeom prst="rect">
+            <a:avLst/>
+          </a:prstGeom>
+        </p:spPr>
+      </p:pic>
+      <p:pic>
+        <p:nvPicPr>
+          <p:cNvPr id="8" name="Image 4" descr="illust/ochiba.png">    </p:cNvPr>
+          <p:cNvPicPr>
+            <a:picLocks noChangeAspect="1"/>
+          </p:cNvPicPr>
+          <p:nvPr/>
+        </p:nvPicPr>
+        <p:blipFill>
+          <a:blip r:embed="rId5"/>
+          <a:stretch>
+            <a:fillRect/>
+          </a:stretch>
+        </p:blipFill>
+        <p:spPr>
+          <a:xfrm>
+            <a:off x="914400" y="457200"/>
+            <a:ext cx="822960" cy="822960"/>
+          </a:xfrm>
+          <a:prstGeom prst="rect">
+            <a:avLst/>
+          </a:prstGeom>
+        </p:spPr>
+      </p:pic>
+      <p:pic>
+        <p:nvPicPr>
+          <p:cNvPr id="9" name="Image 5" descr="illust/momiji.png">    </p:cNvPr>
+          <p:cNvPicPr>
+            <a:picLocks noChangeAspect="1"/>
+          </p:cNvPicPr>
+          <p:nvPr/>
+        </p:nvPicPr>
+        <p:blipFill>
+          <a:blip r:embed="rId6"/>
+          <a:stretch>
+            <a:fillRect/>
+          </a:stretch>
+        </p:blipFill>
+        <p:spPr>
+          <a:xfrm>
+            <a:off x="7498080" y="502920"/>
+            <a:ext cx="868680" cy="868680"/>
+          </a:xfrm>
+          <a:prstGeom prst="rect">
+            <a:avLst/>
+          </a:prstGeom>
+        </p:spPr>
+      </p:pic>
     </p:spTree>
   </p:cSld>
   <p:clrMapOvr>
@@ -3917,8 +6898,8 @@
         </p:nvSpPr>
         <p:spPr>
           <a:xfrm>
-            <a:off x="493776" y="4503420"/>
-            <a:ext cx="1240536" cy="420624"/>
+            <a:off x="484632" y="4503420"/>
+            <a:ext cx="1258824" cy="420624"/>
           </a:xfrm>
           <a:prstGeom prst="rect">
             <a:avLst/>
@@ -3983,8 +6964,8 @@
         </p:nvSpPr>
         <p:spPr>
           <a:xfrm>
-            <a:off x="1880616" y="4503420"/>
-            <a:ext cx="1240536" cy="420624"/>
+            <a:off x="1871472" y="4503420"/>
+            <a:ext cx="1258824" cy="420624"/>
           </a:xfrm>
           <a:prstGeom prst="rect">
             <a:avLst/>
@@ -4049,8 +7030,8 @@
         </p:nvSpPr>
         <p:spPr>
           <a:xfrm>
-            <a:off x="3267456" y="4503420"/>
-            <a:ext cx="1240536" cy="420624"/>
+            <a:off x="3258312" y="4503420"/>
+            <a:ext cx="1258824" cy="420624"/>
           </a:xfrm>
           <a:prstGeom prst="rect">
             <a:avLst/>
@@ -4115,8 +7096,8 @@
         </p:nvSpPr>
         <p:spPr>
           <a:xfrm>
-            <a:off x="4654296" y="4503420"/>
-            <a:ext cx="1240536" cy="420624"/>
+            <a:off x="4645152" y="4503420"/>
+            <a:ext cx="1258824" cy="420624"/>
           </a:xfrm>
           <a:prstGeom prst="rect">
             <a:avLst/>
@@ -4181,8 +7162,8 @@
         </p:nvSpPr>
         <p:spPr>
           <a:xfrm>
-            <a:off x="6041136" y="4503420"/>
-            <a:ext cx="1240536" cy="420624"/>
+            <a:off x="6031992" y="4503420"/>
+            <a:ext cx="1258824" cy="420624"/>
           </a:xfrm>
           <a:prstGeom prst="rect">
             <a:avLst/>
@@ -4247,8 +7228,8 @@
         </p:nvSpPr>
         <p:spPr>
           <a:xfrm>
-            <a:off x="7427976" y="4503420"/>
-            <a:ext cx="1240536" cy="420624"/>
+            <a:off x="7418832" y="4503420"/>
+            <a:ext cx="1258824" cy="420624"/>
           </a:xfrm>
           <a:prstGeom prst="rect">
             <a:avLst/>
@@ -5134,24 +8115,24 @@
         </p:nvSpPr>
         <p:spPr>
           <a:xfrm>
-            <a:off x="493776" y="4503420"/>
-            <a:ext cx="1240536" cy="420624"/>
-          </a:xfrm>
-          <a:prstGeom prst="rect">
-            <a:avLst/>
-          </a:prstGeom>
-          <a:noFill/>
-          <a:ln/>
-        </p:spPr>
-        <p:txBody>
-          <a:bodyPr wrap="square" lIns="0" tIns="0" rIns="0" bIns="0" rtlCol="0" anchor="ctr"/>
-          <a:lstStyle/>
-          <a:p>
-            <a:pPr algn="ctr" indent="0" marL="0">
-              <a:buNone/>
-            </a:pPr>
-            <a:r>
-              <a:rPr lang="en-US" sz="1200" b="1" dirty="0">
+            <a:off x="484632" y="4503420"/>
+            <a:ext cx="1258824" cy="420624"/>
+          </a:xfrm>
+          <a:prstGeom prst="rect">
+            <a:avLst/>
+          </a:prstGeom>
+          <a:noFill/>
+          <a:ln/>
+        </p:spPr>
+        <p:txBody>
+          <a:bodyPr wrap="square" lIns="0" tIns="0" rIns="0" bIns="0" rtlCol="0" anchor="ctr"/>
+          <a:lstStyle/>
+          <a:p>
+            <a:pPr algn="ctr" indent="0" marL="0">
+              <a:buNone/>
+            </a:pPr>
+            <a:r>
+              <a:rPr lang="en-US" sz="1100" b="1" dirty="0">
                 <a:solidFill>
                   <a:srgbClr val="6D4C41"/>
                 </a:solidFill>
@@ -5161,7 +8142,7 @@
               </a:rPr>
               <a:t>あなを あける</a:t>
             </a:r>
-            <a:endParaRPr lang="en-US" sz="1200" dirty="0"/>
+            <a:endParaRPr lang="en-US" sz="1100" dirty="0"/>
           </a:p>
         </p:txBody>
       </p:sp>
@@ -5200,8 +8181,8 @@
         </p:nvSpPr>
         <p:spPr>
           <a:xfrm>
-            <a:off x="1880616" y="4503420"/>
-            <a:ext cx="1240536" cy="420624"/>
+            <a:off x="1871472" y="4503420"/>
+            <a:ext cx="1258824" cy="420624"/>
           </a:xfrm>
           <a:prstGeom prst="rect">
             <a:avLst/>
@@ -5266,24 +8247,24 @@
         </p:nvSpPr>
         <p:spPr>
           <a:xfrm>
-            <a:off x="3267456" y="4503420"/>
-            <a:ext cx="1240536" cy="420624"/>
-          </a:xfrm>
-          <a:prstGeom prst="rect">
-            <a:avLst/>
-          </a:prstGeom>
-          <a:noFill/>
-          <a:ln/>
-        </p:spPr>
-        <p:txBody>
-          <a:bodyPr wrap="square" lIns="0" tIns="0" rIns="0" bIns="0" rtlCol="0" anchor="ctr"/>
-          <a:lstStyle/>
-          <a:p>
-            <a:pPr algn="ctr" indent="0" marL="0">
-              <a:buNone/>
-            </a:pPr>
-            <a:r>
-              <a:rPr lang="en-US" sz="1200" b="1" dirty="0">
+            <a:off x="3258312" y="4503420"/>
+            <a:ext cx="1258824" cy="420624"/>
+          </a:xfrm>
+          <a:prstGeom prst="rect">
+            <a:avLst/>
+          </a:prstGeom>
+          <a:noFill/>
+          <a:ln/>
+        </p:spPr>
+        <p:txBody>
+          <a:bodyPr wrap="square" lIns="0" tIns="0" rIns="0" bIns="0" rtlCol="0" anchor="ctr"/>
+          <a:lstStyle/>
+          <a:p>
+            <a:pPr algn="ctr" indent="0" marL="0">
+              <a:buNone/>
+            </a:pPr>
+            <a:r>
+              <a:rPr lang="en-US" sz="1100" b="1" dirty="0">
                 <a:solidFill>
                   <a:srgbClr val="6D4C41"/>
                 </a:solidFill>
@@ -5293,7 +8274,7 @@
               </a:rPr>
               <a:t>のりで つける</a:t>
             </a:r>
-            <a:endParaRPr lang="en-US" sz="1200" dirty="0"/>
+            <a:endParaRPr lang="en-US" sz="1100" dirty="0"/>
           </a:p>
         </p:txBody>
       </p:sp>
@@ -5332,24 +8313,24 @@
         </p:nvSpPr>
         <p:spPr>
           <a:xfrm>
-            <a:off x="4654296" y="4503420"/>
-            <a:ext cx="1240536" cy="420624"/>
-          </a:xfrm>
-          <a:prstGeom prst="rect">
-            <a:avLst/>
-          </a:prstGeom>
-          <a:noFill/>
-          <a:ln/>
-        </p:spPr>
-        <p:txBody>
-          <a:bodyPr wrap="square" lIns="0" tIns="0" rIns="0" bIns="0" rtlCol="0" anchor="ctr"/>
-          <a:lstStyle/>
-          <a:p>
-            <a:pPr algn="ctr" indent="0" marL="0">
-              <a:buNone/>
-            </a:pPr>
-            <a:r>
-              <a:rPr lang="en-US" sz="1200" b="1" dirty="0">
+            <a:off x="4645152" y="4503420"/>
+            <a:ext cx="1258824" cy="420624"/>
+          </a:xfrm>
+          <a:prstGeom prst="rect">
+            <a:avLst/>
+          </a:prstGeom>
+          <a:noFill/>
+          <a:ln/>
+        </p:spPr>
+        <p:txBody>
+          <a:bodyPr wrap="square" lIns="0" tIns="0" rIns="0" bIns="0" rtlCol="0" anchor="ctr"/>
+          <a:lstStyle/>
+          <a:p>
+            <a:pPr algn="ctr" indent="0" marL="0">
+              <a:buNone/>
+            </a:pPr>
+            <a:r>
+              <a:rPr lang="en-US" sz="1100" b="1" dirty="0">
                 <a:solidFill>
                   <a:srgbClr val="6D4C41"/>
                 </a:solidFill>
@@ -5359,7 +8340,7 @@
               </a:rPr>
               <a:t>テープで とめる</a:t>
             </a:r>
-            <a:endParaRPr lang="en-US" sz="1200" dirty="0"/>
+            <a:endParaRPr lang="en-US" sz="1100" dirty="0"/>
           </a:p>
         </p:txBody>
       </p:sp>
@@ -5398,8 +8379,8 @@
         </p:nvSpPr>
         <p:spPr>
           <a:xfrm>
-            <a:off x="6041136" y="4503420"/>
-            <a:ext cx="1240536" cy="420624"/>
+            <a:off x="6031992" y="4503420"/>
+            <a:ext cx="1258824" cy="420624"/>
           </a:xfrm>
           <a:prstGeom prst="rect">
             <a:avLst/>
@@ -5464,24 +8445,24 @@
         </p:nvSpPr>
         <p:spPr>
           <a:xfrm>
-            <a:off x="7427976" y="4503420"/>
-            <a:ext cx="1240536" cy="420624"/>
-          </a:xfrm>
-          <a:prstGeom prst="rect">
-            <a:avLst/>
-          </a:prstGeom>
-          <a:noFill/>
-          <a:ln/>
-        </p:spPr>
-        <p:txBody>
-          <a:bodyPr wrap="square" lIns="0" tIns="0" rIns="0" bIns="0" rtlCol="0" anchor="ctr"/>
-          <a:lstStyle/>
-          <a:p>
-            <a:pPr algn="ctr" indent="0" marL="0">
-              <a:buNone/>
-            </a:pPr>
-            <a:r>
-              <a:rPr lang="en-US" sz="1200" b="1" dirty="0">
+            <a:off x="7418832" y="4503420"/>
+            <a:ext cx="1258824" cy="420624"/>
+          </a:xfrm>
+          <a:prstGeom prst="rect">
+            <a:avLst/>
+          </a:prstGeom>
+          <a:noFill/>
+          <a:ln/>
+        </p:spPr>
+        <p:txBody>
+          <a:bodyPr wrap="square" lIns="0" tIns="0" rIns="0" bIns="0" rtlCol="0" anchor="ctr"/>
+          <a:lstStyle/>
+          <a:p>
+            <a:pPr algn="ctr" indent="0" marL="0">
+              <a:buNone/>
+            </a:pPr>
+            <a:r>
+              <a:rPr lang="en-US" sz="1100" b="1" dirty="0">
                 <a:solidFill>
                   <a:srgbClr val="6D4C41"/>
                 </a:solidFill>
@@ -5491,7 +8472,7 @@
               </a:rPr>
               <a:t>ひもを つける</a:t>
             </a:r>
-            <a:endParaRPr lang="en-US" sz="1200" dirty="0"/>
+            <a:endParaRPr lang="en-US" sz="1100" dirty="0"/>
           </a:p>
         </p:txBody>
       </p:sp>
@@ -5544,11 +8525,11 @@
             </a:avLst>
           </a:prstGeom>
           <a:solidFill>
-            <a:srgbClr val="9C27B0"/>
+            <a:srgbClr val="E53935"/>
           </a:solidFill>
           <a:ln w="12700">
             <a:solidFill>
-              <a:srgbClr val="9C27B0"/>
+              <a:srgbClr val="E53935"/>
             </a:solidFill>
             <a:prstDash val="solid"/>
           </a:ln>
@@ -5587,7 +8568,7 @@
                 <a:ea typeface="Zen Maru Gothic" pitchFamily="34" charset="-122"/>
                 <a:cs typeface="Zen Maru Gothic" pitchFamily="34" charset="-120"/>
               </a:rPr>
-              <a:t>あそびかた</a:t>
+              <a:t>やって みたら… こまった!</a:t>
             </a:r>
             <a:endParaRPr lang="en-US" sz="2600" dirty="0"/>
           </a:p>
@@ -5601,8 +8582,8 @@
         </p:nvSpPr>
         <p:spPr>
           <a:xfrm>
-            <a:off x="4709160" y="1024128"/>
-            <a:ext cx="3931920" cy="2880360"/>
+            <a:off x="502920" y="1024128"/>
+            <a:ext cx="3657600" cy="2880360"/>
           </a:xfrm>
           <a:prstGeom prst="roundRect">
             <a:avLst>
@@ -5628,8 +8609,8 @@
         </p:nvSpPr>
         <p:spPr>
           <a:xfrm>
-            <a:off x="4709160" y="1024128"/>
-            <a:ext cx="3931920" cy="2880360"/>
+            <a:off x="502920" y="1024128"/>
+            <a:ext cx="3657600" cy="2880360"/>
           </a:xfrm>
           <a:prstGeom prst="rect">
             <a:avLst/>
@@ -5648,7 +8629,7 @@
               <a:buNone/>
             </a:pPr>
             <a:r>
-              <a:rPr lang="en-US" sz="1500" dirty="0">
+              <a:rPr lang="en-US" sz="1400" dirty="0">
                 <a:solidFill>
                   <a:srgbClr val="607D8B"/>
                 </a:solidFill>
@@ -5658,7 +8639,7 @@
               </a:rPr>
               <a:t>しゃしんを</a:t>
             </a:r>
-            <a:endParaRPr lang="en-US" sz="1500" dirty="0"/>
+            <a:endParaRPr lang="en-US" sz="1400" dirty="0"/>
           </a:p>
           <a:p>
             <a:pPr algn="ctr" indent="0" marL="0">
@@ -5668,7 +8649,7 @@
               <a:buNone/>
             </a:pPr>
             <a:r>
-              <a:rPr lang="en-US" sz="1500" dirty="0">
+              <a:rPr lang="en-US" sz="1400" dirty="0">
                 <a:solidFill>
                   <a:srgbClr val="607D8B"/>
                 </a:solidFill>
@@ -5678,24 +8659,48 @@
               </a:rPr>
               <a:t>ここに</a:t>
             </a:r>
-            <a:endParaRPr lang="en-US" sz="1500" dirty="0"/>
-          </a:p>
-        </p:txBody>
-      </p:sp>
-      <p:sp>
-        <p:nvSpPr>
-          <p:cNvPr id="6" name="Shape 4"/>
-          <p:cNvSpPr/>
-          <p:nvPr/>
-        </p:nvSpPr>
-        <p:spPr>
-          <a:xfrm>
-            <a:off x="502920" y="1024128"/>
-            <a:ext cx="3931920" cy="1280160"/>
+            <a:endParaRPr lang="en-US" sz="1400" dirty="0"/>
+          </a:p>
+        </p:txBody>
+      </p:sp>
+      <p:pic>
+        <p:nvPicPr>
+          <p:cNvPr id="6" name="Image 0" descr="illust/komatta.png">    </p:cNvPr>
+          <p:cNvPicPr>
+            <a:picLocks noChangeAspect="1"/>
+          </p:cNvPicPr>
+          <p:nvPr/>
+        </p:nvPicPr>
+        <p:blipFill>
+          <a:blip r:embed="rId1"/>
+          <a:stretch>
+            <a:fillRect/>
+          </a:stretch>
+        </p:blipFill>
+        <p:spPr>
+          <a:xfrm>
+            <a:off x="4343400" y="1051560"/>
+            <a:ext cx="1234440" cy="1234440"/>
+          </a:xfrm>
+          <a:prstGeom prst="rect">
+            <a:avLst/>
+          </a:prstGeom>
+        </p:spPr>
+      </p:pic>
+      <p:sp>
+        <p:nvSpPr>
+          <p:cNvPr id="7" name="Shape 4"/>
+          <p:cNvSpPr/>
+          <p:nvPr/>
+        </p:nvSpPr>
+        <p:spPr>
+          <a:xfrm>
+            <a:off x="5532120" y="1143000"/>
+            <a:ext cx="3108960" cy="1051560"/>
           </a:xfrm>
           <a:prstGeom prst="roundRect">
             <a:avLst>
-              <a:gd name="adj" fmla="val 8571"/>
+              <a:gd name="adj" fmla="val 10435"/>
             </a:avLst>
           </a:prstGeom>
           <a:solidFill>
@@ -5703,7 +8708,7 @@
           </a:solidFill>
           <a:ln w="31750">
             <a:solidFill>
-              <a:srgbClr val="FFB74D"/>
+              <a:srgbClr val="EF9A9A"/>
             </a:solidFill>
             <a:prstDash val="dash"/>
           </a:ln>
@@ -5711,30 +8716,30 @@
       </p:sp>
       <p:sp>
         <p:nvSpPr>
-          <p:cNvPr id="7" name="Text 5"/>
-          <p:cNvSpPr/>
-          <p:nvPr/>
-        </p:nvSpPr>
-        <p:spPr>
-          <a:xfrm>
-            <a:off x="612648" y="1024128"/>
-            <a:ext cx="3712464" cy="1280160"/>
-          </a:xfrm>
-          <a:prstGeom prst="rect">
-            <a:avLst/>
-          </a:prstGeom>
-          <a:noFill/>
-          <a:ln/>
-        </p:spPr>
-        <p:txBody>
-          <a:bodyPr wrap="square" lIns="0" tIns="0" rIns="0" bIns="0" rtlCol="0" anchor="ctr"/>
-          <a:lstStyle/>
-          <a:p>
-            <a:pPr algn="ctr" indent="0" marL="0">
-              <a:buNone/>
-            </a:pPr>
-            <a:r>
-              <a:rPr lang="en-US" sz="1900" dirty="0">
+          <p:cNvPr id="8" name="Text 5"/>
+          <p:cNvSpPr/>
+          <p:nvPr/>
+        </p:nvSpPr>
+        <p:spPr>
+          <a:xfrm>
+            <a:off x="5641848" y="1143000"/>
+            <a:ext cx="2889504" cy="1051560"/>
+          </a:xfrm>
+          <a:prstGeom prst="rect">
+            <a:avLst/>
+          </a:prstGeom>
+          <a:noFill/>
+          <a:ln/>
+        </p:spPr>
+        <p:txBody>
+          <a:bodyPr wrap="square" lIns="0" tIns="0" rIns="0" bIns="0" rtlCol="0" anchor="ctr"/>
+          <a:lstStyle/>
+          <a:p>
+            <a:pPr algn="ctr" indent="0" marL="0">
+              <a:buNone/>
+            </a:pPr>
+            <a:r>
+              <a:rPr lang="en-US" sz="1700" dirty="0">
                 <a:solidFill>
                   <a:srgbClr val="9E9E9E"/>
                 </a:solidFill>
@@ -5742,16 +8747,16 @@
                 <a:ea typeface="Zen Maru Gothic" pitchFamily="34" charset="-122"/>
                 <a:cs typeface="Zen Maru Gothic" pitchFamily="34" charset="-120"/>
               </a:rPr>
-              <a:t>（　　　　　　）と</a:t>
-            </a:r>
-            <a:endParaRPr lang="en-US" sz="1900" dirty="0"/>
-          </a:p>
-          <a:p>
-            <a:pPr algn="ctr" indent="0" marL="0">
-              <a:buNone/>
-            </a:pPr>
-            <a:r>
-              <a:rPr lang="en-US" sz="1900" dirty="0">
+              <a:t>（　　　　　　）</a:t>
+            </a:r>
+            <a:endParaRPr lang="en-US" sz="1700" dirty="0"/>
+          </a:p>
+          <a:p>
+            <a:pPr algn="ctr" indent="0" marL="0">
+              <a:buNone/>
+            </a:pPr>
+            <a:r>
+              <a:rPr lang="en-US" sz="1700" dirty="0">
                 <a:solidFill>
                   <a:srgbClr val="9E9E9E"/>
                 </a:solidFill>
@@ -5759,26 +8764,26 @@
                 <a:ea typeface="Zen Maru Gothic" pitchFamily="34" charset="-122"/>
                 <a:cs typeface="Zen Maru Gothic" pitchFamily="34" charset="-120"/>
               </a:rPr>
-              <a:t>あそびます</a:t>
-            </a:r>
-            <a:endParaRPr lang="en-US" sz="1900" dirty="0"/>
-          </a:p>
-        </p:txBody>
-      </p:sp>
-      <p:sp>
-        <p:nvSpPr>
-          <p:cNvPr id="8" name="Shape 6"/>
-          <p:cNvSpPr/>
-          <p:nvPr/>
-        </p:nvSpPr>
-        <p:spPr>
-          <a:xfrm>
-            <a:off x="502920" y="2487168"/>
-            <a:ext cx="3931920" cy="1417320"/>
+              <a:t>ので こまった</a:t>
+            </a:r>
+            <a:endParaRPr lang="en-US" sz="1700" dirty="0"/>
+          </a:p>
+        </p:txBody>
+      </p:sp>
+      <p:sp>
+        <p:nvSpPr>
+          <p:cNvPr id="9" name="Shape 6"/>
+          <p:cNvSpPr/>
+          <p:nvPr/>
+        </p:nvSpPr>
+        <p:spPr>
+          <a:xfrm>
+            <a:off x="4343400" y="2514600"/>
+            <a:ext cx="4297680" cy="1371600"/>
           </a:xfrm>
           <a:prstGeom prst="roundRect">
             <a:avLst>
-              <a:gd name="adj" fmla="val 7742"/>
+              <a:gd name="adj" fmla="val 8000"/>
             </a:avLst>
           </a:prstGeom>
           <a:solidFill>
@@ -5786,7 +8791,7 @@
           </a:solidFill>
           <a:ln w="31750">
             <a:solidFill>
-              <a:srgbClr val="FFB74D"/>
+              <a:srgbClr val="EF9A9A"/>
             </a:solidFill>
             <a:prstDash val="dash"/>
           </a:ln>
@@ -5794,30 +8799,30 @@
       </p:sp>
       <p:sp>
         <p:nvSpPr>
-          <p:cNvPr id="9" name="Text 7"/>
-          <p:cNvSpPr/>
-          <p:nvPr/>
-        </p:nvSpPr>
-        <p:spPr>
-          <a:xfrm>
-            <a:off x="612648" y="2487168"/>
-            <a:ext cx="3712464" cy="1417320"/>
-          </a:xfrm>
-          <a:prstGeom prst="rect">
-            <a:avLst/>
-          </a:prstGeom>
-          <a:noFill/>
-          <a:ln/>
-        </p:spPr>
-        <p:txBody>
-          <a:bodyPr wrap="square" lIns="0" tIns="0" rIns="0" bIns="0" rtlCol="0" anchor="ctr"/>
-          <a:lstStyle/>
-          <a:p>
-            <a:pPr algn="ctr" indent="0" marL="0">
-              <a:buNone/>
-            </a:pPr>
-            <a:r>
-              <a:rPr lang="en-US" sz="1900" dirty="0">
+          <p:cNvPr id="10" name="Text 7"/>
+          <p:cNvSpPr/>
+          <p:nvPr/>
+        </p:nvSpPr>
+        <p:spPr>
+          <a:xfrm>
+            <a:off x="4453128" y="2514600"/>
+            <a:ext cx="4078224" cy="1371600"/>
+          </a:xfrm>
+          <a:prstGeom prst="rect">
+            <a:avLst/>
+          </a:prstGeom>
+          <a:noFill/>
+          <a:ln/>
+        </p:spPr>
+        <p:txBody>
+          <a:bodyPr wrap="square" lIns="0" tIns="0" rIns="0" bIns="0" rtlCol="0" anchor="ctr"/>
+          <a:lstStyle/>
+          <a:p>
+            <a:pPr algn="ctr" indent="0" marL="0">
+              <a:buNone/>
+            </a:pPr>
+            <a:r>
+              <a:rPr lang="en-US" sz="1600" dirty="0">
                 <a:solidFill>
                   <a:srgbClr val="9E9E9E"/>
                 </a:solidFill>
@@ -5825,16 +8830,16 @@
                 <a:ea typeface="Zen Maru Gothic" pitchFamily="34" charset="-122"/>
                 <a:cs typeface="Zen Maru Gothic" pitchFamily="34" charset="-120"/>
               </a:rPr>
-              <a:t>（　　　　　　）が</a:t>
-            </a:r>
-            <a:endParaRPr lang="en-US" sz="1900" dirty="0"/>
-          </a:p>
-          <a:p>
-            <a:pPr algn="ctr" indent="0" marL="0">
-              <a:buNone/>
-            </a:pPr>
-            <a:r>
-              <a:rPr lang="en-US" sz="1900" dirty="0">
+              <a:t>なんかいも やって みたけど</a:t>
+            </a:r>
+            <a:endParaRPr lang="en-US" sz="1600" dirty="0"/>
+          </a:p>
+          <a:p>
+            <a:pPr algn="ctr" indent="0" marL="0">
+              <a:buNone/>
+            </a:pPr>
+            <a:r>
+              <a:rPr lang="en-US" sz="1600" dirty="0">
                 <a:solidFill>
                   <a:srgbClr val="9E9E9E"/>
                 </a:solidFill>
@@ -5842,15 +8847,15 @@
                 <a:ea typeface="Zen Maru Gothic" pitchFamily="34" charset="-122"/>
                 <a:cs typeface="Zen Maru Gothic" pitchFamily="34" charset="-120"/>
               </a:rPr>
-              <a:t>おもしろいよ</a:t>
-            </a:r>
-            <a:endParaRPr lang="en-US" sz="1900" dirty="0"/>
-          </a:p>
-        </p:txBody>
-      </p:sp>
-      <p:sp>
-        <p:nvSpPr>
-          <p:cNvPr id="10" name="Shape 8"/>
+              <a:t>うまく いかなかった…</a:t>
+            </a:r>
+            <a:endParaRPr lang="en-US" sz="1600" dirty="0"/>
+          </a:p>
+        </p:txBody>
+      </p:sp>
+      <p:sp>
+        <p:nvSpPr>
+          <p:cNvPr id="11" name="Shape 8"/>
           <p:cNvSpPr/>
           <p:nvPr/>
         </p:nvSpPr>
@@ -5877,7 +8882,7 @@
       </p:sp>
       <p:sp>
         <p:nvSpPr>
-          <p:cNvPr id="11" name="Text 9"/>
+          <p:cNvPr id="12" name="Text 9"/>
           <p:cNvSpPr/>
           <p:nvPr/>
         </p:nvSpPr>
@@ -5916,7 +8921,7 @@
       </p:sp>
       <p:sp>
         <p:nvSpPr>
-          <p:cNvPr id="12" name="Shape 10"/>
+          <p:cNvPr id="13" name="Shape 10"/>
           <p:cNvSpPr/>
           <p:nvPr/>
         </p:nvSpPr>
@@ -5943,14 +8948,14 @@
       </p:sp>
       <p:sp>
         <p:nvSpPr>
-          <p:cNvPr id="13" name="Text 11"/>
-          <p:cNvSpPr/>
-          <p:nvPr/>
-        </p:nvSpPr>
-        <p:spPr>
-          <a:xfrm>
-            <a:off x="493776" y="4503420"/>
-            <a:ext cx="1240536" cy="420624"/>
+          <p:cNvPr id="14" name="Text 11"/>
+          <p:cNvSpPr/>
+          <p:nvPr/>
+        </p:nvSpPr>
+        <p:spPr>
+          <a:xfrm>
+            <a:off x="484632" y="4503420"/>
+            <a:ext cx="1258824" cy="420624"/>
           </a:xfrm>
           <a:prstGeom prst="rect">
             <a:avLst/>
@@ -5974,7 +8979,7 @@
                 <a:ea typeface="Zen Maru Gothic" pitchFamily="34" charset="-122"/>
                 <a:cs typeface="Zen Maru Gothic" pitchFamily="34" charset="-120"/>
               </a:rPr>
-              <a:t>くるくる まわる</a:t>
+              <a:t>まわらない</a:t>
             </a:r>
             <a:endParaRPr lang="en-US" sz="1200" dirty="0"/>
           </a:p>
@@ -5982,7 +8987,7 @@
       </p:sp>
       <p:sp>
         <p:nvSpPr>
-          <p:cNvPr id="14" name="Shape 12"/>
+          <p:cNvPr id="15" name="Shape 12"/>
           <p:cNvSpPr/>
           <p:nvPr/>
         </p:nvSpPr>
@@ -6009,30 +9014,30 @@
       </p:sp>
       <p:sp>
         <p:nvSpPr>
-          <p:cNvPr id="15" name="Text 13"/>
-          <p:cNvSpPr/>
-          <p:nvPr/>
-        </p:nvSpPr>
-        <p:spPr>
-          <a:xfrm>
-            <a:off x="1880616" y="4503420"/>
-            <a:ext cx="1240536" cy="420624"/>
-          </a:xfrm>
-          <a:prstGeom prst="rect">
-            <a:avLst/>
-          </a:prstGeom>
-          <a:noFill/>
-          <a:ln/>
-        </p:spPr>
-        <p:txBody>
-          <a:bodyPr wrap="square" lIns="0" tIns="0" rIns="0" bIns="0" rtlCol="0" anchor="ctr"/>
-          <a:lstStyle/>
-          <a:p>
-            <a:pPr algn="ctr" indent="0" marL="0">
-              <a:buNone/>
-            </a:pPr>
-            <a:r>
-              <a:rPr lang="en-US" sz="1200" b="1" dirty="0">
+          <p:cNvPr id="16" name="Text 13"/>
+          <p:cNvSpPr/>
+          <p:nvPr/>
+        </p:nvSpPr>
+        <p:spPr>
+          <a:xfrm>
+            <a:off x="1871472" y="4503420"/>
+            <a:ext cx="1258824" cy="420624"/>
+          </a:xfrm>
+          <a:prstGeom prst="rect">
+            <a:avLst/>
+          </a:prstGeom>
+          <a:noFill/>
+          <a:ln/>
+        </p:spPr>
+        <p:txBody>
+          <a:bodyPr wrap="square" lIns="0" tIns="0" rIns="0" bIns="0" rtlCol="0" anchor="ctr"/>
+          <a:lstStyle/>
+          <a:p>
+            <a:pPr algn="ctr" indent="0" marL="0">
+              <a:buNone/>
+            </a:pPr>
+            <a:r>
+              <a:rPr lang="en-US" sz="1100" b="1" dirty="0">
                 <a:solidFill>
                   <a:srgbClr val="6D4C41"/>
                 </a:solidFill>
@@ -6040,15 +9045,15 @@
                 <a:ea typeface="Zen Maru Gothic" pitchFamily="34" charset="-122"/>
                 <a:cs typeface="Zen Maru Gothic" pitchFamily="34" charset="-120"/>
               </a:rPr>
-              <a:t>ころがる</a:t>
-            </a:r>
-            <a:endParaRPr lang="en-US" sz="1200" dirty="0"/>
-          </a:p>
-        </p:txBody>
-      </p:sp>
-      <p:sp>
-        <p:nvSpPr>
-          <p:cNvPr id="16" name="Shape 14"/>
+              <a:t>すぐ たおれる</a:t>
+            </a:r>
+            <a:endParaRPr lang="en-US" sz="1100" dirty="0"/>
+          </a:p>
+        </p:txBody>
+      </p:sp>
+      <p:sp>
+        <p:nvSpPr>
+          <p:cNvPr id="17" name="Shape 14"/>
           <p:cNvSpPr/>
           <p:nvPr/>
         </p:nvSpPr>
@@ -6075,14 +9080,14 @@
       </p:sp>
       <p:sp>
         <p:nvSpPr>
-          <p:cNvPr id="17" name="Text 15"/>
-          <p:cNvSpPr/>
-          <p:nvPr/>
-        </p:nvSpPr>
-        <p:spPr>
-          <a:xfrm>
-            <a:off x="3267456" y="4503420"/>
-            <a:ext cx="1240536" cy="420624"/>
+          <p:cNvPr id="18" name="Text 15"/>
+          <p:cNvSpPr/>
+          <p:nvPr/>
+        </p:nvSpPr>
+        <p:spPr>
+          <a:xfrm>
+            <a:off x="3258312" y="4503420"/>
+            <a:ext cx="1258824" cy="420624"/>
           </a:xfrm>
           <a:prstGeom prst="rect">
             <a:avLst/>
@@ -6106,7 +9111,7 @@
                 <a:ea typeface="Zen Maru Gothic" pitchFamily="34" charset="-122"/>
                 <a:cs typeface="Zen Maru Gothic" pitchFamily="34" charset="-120"/>
               </a:rPr>
-              <a:t>ぴょんと とぶ</a:t>
+              <a:t>とれちゃう</a:t>
             </a:r>
             <a:endParaRPr lang="en-US" sz="1200" dirty="0"/>
           </a:p>
@@ -6114,7 +9119,7 @@
       </p:sp>
       <p:sp>
         <p:nvSpPr>
-          <p:cNvPr id="18" name="Shape 16"/>
+          <p:cNvPr id="19" name="Shape 16"/>
           <p:cNvSpPr/>
           <p:nvPr/>
         </p:nvSpPr>
@@ -6141,14 +9146,14 @@
       </p:sp>
       <p:sp>
         <p:nvSpPr>
-          <p:cNvPr id="19" name="Text 17"/>
-          <p:cNvSpPr/>
-          <p:nvPr/>
-        </p:nvSpPr>
-        <p:spPr>
-          <a:xfrm>
-            <a:off x="4654296" y="4503420"/>
-            <a:ext cx="1240536" cy="420624"/>
+          <p:cNvPr id="20" name="Text 17"/>
+          <p:cNvSpPr/>
+          <p:nvPr/>
+        </p:nvSpPr>
+        <p:spPr>
+          <a:xfrm>
+            <a:off x="4645152" y="4503420"/>
+            <a:ext cx="1258824" cy="420624"/>
           </a:xfrm>
           <a:prstGeom prst="rect">
             <a:avLst/>
@@ -6172,7 +9177,7 @@
                 <a:ea typeface="Zen Maru Gothic" pitchFamily="34" charset="-122"/>
                 <a:cs typeface="Zen Maru Gothic" pitchFamily="34" charset="-120"/>
               </a:rPr>
-              <a:t>おとが なる</a:t>
+              <a:t>おもすぎる</a:t>
             </a:r>
             <a:endParaRPr lang="en-US" sz="1200" dirty="0"/>
           </a:p>
@@ -6180,7 +9185,7 @@
       </p:sp>
       <p:sp>
         <p:nvSpPr>
-          <p:cNvPr id="20" name="Shape 18"/>
+          <p:cNvPr id="21" name="Shape 18"/>
           <p:cNvSpPr/>
           <p:nvPr/>
         </p:nvSpPr>
@@ -6207,30 +9212,30 @@
       </p:sp>
       <p:sp>
         <p:nvSpPr>
-          <p:cNvPr id="21" name="Text 19"/>
-          <p:cNvSpPr/>
-          <p:nvPr/>
-        </p:nvSpPr>
-        <p:spPr>
-          <a:xfrm>
-            <a:off x="6041136" y="4503420"/>
-            <a:ext cx="1240536" cy="420624"/>
-          </a:xfrm>
-          <a:prstGeom prst="rect">
-            <a:avLst/>
-          </a:prstGeom>
-          <a:noFill/>
-          <a:ln/>
-        </p:spPr>
-        <p:txBody>
-          <a:bodyPr wrap="square" lIns="0" tIns="0" rIns="0" bIns="0" rtlCol="0" anchor="ctr"/>
-          <a:lstStyle/>
-          <a:p>
-            <a:pPr algn="ctr" indent="0" marL="0">
-              <a:buNone/>
-            </a:pPr>
-            <a:r>
-              <a:rPr lang="en-US" sz="1200" b="1" dirty="0">
+          <p:cNvPr id="22" name="Text 19"/>
+          <p:cNvSpPr/>
+          <p:nvPr/>
+        </p:nvSpPr>
+        <p:spPr>
+          <a:xfrm>
+            <a:off x="6031992" y="4503420"/>
+            <a:ext cx="1258824" cy="420624"/>
+          </a:xfrm>
+          <a:prstGeom prst="rect">
+            <a:avLst/>
+          </a:prstGeom>
+          <a:noFill/>
+          <a:ln/>
+        </p:spPr>
+        <p:txBody>
+          <a:bodyPr wrap="square" lIns="0" tIns="0" rIns="0" bIns="0" rtlCol="0" anchor="ctr"/>
+          <a:lstStyle/>
+          <a:p>
+            <a:pPr algn="ctr" indent="0" marL="0">
+              <a:buNone/>
+            </a:pPr>
+            <a:r>
+              <a:rPr lang="en-US" sz="1100" b="1" dirty="0">
                 <a:solidFill>
                   <a:srgbClr val="6D4C41"/>
                 </a:solidFill>
@@ -6238,15 +9243,15 @@
                 <a:ea typeface="Zen Maru Gothic" pitchFamily="34" charset="-122"/>
                 <a:cs typeface="Zen Maru Gothic" pitchFamily="34" charset="-120"/>
               </a:rPr>
-              <a:t>かぶって あそぶ</a:t>
-            </a:r>
-            <a:endParaRPr lang="en-US" sz="1200" dirty="0"/>
-          </a:p>
-        </p:txBody>
-      </p:sp>
-      <p:sp>
-        <p:nvSpPr>
-          <p:cNvPr id="22" name="Shape 20"/>
+              <a:t>ひもが みじかい</a:t>
+            </a:r>
+            <a:endParaRPr lang="en-US" sz="1100" dirty="0"/>
+          </a:p>
+        </p:txBody>
+      </p:sp>
+      <p:sp>
+        <p:nvSpPr>
+          <p:cNvPr id="23" name="Shape 20"/>
           <p:cNvSpPr/>
           <p:nvPr/>
         </p:nvSpPr>
@@ -6273,30 +9278,30 @@
       </p:sp>
       <p:sp>
         <p:nvSpPr>
-          <p:cNvPr id="23" name="Text 21"/>
-          <p:cNvSpPr/>
-          <p:nvPr/>
-        </p:nvSpPr>
-        <p:spPr>
-          <a:xfrm>
-            <a:off x="7427976" y="4503420"/>
-            <a:ext cx="1240536" cy="420624"/>
-          </a:xfrm>
-          <a:prstGeom prst="rect">
-            <a:avLst/>
-          </a:prstGeom>
-          <a:noFill/>
-          <a:ln/>
-        </p:spPr>
-        <p:txBody>
-          <a:bodyPr wrap="square" lIns="0" tIns="0" rIns="0" bIns="0" rtlCol="0" anchor="ctr"/>
-          <a:lstStyle/>
-          <a:p>
-            <a:pPr algn="ctr" indent="0" marL="0">
-              <a:buNone/>
-            </a:pPr>
-            <a:r>
-              <a:rPr lang="en-US" sz="1200" b="1" dirty="0">
+          <p:cNvPr id="24" name="Text 21"/>
+          <p:cNvSpPr/>
+          <p:nvPr/>
+        </p:nvSpPr>
+        <p:spPr>
+          <a:xfrm>
+            <a:off x="7418832" y="4503420"/>
+            <a:ext cx="1258824" cy="420624"/>
+          </a:xfrm>
+          <a:prstGeom prst="rect">
+            <a:avLst/>
+          </a:prstGeom>
+          <a:noFill/>
+          <a:ln/>
+        </p:spPr>
+        <p:txBody>
+          <a:bodyPr wrap="square" lIns="0" tIns="0" rIns="0" bIns="0" rtlCol="0" anchor="ctr"/>
+          <a:lstStyle/>
+          <a:p>
+            <a:pPr algn="ctr" indent="0" marL="0">
+              <a:buNone/>
+            </a:pPr>
+            <a:r>
+              <a:rPr lang="en-US" sz="1100" b="1" dirty="0">
                 <a:solidFill>
                   <a:srgbClr val="6D4C41"/>
                 </a:solidFill>
@@ -6304,9 +9309,9 @@
                 <a:ea typeface="Zen Maru Gothic" pitchFamily="34" charset="-122"/>
                 <a:cs typeface="Zen Maru Gothic" pitchFamily="34" charset="-120"/>
               </a:rPr>
-              <a:t>ゆらゆら する</a:t>
-            </a:r>
-            <a:endParaRPr lang="en-US" sz="1200" dirty="0"/>
+              <a:t>あなが ずれた</a:t>
+            </a:r>
+            <a:endParaRPr lang="en-US" sz="1100" dirty="0"/>
           </a:p>
         </p:txBody>
       </p:sp>
@@ -6359,11 +9364,11 @@
             </a:avLst>
           </a:prstGeom>
           <a:solidFill>
-            <a:srgbClr val="FF9800"/>
+            <a:srgbClr val="7E57C2"/>
           </a:solidFill>
           <a:ln w="12700">
             <a:solidFill>
-              <a:srgbClr val="FF9800"/>
+              <a:srgbClr val="7E57C2"/>
             </a:solidFill>
             <a:prstDash val="solid"/>
           </a:ln>
@@ -6402,181 +9407,15 @@
                 <a:ea typeface="Zen Maru Gothic" pitchFamily="34" charset="-122"/>
                 <a:cs typeface="Zen Maru Gothic" pitchFamily="34" charset="-120"/>
               </a:rPr>
-              <a:t>くふうした ところ</a:t>
+              <a:t>どうしたら いいかな?</a:t>
             </a:r>
             <a:endParaRPr lang="en-US" sz="2600" dirty="0"/>
-          </a:p>
-        </p:txBody>
-      </p:sp>
-      <p:sp>
-        <p:nvSpPr>
-          <p:cNvPr id="4" name="Shape 2"/>
-          <p:cNvSpPr/>
-          <p:nvPr/>
-        </p:nvSpPr>
-        <p:spPr>
-          <a:xfrm>
-            <a:off x="502920" y="1051560"/>
-            <a:ext cx="5120640" cy="1325880"/>
-          </a:xfrm>
-          <a:prstGeom prst="roundRect">
-            <a:avLst>
-              <a:gd name="adj" fmla="val 8276"/>
-            </a:avLst>
-          </a:prstGeom>
-          <a:solidFill>
-            <a:srgbClr val="FFFFFF"/>
-          </a:solidFill>
-          <a:ln w="31750">
-            <a:solidFill>
-              <a:srgbClr val="FFB74D"/>
-            </a:solidFill>
-            <a:prstDash val="dash"/>
-          </a:ln>
-        </p:spPr>
-      </p:sp>
-      <p:sp>
-        <p:nvSpPr>
-          <p:cNvPr id="5" name="Text 3"/>
-          <p:cNvSpPr/>
-          <p:nvPr/>
-        </p:nvSpPr>
-        <p:spPr>
-          <a:xfrm>
-            <a:off x="612648" y="1051560"/>
-            <a:ext cx="4901184" cy="1325880"/>
-          </a:xfrm>
-          <a:prstGeom prst="rect">
-            <a:avLst/>
-          </a:prstGeom>
-          <a:noFill/>
-          <a:ln/>
-        </p:spPr>
-        <p:txBody>
-          <a:bodyPr wrap="square" lIns="0" tIns="0" rIns="0" bIns="0" rtlCol="0" anchor="ctr"/>
-          <a:lstStyle/>
-          <a:p>
-            <a:pPr algn="ctr" indent="0" marL="0">
-              <a:buNone/>
-            </a:pPr>
-            <a:r>
-              <a:rPr lang="en-US" sz="2000" dirty="0">
-                <a:solidFill>
-                  <a:srgbClr val="9E9E9E"/>
-                </a:solidFill>
-                <a:latin typeface="Zen Maru Gothic" pitchFamily="34" charset="0"/>
-                <a:ea typeface="Zen Maru Gothic" pitchFamily="34" charset="-122"/>
-                <a:cs typeface="Zen Maru Gothic" pitchFamily="34" charset="-120"/>
-              </a:rPr>
-              <a:t>（　　　　　　　　）を</a:t>
-            </a:r>
-            <a:endParaRPr lang="en-US" sz="2000" dirty="0"/>
-          </a:p>
-          <a:p>
-            <a:pPr algn="ctr" indent="0" marL="0">
-              <a:buNone/>
-            </a:pPr>
-            <a:r>
-              <a:rPr lang="en-US" sz="2000" dirty="0">
-                <a:solidFill>
-                  <a:srgbClr val="9E9E9E"/>
-                </a:solidFill>
-                <a:latin typeface="Zen Maru Gothic" pitchFamily="34" charset="0"/>
-                <a:ea typeface="Zen Maru Gothic" pitchFamily="34" charset="-122"/>
-                <a:cs typeface="Zen Maru Gothic" pitchFamily="34" charset="-120"/>
-              </a:rPr>
-              <a:t>くふうしました</a:t>
-            </a:r>
-            <a:endParaRPr lang="en-US" sz="2000" dirty="0"/>
-          </a:p>
-        </p:txBody>
-      </p:sp>
-      <p:sp>
-        <p:nvSpPr>
-          <p:cNvPr id="6" name="Shape 4"/>
-          <p:cNvSpPr/>
-          <p:nvPr/>
-        </p:nvSpPr>
-        <p:spPr>
-          <a:xfrm>
-            <a:off x="502920" y="2514600"/>
-            <a:ext cx="5120640" cy="1371600"/>
-          </a:xfrm>
-          <a:prstGeom prst="roundRect">
-            <a:avLst>
-              <a:gd name="adj" fmla="val 8000"/>
-            </a:avLst>
-          </a:prstGeom>
-          <a:solidFill>
-            <a:srgbClr val="FFFFFF"/>
-          </a:solidFill>
-          <a:ln w="31750">
-            <a:solidFill>
-              <a:srgbClr val="FFB74D"/>
-            </a:solidFill>
-            <a:prstDash val="dash"/>
-          </a:ln>
-        </p:spPr>
-      </p:sp>
-      <p:sp>
-        <p:nvSpPr>
-          <p:cNvPr id="7" name="Text 5"/>
-          <p:cNvSpPr/>
-          <p:nvPr/>
-        </p:nvSpPr>
-        <p:spPr>
-          <a:xfrm>
-            <a:off x="612648" y="2514600"/>
-            <a:ext cx="4901184" cy="1371600"/>
-          </a:xfrm>
-          <a:prstGeom prst="rect">
-            <a:avLst/>
-          </a:prstGeom>
-          <a:noFill/>
-          <a:ln/>
-        </p:spPr>
-        <p:txBody>
-          <a:bodyPr wrap="square" lIns="0" tIns="0" rIns="0" bIns="0" rtlCol="0" anchor="ctr"/>
-          <a:lstStyle/>
-          <a:p>
-            <a:pPr algn="ctr" indent="0" marL="0">
-              <a:buNone/>
-            </a:pPr>
-            <a:r>
-              <a:rPr lang="en-US" sz="2000" dirty="0">
-                <a:solidFill>
-                  <a:srgbClr val="9E9E9E"/>
-                </a:solidFill>
-                <a:latin typeface="Zen Maru Gothic" pitchFamily="34" charset="0"/>
-                <a:ea typeface="Zen Maru Gothic" pitchFamily="34" charset="-122"/>
-                <a:cs typeface="Zen Maru Gothic" pitchFamily="34" charset="-120"/>
-              </a:rPr>
-              <a:t>（　　　　　　　　）が</a:t>
-            </a:r>
-            <a:endParaRPr lang="en-US" sz="2000" dirty="0"/>
-          </a:p>
-          <a:p>
-            <a:pPr algn="ctr" indent="0" marL="0">
-              <a:buNone/>
-            </a:pPr>
-            <a:r>
-              <a:rPr lang="en-US" sz="2000" dirty="0">
-                <a:solidFill>
-                  <a:srgbClr val="9E9E9E"/>
-                </a:solidFill>
-                <a:latin typeface="Zen Maru Gothic" pitchFamily="34" charset="0"/>
-                <a:ea typeface="Zen Maru Gothic" pitchFamily="34" charset="-122"/>
-                <a:cs typeface="Zen Maru Gothic" pitchFamily="34" charset="-120"/>
-              </a:rPr>
-              <a:t>むずかしかったよ</a:t>
-            </a:r>
-            <a:endParaRPr lang="en-US" sz="2000" dirty="0"/>
           </a:p>
         </p:txBody>
       </p:sp>
       <p:pic>
         <p:nvPicPr>
-          <p:cNvPr id="8" name="Image 0" descr="illust/yajirobe.png">    </p:cNvPr>
+          <p:cNvPr id="4" name="Image 0" descr="illust/kangaeru.png">    </p:cNvPr>
           <p:cNvPicPr>
             <a:picLocks noChangeAspect="1"/>
           </p:cNvPicPr>
@@ -6590,41 +9429,249 @@
         </p:blipFill>
         <p:spPr>
           <a:xfrm>
-            <a:off x="6035040" y="1234440"/>
-            <a:ext cx="1371600" cy="1371600"/>
+            <a:off x="548640" y="2194560"/>
+            <a:ext cx="1691640" cy="1691640"/>
           </a:xfrm>
           <a:prstGeom prst="rect">
             <a:avLst/>
           </a:prstGeom>
         </p:spPr>
       </p:pic>
-      <p:pic>
-        <p:nvPicPr>
-          <p:cNvPr id="9" name="Image 1" descr="illust/komma.png">    </p:cNvPr>
-          <p:cNvPicPr>
-            <a:picLocks noChangeAspect="1"/>
-          </p:cNvPicPr>
-          <p:nvPr/>
-        </p:nvPicPr>
-        <p:blipFill>
-          <a:blip r:embed="rId2"/>
-          <a:stretch>
-            <a:fillRect/>
-          </a:stretch>
-        </p:blipFill>
-        <p:spPr>
-          <a:xfrm>
-            <a:off x="7315200" y="2377440"/>
-            <a:ext cx="1280160" cy="1280160"/>
-          </a:xfrm>
-          <a:prstGeom prst="rect">
-            <a:avLst/>
-          </a:prstGeom>
-        </p:spPr>
-      </p:pic>
-      <p:sp>
-        <p:nvSpPr>
-          <p:cNvPr id="10" name="Shape 6"/>
+      <p:sp>
+        <p:nvSpPr>
+          <p:cNvPr id="5" name="Shape 2"/>
+          <p:cNvSpPr/>
+          <p:nvPr/>
+        </p:nvSpPr>
+        <p:spPr>
+          <a:xfrm>
+            <a:off x="2468880" y="1024128"/>
+            <a:ext cx="3017520" cy="1234440"/>
+          </a:xfrm>
+          <a:prstGeom prst="roundRect">
+            <a:avLst>
+              <a:gd name="adj" fmla="val 16296"/>
+            </a:avLst>
+          </a:prstGeom>
+          <a:solidFill>
+            <a:srgbClr val="FFFFFF"/>
+          </a:solidFill>
+          <a:ln w="31750">
+            <a:solidFill>
+              <a:srgbClr val="B39DDB"/>
+            </a:solidFill>
+            <a:prstDash val="solid"/>
+          </a:ln>
+        </p:spPr>
+      </p:sp>
+      <p:sp>
+        <p:nvSpPr>
+          <p:cNvPr id="6" name="Text 3"/>
+          <p:cNvSpPr/>
+          <p:nvPr/>
+        </p:nvSpPr>
+        <p:spPr>
+          <a:xfrm>
+            <a:off x="2606040" y="1024128"/>
+            <a:ext cx="2743200" cy="1234440"/>
+          </a:xfrm>
+          <a:prstGeom prst="rect">
+            <a:avLst/>
+          </a:prstGeom>
+          <a:noFill/>
+          <a:ln/>
+        </p:spPr>
+        <p:txBody>
+          <a:bodyPr wrap="square" lIns="0" tIns="0" rIns="0" bIns="0" rtlCol="0" anchor="ctr"/>
+          <a:lstStyle/>
+          <a:p>
+            <a:pPr algn="ctr" indent="0" marL="0">
+              <a:buNone/>
+            </a:pPr>
+            <a:r>
+              <a:rPr lang="en-US" sz="1600" dirty="0">
+                <a:solidFill>
+                  <a:srgbClr val="9E9E9E"/>
+                </a:solidFill>
+                <a:latin typeface="Zen Maru Gothic" pitchFamily="34" charset="0"/>
+                <a:ea typeface="Zen Maru Gothic" pitchFamily="34" charset="-122"/>
+                <a:cs typeface="Zen Maru Gothic" pitchFamily="34" charset="-120"/>
+              </a:rPr>
+              <a:t>もしかして</a:t>
+            </a:r>
+            <a:endParaRPr lang="en-US" sz="1600" dirty="0"/>
+          </a:p>
+          <a:p>
+            <a:pPr algn="ctr" indent="0" marL="0">
+              <a:buNone/>
+            </a:pPr>
+            <a:r>
+              <a:rPr lang="en-US" sz="1600" dirty="0">
+                <a:solidFill>
+                  <a:srgbClr val="9E9E9E"/>
+                </a:solidFill>
+                <a:latin typeface="Zen Maru Gothic" pitchFamily="34" charset="0"/>
+                <a:ea typeface="Zen Maru Gothic" pitchFamily="34" charset="-122"/>
+                <a:cs typeface="Zen Maru Gothic" pitchFamily="34" charset="-120"/>
+              </a:rPr>
+              <a:t>（　　　　　）かな?</a:t>
+            </a:r>
+            <a:endParaRPr lang="en-US" sz="1600" dirty="0"/>
+          </a:p>
+        </p:txBody>
+      </p:sp>
+      <p:sp>
+        <p:nvSpPr>
+          <p:cNvPr id="7" name="Shape 4"/>
+          <p:cNvSpPr/>
+          <p:nvPr/>
+        </p:nvSpPr>
+        <p:spPr>
+          <a:xfrm>
+            <a:off x="5623560" y="1024128"/>
+            <a:ext cx="3017520" cy="1234440"/>
+          </a:xfrm>
+          <a:prstGeom prst="roundRect">
+            <a:avLst>
+              <a:gd name="adj" fmla="val 16296"/>
+            </a:avLst>
+          </a:prstGeom>
+          <a:solidFill>
+            <a:srgbClr val="FFFFFF"/>
+          </a:solidFill>
+          <a:ln w="31750">
+            <a:solidFill>
+              <a:srgbClr val="B39DDB"/>
+            </a:solidFill>
+            <a:prstDash val="solid"/>
+          </a:ln>
+        </p:spPr>
+      </p:sp>
+      <p:sp>
+        <p:nvSpPr>
+          <p:cNvPr id="8" name="Text 5"/>
+          <p:cNvSpPr/>
+          <p:nvPr/>
+        </p:nvSpPr>
+        <p:spPr>
+          <a:xfrm>
+            <a:off x="5760720" y="1024128"/>
+            <a:ext cx="2743200" cy="1234440"/>
+          </a:xfrm>
+          <a:prstGeom prst="rect">
+            <a:avLst/>
+          </a:prstGeom>
+          <a:noFill/>
+          <a:ln/>
+        </p:spPr>
+        <p:txBody>
+          <a:bodyPr wrap="square" lIns="0" tIns="0" rIns="0" bIns="0" rtlCol="0" anchor="ctr"/>
+          <a:lstStyle/>
+          <a:p>
+            <a:pPr algn="ctr" indent="0" marL="0">
+              <a:buNone/>
+            </a:pPr>
+            <a:r>
+              <a:rPr lang="en-US" sz="1600" dirty="0">
+                <a:solidFill>
+                  <a:srgbClr val="9E9E9E"/>
+                </a:solidFill>
+                <a:latin typeface="Zen Maru Gothic" pitchFamily="34" charset="0"/>
+                <a:ea typeface="Zen Maru Gothic" pitchFamily="34" charset="-122"/>
+                <a:cs typeface="Zen Maru Gothic" pitchFamily="34" charset="-120"/>
+              </a:rPr>
+              <a:t>（　　　　　）を</a:t>
+            </a:r>
+            <a:endParaRPr lang="en-US" sz="1600" dirty="0"/>
+          </a:p>
+          <a:p>
+            <a:pPr algn="ctr" indent="0" marL="0">
+              <a:buNone/>
+            </a:pPr>
+            <a:r>
+              <a:rPr lang="en-US" sz="1600" dirty="0">
+                <a:solidFill>
+                  <a:srgbClr val="9E9E9E"/>
+                </a:solidFill>
+                <a:latin typeface="Zen Maru Gothic" pitchFamily="34" charset="0"/>
+                <a:ea typeface="Zen Maru Gothic" pitchFamily="34" charset="-122"/>
+                <a:cs typeface="Zen Maru Gothic" pitchFamily="34" charset="-120"/>
+              </a:rPr>
+              <a:t>かえて みようかな</a:t>
+            </a:r>
+            <a:endParaRPr lang="en-US" sz="1600" dirty="0"/>
+          </a:p>
+        </p:txBody>
+      </p:sp>
+      <p:sp>
+        <p:nvSpPr>
+          <p:cNvPr id="9" name="Shape 6"/>
+          <p:cNvSpPr/>
+          <p:nvPr/>
+        </p:nvSpPr>
+        <p:spPr>
+          <a:xfrm>
+            <a:off x="2468880" y="2423160"/>
+            <a:ext cx="6172200" cy="1417320"/>
+          </a:xfrm>
+          <a:prstGeom prst="roundRect">
+            <a:avLst>
+              <a:gd name="adj" fmla="val 14194"/>
+            </a:avLst>
+          </a:prstGeom>
+          <a:solidFill>
+            <a:srgbClr val="FFFFFF"/>
+          </a:solidFill>
+          <a:ln w="31750">
+            <a:solidFill>
+              <a:srgbClr val="B39DDB"/>
+            </a:solidFill>
+            <a:prstDash val="solid"/>
+          </a:ln>
+        </p:spPr>
+      </p:sp>
+      <p:sp>
+        <p:nvSpPr>
+          <p:cNvPr id="10" name="Text 7"/>
+          <p:cNvSpPr/>
+          <p:nvPr/>
+        </p:nvSpPr>
+        <p:spPr>
+          <a:xfrm>
+            <a:off x="2606040" y="2423160"/>
+            <a:ext cx="5897880" cy="1417320"/>
+          </a:xfrm>
+          <a:prstGeom prst="rect">
+            <a:avLst/>
+          </a:prstGeom>
+          <a:noFill/>
+          <a:ln/>
+        </p:spPr>
+        <p:txBody>
+          <a:bodyPr wrap="square" lIns="0" tIns="0" rIns="0" bIns="0" rtlCol="0" anchor="ctr"/>
+          <a:lstStyle/>
+          <a:p>
+            <a:pPr algn="ctr" indent="0" marL="0">
+              <a:buNone/>
+            </a:pPr>
+            <a:r>
+              <a:rPr lang="en-US" sz="1600" dirty="0">
+                <a:solidFill>
+                  <a:srgbClr val="9E9E9E"/>
+                </a:solidFill>
+                <a:latin typeface="Zen Maru Gothic" pitchFamily="34" charset="0"/>
+                <a:ea typeface="Zen Maru Gothic" pitchFamily="34" charset="-122"/>
+                <a:cs typeface="Zen Maru Gothic" pitchFamily="34" charset="-120"/>
+              </a:rPr>
+              <a:t>ともだちが（　　　　　　　　）と おしえて くれた</a:t>
+            </a:r>
+            <a:endParaRPr lang="en-US" sz="1600" dirty="0"/>
+          </a:p>
+        </p:txBody>
+      </p:sp>
+      <p:sp>
+        <p:nvSpPr>
+          <p:cNvPr id="11" name="Shape 8"/>
           <p:cNvSpPr/>
           <p:nvPr/>
         </p:nvSpPr>
@@ -6651,7 +9698,7 @@
       </p:sp>
       <p:sp>
         <p:nvSpPr>
-          <p:cNvPr id="11" name="Text 7"/>
+          <p:cNvPr id="12" name="Text 9"/>
           <p:cNvSpPr/>
           <p:nvPr/>
         </p:nvSpPr>
@@ -6690,7 +9737,7 @@
       </p:sp>
       <p:sp>
         <p:nvSpPr>
-          <p:cNvPr id="12" name="Shape 8"/>
+          <p:cNvPr id="13" name="Shape 10"/>
           <p:cNvSpPr/>
           <p:nvPr/>
         </p:nvSpPr>
@@ -6717,30 +9764,30 @@
       </p:sp>
       <p:sp>
         <p:nvSpPr>
-          <p:cNvPr id="13" name="Text 9"/>
-          <p:cNvSpPr/>
-          <p:nvPr/>
-        </p:nvSpPr>
-        <p:spPr>
-          <a:xfrm>
-            <a:off x="493776" y="4503420"/>
-            <a:ext cx="1240536" cy="420624"/>
-          </a:xfrm>
-          <a:prstGeom prst="rect">
-            <a:avLst/>
-          </a:prstGeom>
-          <a:noFill/>
-          <a:ln/>
-        </p:spPr>
-        <p:txBody>
-          <a:bodyPr wrap="square" lIns="0" tIns="0" rIns="0" bIns="0" rtlCol="0" anchor="ctr"/>
-          <a:lstStyle/>
-          <a:p>
-            <a:pPr algn="ctr" indent="0" marL="0">
-              <a:buNone/>
-            </a:pPr>
-            <a:r>
-              <a:rPr lang="en-US" sz="1200" b="1" dirty="0">
+          <p:cNvPr id="14" name="Text 11"/>
+          <p:cNvSpPr/>
+          <p:nvPr/>
+        </p:nvSpPr>
+        <p:spPr>
+          <a:xfrm>
+            <a:off x="484632" y="4503420"/>
+            <a:ext cx="1258824" cy="420624"/>
+          </a:xfrm>
+          <a:prstGeom prst="rect">
+            <a:avLst/>
+          </a:prstGeom>
+          <a:noFill/>
+          <a:ln/>
+        </p:spPr>
+        <p:txBody>
+          <a:bodyPr wrap="square" lIns="0" tIns="0" rIns="0" bIns="0" rtlCol="0" anchor="ctr"/>
+          <a:lstStyle/>
+          <a:p>
+            <a:pPr algn="ctr" indent="0" marL="0">
+              <a:buNone/>
+            </a:pPr>
+            <a:r>
+              <a:rPr lang="en-US" sz="1100" b="1" dirty="0">
                 <a:solidFill>
                   <a:srgbClr val="6D4C41"/>
                 </a:solidFill>
@@ -6748,15 +9795,15 @@
                 <a:ea typeface="Zen Maru Gothic" pitchFamily="34" charset="-122"/>
                 <a:cs typeface="Zen Maru Gothic" pitchFamily="34" charset="-120"/>
               </a:rPr>
-              <a:t>いろ</a:t>
-            </a:r>
-            <a:endParaRPr lang="en-US" sz="1200" dirty="0"/>
-          </a:p>
-        </p:txBody>
-      </p:sp>
-      <p:sp>
-        <p:nvSpPr>
-          <p:cNvPr id="14" name="Shape 10"/>
+              <a:t>ぼうの ながさ</a:t>
+            </a:r>
+            <a:endParaRPr lang="en-US" sz="1100" dirty="0"/>
+          </a:p>
+        </p:txBody>
+      </p:sp>
+      <p:sp>
+        <p:nvSpPr>
+          <p:cNvPr id="15" name="Shape 12"/>
           <p:cNvSpPr/>
           <p:nvPr/>
         </p:nvSpPr>
@@ -6783,30 +9830,30 @@
       </p:sp>
       <p:sp>
         <p:nvSpPr>
-          <p:cNvPr id="15" name="Text 11"/>
-          <p:cNvSpPr/>
-          <p:nvPr/>
-        </p:nvSpPr>
-        <p:spPr>
-          <a:xfrm>
-            <a:off x="1880616" y="4503420"/>
-            <a:ext cx="1240536" cy="420624"/>
-          </a:xfrm>
-          <a:prstGeom prst="rect">
-            <a:avLst/>
-          </a:prstGeom>
-          <a:noFill/>
-          <a:ln/>
-        </p:spPr>
-        <p:txBody>
-          <a:bodyPr wrap="square" lIns="0" tIns="0" rIns="0" bIns="0" rtlCol="0" anchor="ctr"/>
-          <a:lstStyle/>
-          <a:p>
-            <a:pPr algn="ctr" indent="0" marL="0">
-              <a:buNone/>
-            </a:pPr>
-            <a:r>
-              <a:rPr lang="en-US" sz="1200" b="1" dirty="0">
+          <p:cNvPr id="16" name="Text 13"/>
+          <p:cNvSpPr/>
+          <p:nvPr/>
+        </p:nvSpPr>
+        <p:spPr>
+          <a:xfrm>
+            <a:off x="1871472" y="4503420"/>
+            <a:ext cx="1258824" cy="420624"/>
+          </a:xfrm>
+          <a:prstGeom prst="rect">
+            <a:avLst/>
+          </a:prstGeom>
+          <a:noFill/>
+          <a:ln/>
+        </p:spPr>
+        <p:txBody>
+          <a:bodyPr wrap="square" lIns="0" tIns="0" rIns="0" bIns="0" rtlCol="0" anchor="ctr"/>
+          <a:lstStyle/>
+          <a:p>
+            <a:pPr algn="ctr" indent="0" marL="0">
+              <a:buNone/>
+            </a:pPr>
+            <a:r>
+              <a:rPr lang="en-US" sz="1100" b="1" dirty="0">
                 <a:solidFill>
                   <a:srgbClr val="6D4C41"/>
                 </a:solidFill>
@@ -6814,15 +9861,15 @@
                 <a:ea typeface="Zen Maru Gothic" pitchFamily="34" charset="-122"/>
                 <a:cs typeface="Zen Maru Gothic" pitchFamily="34" charset="-120"/>
               </a:rPr>
-              <a:t>おおきさ</a:t>
-            </a:r>
-            <a:endParaRPr lang="en-US" sz="1200" dirty="0"/>
-          </a:p>
-        </p:txBody>
-      </p:sp>
-      <p:sp>
-        <p:nvSpPr>
-          <p:cNvPr id="16" name="Shape 12"/>
+              <a:t>あなの ばしょ</a:t>
+            </a:r>
+            <a:endParaRPr lang="en-US" sz="1100" dirty="0"/>
+          </a:p>
+        </p:txBody>
+      </p:sp>
+      <p:sp>
+        <p:nvSpPr>
+          <p:cNvPr id="17" name="Shape 14"/>
           <p:cNvSpPr/>
           <p:nvPr/>
         </p:nvSpPr>
@@ -6849,14 +9896,14 @@
       </p:sp>
       <p:sp>
         <p:nvSpPr>
-          <p:cNvPr id="17" name="Text 13"/>
-          <p:cNvSpPr/>
-          <p:nvPr/>
-        </p:nvSpPr>
-        <p:spPr>
-          <a:xfrm>
-            <a:off x="3267456" y="4503420"/>
-            <a:ext cx="1240536" cy="420624"/>
+          <p:cNvPr id="18" name="Text 15"/>
+          <p:cNvSpPr/>
+          <p:nvPr/>
+        </p:nvSpPr>
+        <p:spPr>
+          <a:xfrm>
+            <a:off x="3258312" y="4503420"/>
+            <a:ext cx="1258824" cy="420624"/>
           </a:xfrm>
           <a:prstGeom prst="rect">
             <a:avLst/>
@@ -6880,7 +9927,7 @@
                 <a:ea typeface="Zen Maru Gothic" pitchFamily="34" charset="-122"/>
                 <a:cs typeface="Zen Maru Gothic" pitchFamily="34" charset="-120"/>
               </a:rPr>
-              <a:t>もよう</a:t>
+              <a:t>おもさ</a:t>
             </a:r>
             <a:endParaRPr lang="en-US" sz="1200" dirty="0"/>
           </a:p>
@@ -6888,7 +9935,7 @@
       </p:sp>
       <p:sp>
         <p:nvSpPr>
-          <p:cNvPr id="18" name="Shape 14"/>
+          <p:cNvPr id="19" name="Shape 16"/>
           <p:cNvSpPr/>
           <p:nvPr/>
         </p:nvSpPr>
@@ -6915,14 +9962,14 @@
       </p:sp>
       <p:sp>
         <p:nvSpPr>
-          <p:cNvPr id="19" name="Text 15"/>
-          <p:cNvSpPr/>
-          <p:nvPr/>
-        </p:nvSpPr>
-        <p:spPr>
-          <a:xfrm>
-            <a:off x="4654296" y="4503420"/>
-            <a:ext cx="1240536" cy="420624"/>
+          <p:cNvPr id="20" name="Text 17"/>
+          <p:cNvSpPr/>
+          <p:nvPr/>
+        </p:nvSpPr>
+        <p:spPr>
+          <a:xfrm>
+            <a:off x="4645152" y="4503420"/>
+            <a:ext cx="1258824" cy="420624"/>
           </a:xfrm>
           <a:prstGeom prst="rect">
             <a:avLst/>
@@ -6946,7 +9993,7 @@
                 <a:ea typeface="Zen Maru Gothic" pitchFamily="34" charset="-122"/>
                 <a:cs typeface="Zen Maru Gothic" pitchFamily="34" charset="-120"/>
               </a:rPr>
-              <a:t>ひもの ながさ</a:t>
+              <a:t>ざいりょう</a:t>
             </a:r>
             <a:endParaRPr lang="en-US" sz="1200" dirty="0"/>
           </a:p>
@@ -6954,7 +10001,7 @@
       </p:sp>
       <p:sp>
         <p:nvSpPr>
-          <p:cNvPr id="20" name="Shape 16"/>
+          <p:cNvPr id="21" name="Shape 18"/>
           <p:cNvSpPr/>
           <p:nvPr/>
         </p:nvSpPr>
@@ -6981,14 +10028,14 @@
       </p:sp>
       <p:sp>
         <p:nvSpPr>
-          <p:cNvPr id="21" name="Text 17"/>
-          <p:cNvSpPr/>
-          <p:nvPr/>
-        </p:nvSpPr>
-        <p:spPr>
-          <a:xfrm>
-            <a:off x="6041136" y="4503420"/>
-            <a:ext cx="1240536" cy="420624"/>
+          <p:cNvPr id="22" name="Text 19"/>
+          <p:cNvSpPr/>
+          <p:nvPr/>
+        </p:nvSpPr>
+        <p:spPr>
+          <a:xfrm>
+            <a:off x="6031992" y="4503420"/>
+            <a:ext cx="1258824" cy="420624"/>
           </a:xfrm>
           <a:prstGeom prst="rect">
             <a:avLst/>
@@ -7012,7 +10059,7 @@
                 <a:ea typeface="Zen Maru Gothic" pitchFamily="34" charset="-122"/>
                 <a:cs typeface="Zen Maru Gothic" pitchFamily="34" charset="-120"/>
               </a:rPr>
-              <a:t>かざり</a:t>
+              <a:t>むすびかた</a:t>
             </a:r>
             <a:endParaRPr lang="en-US" sz="1200" dirty="0"/>
           </a:p>
@@ -7020,7 +10067,7 @@
       </p:sp>
       <p:sp>
         <p:nvSpPr>
-          <p:cNvPr id="22" name="Shape 18"/>
+          <p:cNvPr id="23" name="Shape 20"/>
           <p:cNvSpPr/>
           <p:nvPr/>
         </p:nvSpPr>
@@ -7047,14 +10094,14 @@
       </p:sp>
       <p:sp>
         <p:nvSpPr>
-          <p:cNvPr id="23" name="Text 19"/>
-          <p:cNvSpPr/>
-          <p:nvPr/>
-        </p:nvSpPr>
-        <p:spPr>
-          <a:xfrm>
-            <a:off x="7427976" y="4503420"/>
-            <a:ext cx="1240536" cy="420624"/>
+          <p:cNvPr id="24" name="Text 21"/>
+          <p:cNvSpPr/>
+          <p:nvPr/>
+        </p:nvSpPr>
+        <p:spPr>
+          <a:xfrm>
+            <a:off x="7418832" y="4503420"/>
+            <a:ext cx="1258824" cy="420624"/>
           </a:xfrm>
           <a:prstGeom prst="rect">
             <a:avLst/>
@@ -7078,7 +10125,7 @@
                 <a:ea typeface="Zen Maru Gothic" pitchFamily="34" charset="-122"/>
                 <a:cs typeface="Zen Maru Gothic" pitchFamily="34" charset="-120"/>
               </a:rPr>
-              <a:t>あなの ばしょ</a:t>
+              <a:t>かたち</a:t>
             </a:r>
             <a:endParaRPr lang="en-US" sz="1200" dirty="0"/>
           </a:p>
@@ -7133,11 +10180,11 @@
             </a:avLst>
           </a:prstGeom>
           <a:solidFill>
-            <a:srgbClr val="E91E63"/>
+            <a:srgbClr val="4CAF50"/>
           </a:solidFill>
           <a:ln w="12700">
             <a:solidFill>
-              <a:srgbClr val="E91E63"/>
+              <a:srgbClr val="4CAF50"/>
             </a:solidFill>
             <a:prstDash val="solid"/>
           </a:ln>
@@ -7176,7 +10223,7 @@
                 <a:ea typeface="Zen Maru Gothic" pitchFamily="34" charset="-122"/>
                 <a:cs typeface="Zen Maru Gothic" pitchFamily="34" charset="-120"/>
               </a:rPr>
-              <a:t>かんそう</a:t>
+              <a:t>こうして みたら… できた!</a:t>
             </a:r>
             <a:endParaRPr lang="en-US" sz="2600" dirty="0"/>
           </a:p>
@@ -7184,26 +10231,65 @@
       </p:sp>
       <p:sp>
         <p:nvSpPr>
-          <p:cNvPr id="4" name="Shape 2"/>
-          <p:cNvSpPr/>
-          <p:nvPr/>
-        </p:nvSpPr>
-        <p:spPr>
-          <a:xfrm>
-            <a:off x="502920" y="1051560"/>
-            <a:ext cx="8138160" cy="1234440"/>
+          <p:cNvPr id="4" name="Text 2"/>
+          <p:cNvSpPr/>
+          <p:nvPr/>
+        </p:nvSpPr>
+        <p:spPr>
+          <a:xfrm>
+            <a:off x="548640" y="960120"/>
+            <a:ext cx="3200400" cy="320040"/>
+          </a:xfrm>
+          <a:prstGeom prst="rect">
+            <a:avLst/>
+          </a:prstGeom>
+          <a:noFill/>
+          <a:ln/>
+        </p:spPr>
+        <p:txBody>
+          <a:bodyPr wrap="square" lIns="0" tIns="0" rIns="0" bIns="0" rtlCol="0" anchor="ctr"/>
+          <a:lstStyle/>
+          <a:p>
+            <a:pPr algn="ctr" indent="0" marL="0">
+              <a:buNone/>
+            </a:pPr>
+            <a:r>
+              <a:rPr lang="en-US" sz="1500" b="1" dirty="0">
+                <a:solidFill>
+                  <a:srgbClr val="8D6E63"/>
+                </a:solidFill>
+                <a:latin typeface="Zen Maru Gothic" pitchFamily="34" charset="0"/>
+                <a:ea typeface="Zen Maru Gothic" pitchFamily="34" charset="-122"/>
+                <a:cs typeface="Zen Maru Gothic" pitchFamily="34" charset="-120"/>
+              </a:rPr>
+              <a:t>まえ</a:t>
+            </a:r>
+            <a:endParaRPr lang="en-US" sz="1500" dirty="0"/>
+          </a:p>
+        </p:txBody>
+      </p:sp>
+      <p:sp>
+        <p:nvSpPr>
+          <p:cNvPr id="5" name="Shape 3"/>
+          <p:cNvSpPr/>
+          <p:nvPr/>
+        </p:nvSpPr>
+        <p:spPr>
+          <a:xfrm>
+            <a:off x="548640" y="1325880"/>
+            <a:ext cx="3200400" cy="2011680"/>
           </a:xfrm>
           <a:prstGeom prst="roundRect">
             <a:avLst>
-              <a:gd name="adj" fmla="val 8889"/>
+              <a:gd name="adj" fmla="val 6364"/>
             </a:avLst>
           </a:prstGeom>
           <a:solidFill>
-            <a:srgbClr val="FFFFFF"/>
+            <a:srgbClr val="ECEFF1"/>
           </a:solidFill>
           <a:ln w="31750">
             <a:solidFill>
-              <a:srgbClr val="FFB74D"/>
+              <a:srgbClr val="90A4AE"/>
             </a:solidFill>
             <a:prstDash val="dash"/>
           </a:ln>
@@ -7211,65 +10297,152 @@
       </p:sp>
       <p:sp>
         <p:nvSpPr>
-          <p:cNvPr id="5" name="Text 3"/>
-          <p:cNvSpPr/>
-          <p:nvPr/>
-        </p:nvSpPr>
-        <p:spPr>
-          <a:xfrm>
-            <a:off x="612648" y="1051560"/>
-            <a:ext cx="7918704" cy="1234440"/>
-          </a:xfrm>
-          <a:prstGeom prst="rect">
-            <a:avLst/>
-          </a:prstGeom>
-          <a:noFill/>
-          <a:ln/>
-        </p:spPr>
-        <p:txBody>
-          <a:bodyPr wrap="square" lIns="0" tIns="0" rIns="0" bIns="0" rtlCol="0" anchor="ctr"/>
-          <a:lstStyle/>
-          <a:p>
-            <a:pPr algn="ctr" indent="0" marL="0">
-              <a:buNone/>
-            </a:pPr>
-            <a:r>
-              <a:rPr lang="en-US" sz="2100" dirty="0">
-                <a:solidFill>
-                  <a:srgbClr val="9E9E9E"/>
-                </a:solidFill>
-                <a:latin typeface="Zen Maru Gothic" pitchFamily="34" charset="0"/>
-                <a:ea typeface="Zen Maru Gothic" pitchFamily="34" charset="-122"/>
-                <a:cs typeface="Zen Maru Gothic" pitchFamily="34" charset="-120"/>
-              </a:rPr>
-              <a:t>つくって みて（　　　　　　　　）でした</a:t>
-            </a:r>
-            <a:endParaRPr lang="en-US" sz="2100" dirty="0"/>
-          </a:p>
-        </p:txBody>
-      </p:sp>
-      <p:sp>
-        <p:nvSpPr>
-          <p:cNvPr id="6" name="Shape 4"/>
-          <p:cNvSpPr/>
-          <p:nvPr/>
-        </p:nvSpPr>
-        <p:spPr>
-          <a:xfrm>
-            <a:off x="502920" y="2423160"/>
-            <a:ext cx="8138160" cy="1463040"/>
+          <p:cNvPr id="6" name="Text 4"/>
+          <p:cNvSpPr/>
+          <p:nvPr/>
+        </p:nvSpPr>
+        <p:spPr>
+          <a:xfrm>
+            <a:off x="548640" y="1325880"/>
+            <a:ext cx="3200400" cy="2011680"/>
+          </a:xfrm>
+          <a:prstGeom prst="rect">
+            <a:avLst/>
+          </a:prstGeom>
+          <a:noFill/>
+          <a:ln/>
+        </p:spPr>
+        <p:txBody>
+          <a:bodyPr wrap="square" lIns="0" tIns="0" rIns="0" bIns="0" rtlCol="0" anchor="ctr"/>
+          <a:lstStyle/>
+          <a:p>
+            <a:pPr algn="ctr" indent="0" marL="0">
+              <a:lnSpc>
+                <a:spcPct val="130000"/>
+              </a:lnSpc>
+              <a:buNone/>
+            </a:pPr>
+            <a:r>
+              <a:rPr lang="en-US" sz="1300" dirty="0">
+                <a:solidFill>
+                  <a:srgbClr val="607D8B"/>
+                </a:solidFill>
+                <a:latin typeface="Zen Maru Gothic" pitchFamily="34" charset="0"/>
+                <a:ea typeface="Zen Maru Gothic" pitchFamily="34" charset="-122"/>
+                <a:cs typeface="Zen Maru Gothic" pitchFamily="34" charset="-120"/>
+              </a:rPr>
+              <a:t>しゃしんを</a:t>
+            </a:r>
+            <a:endParaRPr lang="en-US" sz="1300" dirty="0"/>
+          </a:p>
+          <a:p>
+            <a:pPr algn="ctr" indent="0" marL="0">
+              <a:lnSpc>
+                <a:spcPct val="130000"/>
+              </a:lnSpc>
+              <a:buNone/>
+            </a:pPr>
+            <a:r>
+              <a:rPr lang="en-US" sz="1300" dirty="0">
+                <a:solidFill>
+                  <a:srgbClr val="607D8B"/>
+                </a:solidFill>
+                <a:latin typeface="Zen Maru Gothic" pitchFamily="34" charset="0"/>
+                <a:ea typeface="Zen Maru Gothic" pitchFamily="34" charset="-122"/>
+                <a:cs typeface="Zen Maru Gothic" pitchFamily="34" charset="-120"/>
+              </a:rPr>
+              <a:t>ここに</a:t>
+            </a:r>
+            <a:endParaRPr lang="en-US" sz="1300" dirty="0"/>
+          </a:p>
+        </p:txBody>
+      </p:sp>
+      <p:sp>
+        <p:nvSpPr>
+          <p:cNvPr id="7" name="Shape 5"/>
+          <p:cNvSpPr/>
+          <p:nvPr/>
+        </p:nvSpPr>
+        <p:spPr>
+          <a:xfrm>
+            <a:off x="3913632" y="2011680"/>
+            <a:ext cx="1005840" cy="685800"/>
+          </a:xfrm>
+          <a:prstGeom prst="rightArrow">
+            <a:avLst/>
+          </a:prstGeom>
+          <a:solidFill>
+            <a:srgbClr val="FF9800"/>
+          </a:solidFill>
+          <a:ln w="12700">
+            <a:solidFill>
+              <a:srgbClr val="FF9800"/>
+            </a:solidFill>
+            <a:prstDash val="solid"/>
+          </a:ln>
+        </p:spPr>
+      </p:sp>
+      <p:sp>
+        <p:nvSpPr>
+          <p:cNvPr id="8" name="Text 6"/>
+          <p:cNvSpPr/>
+          <p:nvPr/>
+        </p:nvSpPr>
+        <p:spPr>
+          <a:xfrm>
+            <a:off x="5074920" y="960120"/>
+            <a:ext cx="3200400" cy="320040"/>
+          </a:xfrm>
+          <a:prstGeom prst="rect">
+            <a:avLst/>
+          </a:prstGeom>
+          <a:noFill/>
+          <a:ln/>
+        </p:spPr>
+        <p:txBody>
+          <a:bodyPr wrap="square" lIns="0" tIns="0" rIns="0" bIns="0" rtlCol="0" anchor="ctr"/>
+          <a:lstStyle/>
+          <a:p>
+            <a:pPr algn="ctr" indent="0" marL="0">
+              <a:buNone/>
+            </a:pPr>
+            <a:r>
+              <a:rPr lang="en-US" sz="1500" b="1" dirty="0">
+                <a:solidFill>
+                  <a:srgbClr val="8D6E63"/>
+                </a:solidFill>
+                <a:latin typeface="Zen Maru Gothic" pitchFamily="34" charset="0"/>
+                <a:ea typeface="Zen Maru Gothic" pitchFamily="34" charset="-122"/>
+                <a:cs typeface="Zen Maru Gothic" pitchFamily="34" charset="-120"/>
+              </a:rPr>
+              <a:t>あと</a:t>
+            </a:r>
+            <a:endParaRPr lang="en-US" sz="1500" dirty="0"/>
+          </a:p>
+        </p:txBody>
+      </p:sp>
+      <p:sp>
+        <p:nvSpPr>
+          <p:cNvPr id="9" name="Shape 7"/>
+          <p:cNvSpPr/>
+          <p:nvPr/>
+        </p:nvSpPr>
+        <p:spPr>
+          <a:xfrm>
+            <a:off x="5074920" y="1325880"/>
+            <a:ext cx="3200400" cy="2011680"/>
           </a:xfrm>
           <a:prstGeom prst="roundRect">
             <a:avLst>
-              <a:gd name="adj" fmla="val 7500"/>
+              <a:gd name="adj" fmla="val 6364"/>
             </a:avLst>
           </a:prstGeom>
           <a:solidFill>
-            <a:srgbClr val="FFFFFF"/>
+            <a:srgbClr val="ECEFF1"/>
           </a:solidFill>
           <a:ln w="31750">
             <a:solidFill>
-              <a:srgbClr val="FFB74D"/>
+              <a:srgbClr val="90A4AE"/>
             </a:solidFill>
             <a:prstDash val="dash"/>
           </a:ln>
@@ -7277,30 +10450,143 @@
       </p:sp>
       <p:sp>
         <p:nvSpPr>
-          <p:cNvPr id="7" name="Text 5"/>
-          <p:cNvSpPr/>
-          <p:nvPr/>
-        </p:nvSpPr>
-        <p:spPr>
-          <a:xfrm>
-            <a:off x="612648" y="2423160"/>
-            <a:ext cx="7918704" cy="1463040"/>
-          </a:xfrm>
-          <a:prstGeom prst="rect">
-            <a:avLst/>
-          </a:prstGeom>
-          <a:noFill/>
-          <a:ln/>
-        </p:spPr>
-        <p:txBody>
-          <a:bodyPr wrap="square" lIns="0" tIns="0" rIns="0" bIns="0" rtlCol="0" anchor="ctr"/>
-          <a:lstStyle/>
-          <a:p>
-            <a:pPr algn="ctr" indent="0" marL="0">
-              <a:buNone/>
-            </a:pPr>
-            <a:r>
-              <a:rPr lang="en-US" sz="2100" dirty="0">
+          <p:cNvPr id="10" name="Text 8"/>
+          <p:cNvSpPr/>
+          <p:nvPr/>
+        </p:nvSpPr>
+        <p:spPr>
+          <a:xfrm>
+            <a:off x="5074920" y="1325880"/>
+            <a:ext cx="3200400" cy="2011680"/>
+          </a:xfrm>
+          <a:prstGeom prst="rect">
+            <a:avLst/>
+          </a:prstGeom>
+          <a:noFill/>
+          <a:ln/>
+        </p:spPr>
+        <p:txBody>
+          <a:bodyPr wrap="square" lIns="0" tIns="0" rIns="0" bIns="0" rtlCol="0" anchor="ctr"/>
+          <a:lstStyle/>
+          <a:p>
+            <a:pPr algn="ctr" indent="0" marL="0">
+              <a:lnSpc>
+                <a:spcPct val="130000"/>
+              </a:lnSpc>
+              <a:buNone/>
+            </a:pPr>
+            <a:r>
+              <a:rPr lang="en-US" sz="1300" dirty="0">
+                <a:solidFill>
+                  <a:srgbClr val="607D8B"/>
+                </a:solidFill>
+                <a:latin typeface="Zen Maru Gothic" pitchFamily="34" charset="0"/>
+                <a:ea typeface="Zen Maru Gothic" pitchFamily="34" charset="-122"/>
+                <a:cs typeface="Zen Maru Gothic" pitchFamily="34" charset="-120"/>
+              </a:rPr>
+              <a:t>しゃしんを</a:t>
+            </a:r>
+            <a:endParaRPr lang="en-US" sz="1300" dirty="0"/>
+          </a:p>
+          <a:p>
+            <a:pPr algn="ctr" indent="0" marL="0">
+              <a:lnSpc>
+                <a:spcPct val="130000"/>
+              </a:lnSpc>
+              <a:buNone/>
+            </a:pPr>
+            <a:r>
+              <a:rPr lang="en-US" sz="1300" dirty="0">
+                <a:solidFill>
+                  <a:srgbClr val="607D8B"/>
+                </a:solidFill>
+                <a:latin typeface="Zen Maru Gothic" pitchFamily="34" charset="0"/>
+                <a:ea typeface="Zen Maru Gothic" pitchFamily="34" charset="-122"/>
+                <a:cs typeface="Zen Maru Gothic" pitchFamily="34" charset="-120"/>
+              </a:rPr>
+              <a:t>ここに</a:t>
+            </a:r>
+            <a:endParaRPr lang="en-US" sz="1300" dirty="0"/>
+          </a:p>
+        </p:txBody>
+      </p:sp>
+      <p:pic>
+        <p:nvPicPr>
+          <p:cNvPr id="11" name="Image 0" descr="illust/dekita.png">    </p:cNvPr>
+          <p:cNvPicPr>
+            <a:picLocks noChangeAspect="1"/>
+          </p:cNvPicPr>
+          <p:nvPr/>
+        </p:nvPicPr>
+        <p:blipFill>
+          <a:blip r:embed="rId1"/>
+          <a:stretch>
+            <a:fillRect/>
+          </a:stretch>
+        </p:blipFill>
+        <p:spPr>
+          <a:xfrm>
+            <a:off x="8001000" y="3063240"/>
+            <a:ext cx="1005840" cy="1005840"/>
+          </a:xfrm>
+          <a:prstGeom prst="rect">
+            <a:avLst/>
+          </a:prstGeom>
+        </p:spPr>
+      </p:pic>
+      <p:sp>
+        <p:nvSpPr>
+          <p:cNvPr id="12" name="Shape 9"/>
+          <p:cNvSpPr/>
+          <p:nvPr/>
+        </p:nvSpPr>
+        <p:spPr>
+          <a:xfrm>
+            <a:off x="548640" y="3456432"/>
+            <a:ext cx="7315200" cy="685800"/>
+          </a:xfrm>
+          <a:prstGeom prst="roundRect">
+            <a:avLst>
+              <a:gd name="adj" fmla="val 16000"/>
+            </a:avLst>
+          </a:prstGeom>
+          <a:solidFill>
+            <a:srgbClr val="FFFFFF"/>
+          </a:solidFill>
+          <a:ln w="31750">
+            <a:solidFill>
+              <a:srgbClr val="A5D6A7"/>
+            </a:solidFill>
+            <a:prstDash val="dash"/>
+          </a:ln>
+        </p:spPr>
+      </p:sp>
+      <p:sp>
+        <p:nvSpPr>
+          <p:cNvPr id="13" name="Text 10"/>
+          <p:cNvSpPr/>
+          <p:nvPr/>
+        </p:nvSpPr>
+        <p:spPr>
+          <a:xfrm>
+            <a:off x="658368" y="3456432"/>
+            <a:ext cx="7095744" cy="685800"/>
+          </a:xfrm>
+          <a:prstGeom prst="rect">
+            <a:avLst/>
+          </a:prstGeom>
+          <a:noFill/>
+          <a:ln/>
+        </p:spPr>
+        <p:txBody>
+          <a:bodyPr wrap="square" lIns="0" tIns="0" rIns="0" bIns="0" rtlCol="0" anchor="ctr"/>
+          <a:lstStyle/>
+          <a:p>
+            <a:pPr algn="ctr" indent="0" marL="0">
+              <a:buNone/>
+            </a:pPr>
+            <a:r>
+              <a:rPr lang="en-US" sz="1700" dirty="0">
                 <a:solidFill>
                   <a:srgbClr val="9E9E9E"/>
                 </a:solidFill>
@@ -7308,15 +10594,15 @@
                 <a:ea typeface="Zen Maru Gothic" pitchFamily="34" charset="-122"/>
                 <a:cs typeface="Zen Maru Gothic" pitchFamily="34" charset="-120"/>
               </a:rPr>
-              <a:t>つぎは（　　　　　　　　）を つくりたいです</a:t>
-            </a:r>
-            <a:endParaRPr lang="en-US" sz="2100" dirty="0"/>
-          </a:p>
-        </p:txBody>
-      </p:sp>
-      <p:sp>
-        <p:nvSpPr>
-          <p:cNvPr id="8" name="Shape 6"/>
+              <a:t>（　　　　　　　）を かえたら、うまく いった!</a:t>
+            </a:r>
+            <a:endParaRPr lang="en-US" sz="1700" dirty="0"/>
+          </a:p>
+        </p:txBody>
+      </p:sp>
+      <p:sp>
+        <p:nvSpPr>
+          <p:cNvPr id="14" name="Shape 11"/>
           <p:cNvSpPr/>
           <p:nvPr/>
         </p:nvSpPr>
@@ -7343,7 +10629,7 @@
       </p:sp>
       <p:sp>
         <p:nvSpPr>
-          <p:cNvPr id="9" name="Text 7"/>
+          <p:cNvPr id="15" name="Text 12"/>
           <p:cNvSpPr/>
           <p:nvPr/>
         </p:nvSpPr>
@@ -7382,7 +10668,7 @@
       </p:sp>
       <p:sp>
         <p:nvSpPr>
-          <p:cNvPr id="10" name="Shape 8"/>
+          <p:cNvPr id="16" name="Shape 13"/>
           <p:cNvSpPr/>
           <p:nvPr/>
         </p:nvSpPr>
@@ -7409,14 +10695,14 @@
       </p:sp>
       <p:sp>
         <p:nvSpPr>
-          <p:cNvPr id="11" name="Text 9"/>
-          <p:cNvSpPr/>
-          <p:nvPr/>
-        </p:nvSpPr>
-        <p:spPr>
-          <a:xfrm>
-            <a:off x="493776" y="4503420"/>
-            <a:ext cx="1240536" cy="420624"/>
+          <p:cNvPr id="17" name="Text 14"/>
+          <p:cNvSpPr/>
+          <p:nvPr/>
+        </p:nvSpPr>
+        <p:spPr>
+          <a:xfrm>
+            <a:off x="484632" y="4503420"/>
+            <a:ext cx="1258824" cy="420624"/>
           </a:xfrm>
           <a:prstGeom prst="rect">
             <a:avLst/>
@@ -7440,7 +10726,7 @@
                 <a:ea typeface="Zen Maru Gothic" pitchFamily="34" charset="-122"/>
                 <a:cs typeface="Zen Maru Gothic" pitchFamily="34" charset="-120"/>
               </a:rPr>
-              <a:t>たのしかった</a:t>
+              <a:t>ながさ</a:t>
             </a:r>
             <a:endParaRPr lang="en-US" sz="1200" dirty="0"/>
           </a:p>
@@ -7448,7 +10734,7 @@
       </p:sp>
       <p:sp>
         <p:nvSpPr>
-          <p:cNvPr id="12" name="Shape 10"/>
+          <p:cNvPr id="18" name="Shape 15"/>
           <p:cNvSpPr/>
           <p:nvPr/>
         </p:nvSpPr>
@@ -7475,14 +10761,14 @@
       </p:sp>
       <p:sp>
         <p:nvSpPr>
-          <p:cNvPr id="13" name="Text 11"/>
-          <p:cNvSpPr/>
-          <p:nvPr/>
-        </p:nvSpPr>
-        <p:spPr>
-          <a:xfrm>
-            <a:off x="1880616" y="4503420"/>
-            <a:ext cx="1240536" cy="420624"/>
+          <p:cNvPr id="19" name="Text 16"/>
+          <p:cNvSpPr/>
+          <p:nvPr/>
+        </p:nvSpPr>
+        <p:spPr>
+          <a:xfrm>
+            <a:off x="1871472" y="4503420"/>
+            <a:ext cx="1258824" cy="420624"/>
           </a:xfrm>
           <a:prstGeom prst="rect">
             <a:avLst/>
@@ -7506,7 +10792,7 @@
                 <a:ea typeface="Zen Maru Gothic" pitchFamily="34" charset="-122"/>
                 <a:cs typeface="Zen Maru Gothic" pitchFamily="34" charset="-120"/>
               </a:rPr>
-              <a:t>うれしかった</a:t>
+              <a:t>おもさ</a:t>
             </a:r>
             <a:endParaRPr lang="en-US" sz="1200" dirty="0"/>
           </a:p>
@@ -7514,7 +10800,7 @@
       </p:sp>
       <p:sp>
         <p:nvSpPr>
-          <p:cNvPr id="14" name="Shape 12"/>
+          <p:cNvPr id="20" name="Shape 17"/>
           <p:cNvSpPr/>
           <p:nvPr/>
         </p:nvSpPr>
@@ -7541,14 +10827,14 @@
       </p:sp>
       <p:sp>
         <p:nvSpPr>
-          <p:cNvPr id="15" name="Text 13"/>
-          <p:cNvSpPr/>
-          <p:nvPr/>
-        </p:nvSpPr>
-        <p:spPr>
-          <a:xfrm>
-            <a:off x="3267456" y="4503420"/>
-            <a:ext cx="1240536" cy="420624"/>
+          <p:cNvPr id="21" name="Text 18"/>
+          <p:cNvSpPr/>
+          <p:nvPr/>
+        </p:nvSpPr>
+        <p:spPr>
+          <a:xfrm>
+            <a:off x="3258312" y="4503420"/>
+            <a:ext cx="1258824" cy="420624"/>
           </a:xfrm>
           <a:prstGeom prst="rect">
             <a:avLst/>
@@ -7572,7 +10858,7 @@
                 <a:ea typeface="Zen Maru Gothic" pitchFamily="34" charset="-122"/>
                 <a:cs typeface="Zen Maru Gothic" pitchFamily="34" charset="-120"/>
               </a:rPr>
-              <a:t>むずかしかった</a:t>
+              <a:t>ばしょ</a:t>
             </a:r>
             <a:endParaRPr lang="en-US" sz="1200" dirty="0"/>
           </a:p>
@@ -7580,7 +10866,7 @@
       </p:sp>
       <p:sp>
         <p:nvSpPr>
-          <p:cNvPr id="16" name="Shape 14"/>
+          <p:cNvPr id="22" name="Shape 19"/>
           <p:cNvSpPr/>
           <p:nvPr/>
         </p:nvSpPr>
@@ -7607,14 +10893,14 @@
       </p:sp>
       <p:sp>
         <p:nvSpPr>
-          <p:cNvPr id="17" name="Text 15"/>
-          <p:cNvSpPr/>
-          <p:nvPr/>
-        </p:nvSpPr>
-        <p:spPr>
-          <a:xfrm>
-            <a:off x="4654296" y="4503420"/>
-            <a:ext cx="1240536" cy="420624"/>
+          <p:cNvPr id="23" name="Text 20"/>
+          <p:cNvSpPr/>
+          <p:nvPr/>
+        </p:nvSpPr>
+        <p:spPr>
+          <a:xfrm>
+            <a:off x="4645152" y="4503420"/>
+            <a:ext cx="1258824" cy="420624"/>
           </a:xfrm>
           <a:prstGeom prst="rect">
             <a:avLst/>
@@ -7638,7 +10924,7 @@
                 <a:ea typeface="Zen Maru Gothic" pitchFamily="34" charset="-122"/>
                 <a:cs typeface="Zen Maru Gothic" pitchFamily="34" charset="-120"/>
               </a:rPr>
-              <a:t>どきどき した</a:t>
+              <a:t>かたち</a:t>
             </a:r>
             <a:endParaRPr lang="en-US" sz="1200" dirty="0"/>
           </a:p>
@@ -7646,7 +10932,7 @@
       </p:sp>
       <p:sp>
         <p:nvSpPr>
-          <p:cNvPr id="18" name="Shape 16"/>
+          <p:cNvPr id="24" name="Shape 21"/>
           <p:cNvSpPr/>
           <p:nvPr/>
         </p:nvSpPr>
@@ -7673,14 +10959,14 @@
       </p:sp>
       <p:sp>
         <p:nvSpPr>
-          <p:cNvPr id="19" name="Text 17"/>
-          <p:cNvSpPr/>
-          <p:nvPr/>
-        </p:nvSpPr>
-        <p:spPr>
-          <a:xfrm>
-            <a:off x="6041136" y="4503420"/>
-            <a:ext cx="1240536" cy="420624"/>
+          <p:cNvPr id="25" name="Text 22"/>
+          <p:cNvSpPr/>
+          <p:nvPr/>
+        </p:nvSpPr>
+        <p:spPr>
+          <a:xfrm>
+            <a:off x="6031992" y="4503420"/>
+            <a:ext cx="1258824" cy="420624"/>
           </a:xfrm>
           <a:prstGeom prst="rect">
             <a:avLst/>
@@ -7704,7 +10990,7 @@
                 <a:ea typeface="Zen Maru Gothic" pitchFamily="34" charset="-122"/>
                 <a:cs typeface="Zen Maru Gothic" pitchFamily="34" charset="-120"/>
               </a:rPr>
-              <a:t>また やりたい</a:t>
+              <a:t>むすびかた</a:t>
             </a:r>
             <a:endParaRPr lang="en-US" sz="1200" dirty="0"/>
           </a:p>
@@ -7712,7 +10998,7 @@
       </p:sp>
       <p:sp>
         <p:nvSpPr>
-          <p:cNvPr id="20" name="Shape 18"/>
+          <p:cNvPr id="26" name="Shape 23"/>
           <p:cNvSpPr/>
           <p:nvPr/>
         </p:nvSpPr>
@@ -7739,14 +11025,14 @@
       </p:sp>
       <p:sp>
         <p:nvSpPr>
-          <p:cNvPr id="21" name="Text 19"/>
-          <p:cNvSpPr/>
-          <p:nvPr/>
-        </p:nvSpPr>
-        <p:spPr>
-          <a:xfrm>
-            <a:off x="7427976" y="4503420"/>
-            <a:ext cx="1240536" cy="420624"/>
+          <p:cNvPr id="27" name="Text 24"/>
+          <p:cNvSpPr/>
+          <p:nvPr/>
+        </p:nvSpPr>
+        <p:spPr>
+          <a:xfrm>
+            <a:off x="7418832" y="4503420"/>
+            <a:ext cx="1258824" cy="420624"/>
           </a:xfrm>
           <a:prstGeom prst="rect">
             <a:avLst/>
@@ -7770,7 +11056,7 @@
                 <a:ea typeface="Zen Maru Gothic" pitchFamily="34" charset="-122"/>
                 <a:cs typeface="Zen Maru Gothic" pitchFamily="34" charset="-120"/>
               </a:rPr>
-              <a:t>よく できた</a:t>
+              <a:t>ざいりょう</a:t>
             </a:r>
             <a:endParaRPr lang="en-US" sz="1200" dirty="0"/>
           </a:p>
@@ -7810,42 +11096,30 @@
       </p:grpSpPr>
       <p:sp>
         <p:nvSpPr>
-          <p:cNvPr id="2" name="Text 0"/>
-          <p:cNvSpPr/>
-          <p:nvPr/>
-        </p:nvSpPr>
-        <p:spPr>
-          <a:xfrm>
-            <a:off x="548640" y="1417320"/>
-            <a:ext cx="8046720" cy="1005840"/>
-          </a:xfrm>
-          <a:prstGeom prst="rect">
-            <a:avLst/>
-          </a:prstGeom>
-          <a:noFill/>
-          <a:ln/>
-        </p:spPr>
-        <p:txBody>
-          <a:bodyPr wrap="square" lIns="0" tIns="0" rIns="0" bIns="0" rtlCol="0" anchor="ctr"/>
-          <a:lstStyle/>
-          <a:p>
-            <a:pPr algn="ctr" indent="0" marL="0">
-              <a:buNone/>
-            </a:pPr>
-            <a:r>
-              <a:rPr lang="en-US" sz="4200" b="1" dirty="0">
-                <a:solidFill>
-                  <a:srgbClr val="E65100"/>
-                </a:solidFill>
-                <a:latin typeface="Zen Maru Gothic" pitchFamily="34" charset="0"/>
-                <a:ea typeface="Zen Maru Gothic" pitchFamily="34" charset="-122"/>
-                <a:cs typeface="Zen Maru Gothic" pitchFamily="34" charset="-120"/>
-              </a:rPr>
-              <a:t>あそんで みて ね</a:t>
-            </a:r>
-            <a:endParaRPr lang="en-US" sz="4200" dirty="0"/>
-          </a:p>
-        </p:txBody>
+          <p:cNvPr id="2" name="Shape 0"/>
+          <p:cNvSpPr/>
+          <p:nvPr/>
+        </p:nvSpPr>
+        <p:spPr>
+          <a:xfrm>
+            <a:off x="347472" y="201168"/>
+            <a:ext cx="8449056" cy="658368"/>
+          </a:xfrm>
+          <a:prstGeom prst="roundRect">
+            <a:avLst>
+              <a:gd name="adj" fmla="val 22222"/>
+            </a:avLst>
+          </a:prstGeom>
+          <a:solidFill>
+            <a:srgbClr val="FB8C00"/>
+          </a:solidFill>
+          <a:ln w="12700">
+            <a:solidFill>
+              <a:srgbClr val="FB8C00"/>
+            </a:solidFill>
+            <a:prstDash val="solid"/>
+          </a:ln>
+        </p:spPr>
       </p:sp>
       <p:sp>
         <p:nvSpPr>
@@ -7855,40 +11129,313 @@
         </p:nvSpPr>
         <p:spPr>
           <a:xfrm>
-            <a:off x="548640" y="2468880"/>
-            <a:ext cx="8046720" cy="548640"/>
-          </a:xfrm>
-          <a:prstGeom prst="rect">
-            <a:avLst/>
-          </a:prstGeom>
-          <a:noFill/>
-          <a:ln/>
-        </p:spPr>
-        <p:txBody>
-          <a:bodyPr wrap="square" lIns="0" tIns="0" rIns="0" bIns="0" rtlCol="0" anchor="ctr"/>
-          <a:lstStyle/>
-          <a:p>
-            <a:pPr algn="ctr" indent="0" marL="0">
-              <a:buNone/>
-            </a:pPr>
-            <a:r>
-              <a:rPr lang="en-US" sz="2200" dirty="0">
-                <a:solidFill>
-                  <a:srgbClr val="5D4037"/>
-                </a:solidFill>
-                <a:latin typeface="Zen Maru Gothic" pitchFamily="34" charset="0"/>
-                <a:ea typeface="Zen Maru Gothic" pitchFamily="34" charset="-122"/>
-                <a:cs typeface="Zen Maru Gothic" pitchFamily="34" charset="-120"/>
-              </a:rPr>
-              <a:t>きいて くれて ありがとう</a:t>
-            </a:r>
-            <a:endParaRPr lang="en-US" sz="2200" dirty="0"/>
-          </a:p>
-        </p:txBody>
+            <a:off x="347472" y="201168"/>
+            <a:ext cx="8449056" cy="658368"/>
+          </a:xfrm>
+          <a:prstGeom prst="rect">
+            <a:avLst/>
+          </a:prstGeom>
+          <a:noFill/>
+          <a:ln/>
+        </p:spPr>
+        <p:txBody>
+          <a:bodyPr wrap="square" lIns="0" tIns="0" rIns="0" bIns="0" rtlCol="0" anchor="ctr"/>
+          <a:lstStyle/>
+          <a:p>
+            <a:pPr algn="ctr" indent="0" marL="0">
+              <a:buNone/>
+            </a:pPr>
+            <a:r>
+              <a:rPr lang="en-US" sz="2600" b="1" dirty="0">
+                <a:solidFill>
+                  <a:srgbClr val="FFFFFF"/>
+                </a:solidFill>
+                <a:latin typeface="Zen Maru Gothic" pitchFamily="34" charset="0"/>
+                <a:ea typeface="Zen Maru Gothic" pitchFamily="34" charset="-122"/>
+                <a:cs typeface="Zen Maru Gothic" pitchFamily="34" charset="-120"/>
+              </a:rPr>
+              <a:t>なんかい やったかな</a:t>
+            </a:r>
+            <a:endParaRPr lang="en-US" sz="2600" dirty="0"/>
+          </a:p>
+        </p:txBody>
+      </p:sp>
+      <p:sp>
+        <p:nvSpPr>
+          <p:cNvPr id="4" name="Text 2"/>
+          <p:cNvSpPr/>
+          <p:nvPr/>
+        </p:nvSpPr>
+        <p:spPr>
+          <a:xfrm>
+            <a:off x="502920" y="960120"/>
+            <a:ext cx="8138160" cy="320040"/>
+          </a:xfrm>
+          <a:prstGeom prst="rect">
+            <a:avLst/>
+          </a:prstGeom>
+          <a:noFill/>
+          <a:ln/>
+        </p:spPr>
+        <p:txBody>
+          <a:bodyPr wrap="square" lIns="0" tIns="0" rIns="0" bIns="0" rtlCol="0" anchor="ctr"/>
+          <a:lstStyle/>
+          <a:p>
+            <a:pPr algn="ctr" indent="0" marL="0">
+              <a:buNone/>
+            </a:pPr>
+            <a:r>
+              <a:rPr lang="en-US" sz="1300" dirty="0">
+                <a:solidFill>
+                  <a:srgbClr val="8D6E63"/>
+                </a:solidFill>
+                <a:latin typeface="Zen Maru Gothic" pitchFamily="34" charset="0"/>
+                <a:ea typeface="Zen Maru Gothic" pitchFamily="34" charset="-122"/>
+                <a:cs typeface="Zen Maru Gothic" pitchFamily="34" charset="-120"/>
+              </a:rPr>
+              <a:t>やって みた かず だけ、⭐️を コピーして ふやそう</a:t>
+            </a:r>
+            <a:endParaRPr lang="en-US" sz="1300" dirty="0"/>
+          </a:p>
+        </p:txBody>
+      </p:sp>
+      <p:sp>
+        <p:nvSpPr>
+          <p:cNvPr id="5" name="Shape 3"/>
+          <p:cNvSpPr/>
+          <p:nvPr/>
+        </p:nvSpPr>
+        <p:spPr>
+          <a:xfrm>
+            <a:off x="502920" y="1325880"/>
+            <a:ext cx="8138160" cy="914400"/>
+          </a:xfrm>
+          <a:prstGeom prst="roundRect">
+            <a:avLst>
+              <a:gd name="adj" fmla="val 14000"/>
+            </a:avLst>
+          </a:prstGeom>
+          <a:solidFill>
+            <a:srgbClr val="FFFFFF"/>
+          </a:solidFill>
+          <a:ln w="31750">
+            <a:solidFill>
+              <a:srgbClr val="FFCC80"/>
+            </a:solidFill>
+            <a:prstDash val="solid"/>
+          </a:ln>
+        </p:spPr>
+      </p:sp>
+      <p:sp>
+        <p:nvSpPr>
+          <p:cNvPr id="6" name="Text 4"/>
+          <p:cNvSpPr/>
+          <p:nvPr/>
+        </p:nvSpPr>
+        <p:spPr>
+          <a:xfrm>
+            <a:off x="914400" y="1481328"/>
+            <a:ext cx="603504" cy="603504"/>
+          </a:xfrm>
+          <a:prstGeom prst="rect">
+            <a:avLst/>
+          </a:prstGeom>
+          <a:noFill/>
+          <a:ln/>
+        </p:spPr>
+        <p:txBody>
+          <a:bodyPr wrap="square" lIns="0" tIns="0" rIns="0" bIns="0" rtlCol="0" anchor="ctr"/>
+          <a:lstStyle/>
+          <a:p>
+            <a:pPr algn="ctr" indent="0" marL="0">
+              <a:buNone/>
+            </a:pPr>
+            <a:r>
+              <a:rPr lang="en-US" sz="2600" dirty="0">
+                <a:solidFill>
+                  <a:srgbClr val="000000"/>
+                </a:solidFill>
+              </a:rPr>
+              <a:t>⭐️</a:t>
+            </a:r>
+            <a:endParaRPr lang="en-US" sz="2600" dirty="0"/>
+          </a:p>
+        </p:txBody>
+      </p:sp>
+      <p:sp>
+        <p:nvSpPr>
+          <p:cNvPr id="7" name="Text 5"/>
+          <p:cNvSpPr/>
+          <p:nvPr/>
+        </p:nvSpPr>
+        <p:spPr>
+          <a:xfrm>
+            <a:off x="1645920" y="1481328"/>
+            <a:ext cx="603504" cy="603504"/>
+          </a:xfrm>
+          <a:prstGeom prst="rect">
+            <a:avLst/>
+          </a:prstGeom>
+          <a:noFill/>
+          <a:ln/>
+        </p:spPr>
+        <p:txBody>
+          <a:bodyPr wrap="square" lIns="0" tIns="0" rIns="0" bIns="0" rtlCol="0" anchor="ctr"/>
+          <a:lstStyle/>
+          <a:p>
+            <a:pPr algn="ctr" indent="0" marL="0">
+              <a:buNone/>
+            </a:pPr>
+            <a:r>
+              <a:rPr lang="en-US" sz="2600" dirty="0">
+                <a:solidFill>
+                  <a:srgbClr val="000000"/>
+                </a:solidFill>
+              </a:rPr>
+              <a:t>⭐️</a:t>
+            </a:r>
+            <a:endParaRPr lang="en-US" sz="2600" dirty="0"/>
+          </a:p>
+        </p:txBody>
+      </p:sp>
+      <p:sp>
+        <p:nvSpPr>
+          <p:cNvPr id="8" name="Text 6"/>
+          <p:cNvSpPr/>
+          <p:nvPr/>
+        </p:nvSpPr>
+        <p:spPr>
+          <a:xfrm>
+            <a:off x="2377440" y="1481328"/>
+            <a:ext cx="603504" cy="603504"/>
+          </a:xfrm>
+          <a:prstGeom prst="rect">
+            <a:avLst/>
+          </a:prstGeom>
+          <a:noFill/>
+          <a:ln/>
+        </p:spPr>
+        <p:txBody>
+          <a:bodyPr wrap="square" lIns="0" tIns="0" rIns="0" bIns="0" rtlCol="0" anchor="ctr"/>
+          <a:lstStyle/>
+          <a:p>
+            <a:pPr algn="ctr" indent="0" marL="0">
+              <a:buNone/>
+            </a:pPr>
+            <a:r>
+              <a:rPr lang="en-US" sz="2600" dirty="0">
+                <a:solidFill>
+                  <a:srgbClr val="000000"/>
+                </a:solidFill>
+              </a:rPr>
+              <a:t>⭐️</a:t>
+            </a:r>
+            <a:endParaRPr lang="en-US" sz="2600" dirty="0"/>
+          </a:p>
+        </p:txBody>
+      </p:sp>
+      <p:sp>
+        <p:nvSpPr>
+          <p:cNvPr id="9" name="Text 7"/>
+          <p:cNvSpPr/>
+          <p:nvPr/>
+        </p:nvSpPr>
+        <p:spPr>
+          <a:xfrm>
+            <a:off x="3108960" y="1481328"/>
+            <a:ext cx="603504" cy="603504"/>
+          </a:xfrm>
+          <a:prstGeom prst="rect">
+            <a:avLst/>
+          </a:prstGeom>
+          <a:noFill/>
+          <a:ln/>
+        </p:spPr>
+        <p:txBody>
+          <a:bodyPr wrap="square" lIns="0" tIns="0" rIns="0" bIns="0" rtlCol="0" anchor="ctr"/>
+          <a:lstStyle/>
+          <a:p>
+            <a:pPr algn="ctr" indent="0" marL="0">
+              <a:buNone/>
+            </a:pPr>
+            <a:r>
+              <a:rPr lang="en-US" sz="2600" dirty="0">
+                <a:solidFill>
+                  <a:srgbClr val="000000"/>
+                </a:solidFill>
+              </a:rPr>
+              <a:t>⭐️</a:t>
+            </a:r>
+            <a:endParaRPr lang="en-US" sz="2600" dirty="0"/>
+          </a:p>
+        </p:txBody>
+      </p:sp>
+      <p:sp>
+        <p:nvSpPr>
+          <p:cNvPr id="10" name="Text 8"/>
+          <p:cNvSpPr/>
+          <p:nvPr/>
+        </p:nvSpPr>
+        <p:spPr>
+          <a:xfrm>
+            <a:off x="3840480" y="1481328"/>
+            <a:ext cx="603504" cy="603504"/>
+          </a:xfrm>
+          <a:prstGeom prst="rect">
+            <a:avLst/>
+          </a:prstGeom>
+          <a:noFill/>
+          <a:ln/>
+        </p:spPr>
+        <p:txBody>
+          <a:bodyPr wrap="square" lIns="0" tIns="0" rIns="0" bIns="0" rtlCol="0" anchor="ctr"/>
+          <a:lstStyle/>
+          <a:p>
+            <a:pPr algn="ctr" indent="0" marL="0">
+              <a:buNone/>
+            </a:pPr>
+            <a:r>
+              <a:rPr lang="en-US" sz="2600" dirty="0">
+                <a:solidFill>
+                  <a:srgbClr val="000000"/>
+                </a:solidFill>
+              </a:rPr>
+              <a:t>⭐️</a:t>
+            </a:r>
+            <a:endParaRPr lang="en-US" sz="2600" dirty="0"/>
+          </a:p>
+        </p:txBody>
+      </p:sp>
+      <p:sp>
+        <p:nvSpPr>
+          <p:cNvPr id="11" name="Shape 9"/>
+          <p:cNvSpPr/>
+          <p:nvPr/>
+        </p:nvSpPr>
+        <p:spPr>
+          <a:xfrm>
+            <a:off x="822960" y="2468880"/>
+            <a:ext cx="2286000" cy="1417320"/>
+          </a:xfrm>
+          <a:prstGeom prst="roundRect">
+            <a:avLst>
+              <a:gd name="adj" fmla="val 10323"/>
+            </a:avLst>
+          </a:prstGeom>
+          <a:solidFill>
+            <a:srgbClr val="FFFFFF"/>
+          </a:solidFill>
+          <a:ln w="31750">
+            <a:solidFill>
+              <a:srgbClr val="EF9A9A"/>
+            </a:solidFill>
+            <a:prstDash val="solid"/>
+          </a:ln>
+        </p:spPr>
       </p:sp>
       <p:pic>
         <p:nvPicPr>
-          <p:cNvPr id="4" name="Image 0" descr="illust/kendama.png">    </p:cNvPr>
+          <p:cNvPr id="12" name="Image 0" descr="illust/komatta.png">    </p:cNvPr>
           <p:cNvPicPr>
             <a:picLocks noChangeAspect="1"/>
           </p:cNvPicPr>
@@ -7902,17 +11449,108 @@
         </p:blipFill>
         <p:spPr>
           <a:xfrm>
-            <a:off x="685800" y="3063240"/>
-            <a:ext cx="1280160" cy="1280160"/>
+            <a:off x="1600200" y="2542032"/>
+            <a:ext cx="731520" cy="731520"/>
           </a:xfrm>
           <a:prstGeom prst="rect">
             <a:avLst/>
           </a:prstGeom>
         </p:spPr>
       </p:pic>
+      <p:sp>
+        <p:nvSpPr>
+          <p:cNvPr id="13" name="Text 10"/>
+          <p:cNvSpPr/>
+          <p:nvPr/>
+        </p:nvSpPr>
+        <p:spPr>
+          <a:xfrm>
+            <a:off x="822960" y="3310128"/>
+            <a:ext cx="2286000" cy="365760"/>
+          </a:xfrm>
+          <a:prstGeom prst="rect">
+            <a:avLst/>
+          </a:prstGeom>
+          <a:noFill/>
+          <a:ln/>
+        </p:spPr>
+        <p:txBody>
+          <a:bodyPr wrap="square" lIns="0" tIns="0" rIns="0" bIns="0" rtlCol="0" anchor="ctr"/>
+          <a:lstStyle/>
+          <a:p>
+            <a:pPr algn="ctr" indent="0" marL="0">
+              <a:buNone/>
+            </a:pPr>
+            <a:r>
+              <a:rPr lang="en-US" sz="1500" b="1" dirty="0">
+                <a:solidFill>
+                  <a:srgbClr val="5D4037"/>
+                </a:solidFill>
+                <a:latin typeface="Zen Maru Gothic" pitchFamily="34" charset="0"/>
+                <a:ea typeface="Zen Maru Gothic" pitchFamily="34" charset="-122"/>
+                <a:cs typeface="Zen Maru Gothic" pitchFamily="34" charset="-120"/>
+              </a:rPr>
+              <a:t>はじめは…</a:t>
+            </a:r>
+            <a:endParaRPr lang="en-US" sz="1500" dirty="0"/>
+          </a:p>
+        </p:txBody>
+      </p:sp>
+      <p:sp>
+        <p:nvSpPr>
+          <p:cNvPr id="14" name="Shape 11"/>
+          <p:cNvSpPr/>
+          <p:nvPr/>
+        </p:nvSpPr>
+        <p:spPr>
+          <a:xfrm>
+            <a:off x="3154680" y="2971800"/>
+            <a:ext cx="320040" cy="365760"/>
+          </a:xfrm>
+          <a:prstGeom prst="rightArrow">
+            <a:avLst/>
+          </a:prstGeom>
+          <a:solidFill>
+            <a:srgbClr val="FFB74D"/>
+          </a:solidFill>
+          <a:ln w="12700">
+            <a:solidFill>
+              <a:srgbClr val="FFB74D"/>
+            </a:solidFill>
+            <a:prstDash val="solid"/>
+          </a:ln>
+        </p:spPr>
+      </p:sp>
+      <p:sp>
+        <p:nvSpPr>
+          <p:cNvPr id="15" name="Shape 12"/>
+          <p:cNvSpPr/>
+          <p:nvPr/>
+        </p:nvSpPr>
+        <p:spPr>
+          <a:xfrm>
+            <a:off x="3520440" y="2468880"/>
+            <a:ext cx="2286000" cy="1417320"/>
+          </a:xfrm>
+          <a:prstGeom prst="roundRect">
+            <a:avLst>
+              <a:gd name="adj" fmla="val 10323"/>
+            </a:avLst>
+          </a:prstGeom>
+          <a:solidFill>
+            <a:srgbClr val="FFFFFF"/>
+          </a:solidFill>
+          <a:ln w="31750">
+            <a:solidFill>
+              <a:srgbClr val="B39DDB"/>
+            </a:solidFill>
+            <a:prstDash val="solid"/>
+          </a:ln>
+        </p:spPr>
+      </p:sp>
       <p:pic>
         <p:nvPicPr>
-          <p:cNvPr id="5" name="Image 1" descr="illust/maracas.png">    </p:cNvPr>
+          <p:cNvPr id="16" name="Image 1" descr="illust/kangaeru.png">    </p:cNvPr>
           <p:cNvPicPr>
             <a:picLocks noChangeAspect="1"/>
           </p:cNvPicPr>
@@ -7926,17 +11564,108 @@
         </p:blipFill>
         <p:spPr>
           <a:xfrm>
-            <a:off x="2194560" y="3291840"/>
-            <a:ext cx="1143000" cy="1143000"/>
+            <a:off x="4297680" y="2542032"/>
+            <a:ext cx="731520" cy="731520"/>
           </a:xfrm>
           <a:prstGeom prst="rect">
             <a:avLst/>
           </a:prstGeom>
         </p:spPr>
       </p:pic>
+      <p:sp>
+        <p:nvSpPr>
+          <p:cNvPr id="17" name="Text 13"/>
+          <p:cNvSpPr/>
+          <p:nvPr/>
+        </p:nvSpPr>
+        <p:spPr>
+          <a:xfrm>
+            <a:off x="3520440" y="3310128"/>
+            <a:ext cx="2286000" cy="365760"/>
+          </a:xfrm>
+          <a:prstGeom prst="rect">
+            <a:avLst/>
+          </a:prstGeom>
+          <a:noFill/>
+          <a:ln/>
+        </p:spPr>
+        <p:txBody>
+          <a:bodyPr wrap="square" lIns="0" tIns="0" rIns="0" bIns="0" rtlCol="0" anchor="ctr"/>
+          <a:lstStyle/>
+          <a:p>
+            <a:pPr algn="ctr" indent="0" marL="0">
+              <a:buNone/>
+            </a:pPr>
+            <a:r>
+              <a:rPr lang="en-US" sz="1500" b="1" dirty="0">
+                <a:solidFill>
+                  <a:srgbClr val="5D4037"/>
+                </a:solidFill>
+                <a:latin typeface="Zen Maru Gothic" pitchFamily="34" charset="0"/>
+                <a:ea typeface="Zen Maru Gothic" pitchFamily="34" charset="-122"/>
+                <a:cs typeface="Zen Maru Gothic" pitchFamily="34" charset="-120"/>
+              </a:rPr>
+              <a:t>かんがえた</a:t>
+            </a:r>
+            <a:endParaRPr lang="en-US" sz="1500" dirty="0"/>
+          </a:p>
+        </p:txBody>
+      </p:sp>
+      <p:sp>
+        <p:nvSpPr>
+          <p:cNvPr id="18" name="Shape 14"/>
+          <p:cNvSpPr/>
+          <p:nvPr/>
+        </p:nvSpPr>
+        <p:spPr>
+          <a:xfrm>
+            <a:off x="5852160" y="2971800"/>
+            <a:ext cx="320040" cy="365760"/>
+          </a:xfrm>
+          <a:prstGeom prst="rightArrow">
+            <a:avLst/>
+          </a:prstGeom>
+          <a:solidFill>
+            <a:srgbClr val="FFB74D"/>
+          </a:solidFill>
+          <a:ln w="12700">
+            <a:solidFill>
+              <a:srgbClr val="FFB74D"/>
+            </a:solidFill>
+            <a:prstDash val="solid"/>
+          </a:ln>
+        </p:spPr>
+      </p:sp>
+      <p:sp>
+        <p:nvSpPr>
+          <p:cNvPr id="19" name="Shape 15"/>
+          <p:cNvSpPr/>
+          <p:nvPr/>
+        </p:nvSpPr>
+        <p:spPr>
+          <a:xfrm>
+            <a:off x="6217920" y="2468880"/>
+            <a:ext cx="2286000" cy="1417320"/>
+          </a:xfrm>
+          <a:prstGeom prst="roundRect">
+            <a:avLst>
+              <a:gd name="adj" fmla="val 10323"/>
+            </a:avLst>
+          </a:prstGeom>
+          <a:solidFill>
+            <a:srgbClr val="FFFFFF"/>
+          </a:solidFill>
+          <a:ln w="31750">
+            <a:solidFill>
+              <a:srgbClr val="A5D6A7"/>
+            </a:solidFill>
+            <a:prstDash val="solid"/>
+          </a:ln>
+        </p:spPr>
+      </p:sp>
       <p:pic>
         <p:nvPicPr>
-          <p:cNvPr id="6" name="Image 2" descr="illust/kinomi.png">    </p:cNvPr>
+          <p:cNvPr id="20" name="Image 2" descr="illust/dekita.png">    </p:cNvPr>
           <p:cNvPicPr>
             <a:picLocks noChangeAspect="1"/>
           </p:cNvPicPr>
@@ -7950,86 +11679,92 @@
         </p:blipFill>
         <p:spPr>
           <a:xfrm>
-            <a:off x="5760720" y="3383280"/>
-            <a:ext cx="1051560" cy="1051560"/>
+            <a:off x="6995160" y="2542032"/>
+            <a:ext cx="731520" cy="731520"/>
           </a:xfrm>
           <a:prstGeom prst="rect">
             <a:avLst/>
           </a:prstGeom>
         </p:spPr>
       </p:pic>
-      <p:pic>
-        <p:nvPicPr>
-          <p:cNvPr id="7" name="Image 3" descr="illust/risu.png">    </p:cNvPr>
-          <p:cNvPicPr>
-            <a:picLocks noChangeAspect="1"/>
-          </p:cNvPicPr>
-          <p:nvPr/>
-        </p:nvPicPr>
-        <p:blipFill>
-          <a:blip r:embed="rId4"/>
-          <a:stretch>
-            <a:fillRect/>
-          </a:stretch>
-        </p:blipFill>
-        <p:spPr>
-          <a:xfrm>
-            <a:off x="7223760" y="3063240"/>
-            <a:ext cx="1280160" cy="1280160"/>
-          </a:xfrm>
-          <a:prstGeom prst="rect">
-            <a:avLst/>
-          </a:prstGeom>
-        </p:spPr>
-      </p:pic>
-      <p:pic>
-        <p:nvPicPr>
-          <p:cNvPr id="8" name="Image 4" descr="illust/ochiba.png">    </p:cNvPr>
-          <p:cNvPicPr>
-            <a:picLocks noChangeAspect="1"/>
-          </p:cNvPicPr>
-          <p:nvPr/>
-        </p:nvPicPr>
-        <p:blipFill>
-          <a:blip r:embed="rId5"/>
-          <a:stretch>
-            <a:fillRect/>
-          </a:stretch>
-        </p:blipFill>
-        <p:spPr>
-          <a:xfrm>
-            <a:off x="914400" y="457200"/>
-            <a:ext cx="822960" cy="822960"/>
-          </a:xfrm>
-          <a:prstGeom prst="rect">
-            <a:avLst/>
-          </a:prstGeom>
-        </p:spPr>
-      </p:pic>
-      <p:pic>
-        <p:nvPicPr>
-          <p:cNvPr id="9" name="Image 5" descr="illust/momiji.png">    </p:cNvPr>
-          <p:cNvPicPr>
-            <a:picLocks noChangeAspect="1"/>
-          </p:cNvPicPr>
-          <p:nvPr/>
-        </p:nvPicPr>
-        <p:blipFill>
-          <a:blip r:embed="rId6"/>
-          <a:stretch>
-            <a:fillRect/>
-          </a:stretch>
-        </p:blipFill>
-        <p:spPr>
-          <a:xfrm>
-            <a:off x="7498080" y="502920"/>
-            <a:ext cx="868680" cy="868680"/>
-          </a:xfrm>
-          <a:prstGeom prst="rect">
-            <a:avLst/>
-          </a:prstGeom>
-        </p:spPr>
-      </p:pic>
+      <p:sp>
+        <p:nvSpPr>
+          <p:cNvPr id="21" name="Text 16"/>
+          <p:cNvSpPr/>
+          <p:nvPr/>
+        </p:nvSpPr>
+        <p:spPr>
+          <a:xfrm>
+            <a:off x="6217920" y="3310128"/>
+            <a:ext cx="2286000" cy="365760"/>
+          </a:xfrm>
+          <a:prstGeom prst="rect">
+            <a:avLst/>
+          </a:prstGeom>
+          <a:noFill/>
+          <a:ln/>
+        </p:spPr>
+        <p:txBody>
+          <a:bodyPr wrap="square" lIns="0" tIns="0" rIns="0" bIns="0" rtlCol="0" anchor="ctr"/>
+          <a:lstStyle/>
+          <a:p>
+            <a:pPr algn="ctr" indent="0" marL="0">
+              <a:buNone/>
+            </a:pPr>
+            <a:r>
+              <a:rPr lang="en-US" sz="1500" b="1" dirty="0">
+                <a:solidFill>
+                  <a:srgbClr val="5D4037"/>
+                </a:solidFill>
+                <a:latin typeface="Zen Maru Gothic" pitchFamily="34" charset="0"/>
+                <a:ea typeface="Zen Maru Gothic" pitchFamily="34" charset="-122"/>
+                <a:cs typeface="Zen Maru Gothic" pitchFamily="34" charset="-120"/>
+              </a:rPr>
+              <a:t>できた!</a:t>
+            </a:r>
+            <a:endParaRPr lang="en-US" sz="1500" dirty="0"/>
+          </a:p>
+        </p:txBody>
+      </p:sp>
+      <p:sp>
+        <p:nvSpPr>
+          <p:cNvPr id="22" name="Text 17"/>
+          <p:cNvSpPr/>
+          <p:nvPr/>
+        </p:nvSpPr>
+        <p:spPr>
+          <a:xfrm>
+            <a:off x="502920" y="4041648"/>
+            <a:ext cx="8138160" cy="320040"/>
+          </a:xfrm>
+          <a:prstGeom prst="rect">
+            <a:avLst/>
+          </a:prstGeom>
+          <a:noFill/>
+          <a:ln/>
+        </p:spPr>
+        <p:txBody>
+          <a:bodyPr wrap="square" lIns="0" tIns="0" rIns="0" bIns="0" rtlCol="0" anchor="ctr"/>
+          <a:lstStyle/>
+          <a:p>
+            <a:pPr algn="ctr" indent="0" marL="0">
+              <a:buNone/>
+            </a:pPr>
+            <a:r>
+              <a:rPr lang="en-US" sz="1300" dirty="0">
+                <a:solidFill>
+                  <a:srgbClr val="8D6E63"/>
+                </a:solidFill>
+                <a:latin typeface="Zen Maru Gothic" pitchFamily="34" charset="0"/>
+                <a:ea typeface="Zen Maru Gothic" pitchFamily="34" charset="-122"/>
+                <a:cs typeface="Zen Maru Gothic" pitchFamily="34" charset="-120"/>
+              </a:rPr>
+              <a:t>きもちの うつりかわり</a:t>
+            </a:r>
+            <a:endParaRPr lang="en-US" sz="1300" dirty="0"/>
+          </a:p>
+        </p:txBody>
+      </p:sp>
     </p:spTree>
   </p:cSld>
   <p:clrMapOvr>

--- a/canva/aki-omocha-template.pptx
+++ b/canva/aki-omocha-template.pptx
@@ -1968,7 +1968,7 @@
               <a:buNone/>
             </a:pPr>
             <a:r>
-              <a:rPr lang="en-US" sz="3400" b="1" dirty="0">
+              <a:rPr lang="en-US" sz="3200" b="1" dirty="0">
                 <a:solidFill>
                   <a:srgbClr val="5D4037"/>
                 </a:solidFill>
@@ -1976,9 +1976,9 @@
                 <a:ea typeface="Zen Maru Gothic" pitchFamily="34" charset="-122"/>
                 <a:cs typeface="Zen Maru Gothic" pitchFamily="34" charset="-120"/>
               </a:rPr>
-              <a:t>あきの おもちゃ はっぴょう</a:t>
-            </a:r>
-            <a:endParaRPr lang="en-US" sz="3400" dirty="0"/>
+              <a:t>わくわく! あきの おもちゃづくり</a:t>
+            </a:r>
+            <a:endParaRPr lang="en-US" sz="3200" dirty="0"/>
           </a:p>
         </p:txBody>
       </p:sp>
@@ -5304,8 +5304,47 @@
         </p:nvSpPr>
         <p:spPr>
           <a:xfrm>
-            <a:off x="548640" y="777240"/>
-            <a:ext cx="8046720" cy="777240"/>
+            <a:off x="548640" y="502920"/>
+            <a:ext cx="8046720" cy="566928"/>
+          </a:xfrm>
+          <a:prstGeom prst="rect">
+            <a:avLst/>
+          </a:prstGeom>
+          <a:noFill/>
+          <a:ln/>
+        </p:spPr>
+        <p:txBody>
+          <a:bodyPr wrap="square" lIns="0" tIns="0" rIns="0" bIns="0" rtlCol="0" anchor="ctr"/>
+          <a:lstStyle/>
+          <a:p>
+            <a:pPr algn="ctr" indent="0" marL="0">
+              <a:buNone/>
+            </a:pPr>
+            <a:r>
+              <a:rPr lang="en-US" sz="3000" b="1" dirty="0">
+                <a:solidFill>
+                  <a:srgbClr val="FB8C00"/>
+                </a:solidFill>
+                <a:latin typeface="Zen Maru Gothic" pitchFamily="34" charset="0"/>
+                <a:ea typeface="Zen Maru Gothic" pitchFamily="34" charset="-122"/>
+                <a:cs typeface="Zen Maru Gothic" pitchFamily="34" charset="-120"/>
+              </a:rPr>
+              <a:t>わくわく!</a:t>
+            </a:r>
+            <a:endParaRPr lang="en-US" sz="3000" dirty="0"/>
+          </a:p>
+        </p:txBody>
+      </p:sp>
+      <p:sp>
+        <p:nvSpPr>
+          <p:cNvPr id="3" name="Text 1"/>
+          <p:cNvSpPr/>
+          <p:nvPr/>
+        </p:nvSpPr>
+        <p:spPr>
+          <a:xfrm>
+            <a:off x="548640" y="1024128"/>
+            <a:ext cx="8046720" cy="822960"/>
           </a:xfrm>
           <a:prstGeom prst="rect">
             <a:avLst/>
@@ -5329,7 +5368,7 @@
                 <a:ea typeface="Zen Maru Gothic" pitchFamily="34" charset="-122"/>
                 <a:cs typeface="Zen Maru Gothic" pitchFamily="34" charset="-120"/>
               </a:rPr>
-              <a:t>あきの おもちゃ</a:t>
+              <a:t>あきの おもちゃづくり</a:t>
             </a:r>
             <a:endParaRPr lang="en-US" sz="4400" dirty="0"/>
           </a:p>
@@ -5337,18 +5376,18 @@
       </p:sp>
       <p:sp>
         <p:nvSpPr>
-          <p:cNvPr id="3" name="Shape 1"/>
-          <p:cNvSpPr/>
-          <p:nvPr/>
-        </p:nvSpPr>
-        <p:spPr>
-          <a:xfrm>
-            <a:off x="1965960" y="1691640"/>
-            <a:ext cx="5212080" cy="822960"/>
+          <p:cNvPr id="4" name="Shape 2"/>
+          <p:cNvSpPr/>
+          <p:nvPr/>
+        </p:nvSpPr>
+        <p:spPr>
+          <a:xfrm>
+            <a:off x="1965960" y="1938528"/>
+            <a:ext cx="5212080" cy="804672"/>
           </a:xfrm>
           <a:prstGeom prst="roundRect">
             <a:avLst>
-              <a:gd name="adj" fmla="val 13333"/>
+              <a:gd name="adj" fmla="val 13636"/>
             </a:avLst>
           </a:prstGeom>
           <a:solidFill>
@@ -5364,14 +5403,14 @@
       </p:sp>
       <p:sp>
         <p:nvSpPr>
-          <p:cNvPr id="4" name="Text 2"/>
-          <p:cNvSpPr/>
-          <p:nvPr/>
-        </p:nvSpPr>
-        <p:spPr>
-          <a:xfrm>
-            <a:off x="2075688" y="1691640"/>
-            <a:ext cx="4992624" cy="822960"/>
+          <p:cNvPr id="5" name="Text 3"/>
+          <p:cNvSpPr/>
+          <p:nvPr/>
+        </p:nvSpPr>
+        <p:spPr>
+          <a:xfrm>
+            <a:off x="2075688" y="1938528"/>
+            <a:ext cx="4992624" cy="804672"/>
           </a:xfrm>
           <a:prstGeom prst="rect">
             <a:avLst/>
@@ -5403,13 +5442,13 @@
       </p:sp>
       <p:sp>
         <p:nvSpPr>
-          <p:cNvPr id="5" name="Shape 3"/>
-          <p:cNvSpPr/>
-          <p:nvPr/>
-        </p:nvSpPr>
-        <p:spPr>
-          <a:xfrm>
-            <a:off x="2743200" y="2743200"/>
+          <p:cNvPr id="6" name="Shape 4"/>
+          <p:cNvSpPr/>
+          <p:nvPr/>
+        </p:nvSpPr>
+        <p:spPr>
+          <a:xfrm>
+            <a:off x="2743200" y="2926080"/>
             <a:ext cx="3657600" cy="603504"/>
           </a:xfrm>
           <a:prstGeom prst="roundRect">
@@ -5430,13 +5469,13 @@
       </p:sp>
       <p:sp>
         <p:nvSpPr>
-          <p:cNvPr id="6" name="Text 4"/>
-          <p:cNvSpPr/>
-          <p:nvPr/>
-        </p:nvSpPr>
-        <p:spPr>
-          <a:xfrm>
-            <a:off x="2852928" y="2743200"/>
+          <p:cNvPr id="7" name="Text 5"/>
+          <p:cNvSpPr/>
+          <p:nvPr/>
+        </p:nvSpPr>
+        <p:spPr>
+          <a:xfrm>
+            <a:off x="2852928" y="2926080"/>
             <a:ext cx="3438144" cy="603504"/>
           </a:xfrm>
           <a:prstGeom prst="rect">
@@ -5469,7 +5508,7 @@
       </p:sp>
       <p:pic>
         <p:nvPicPr>
-          <p:cNvPr id="7" name="Image 0" descr="illust/donguri.png">    </p:cNvPr>
+          <p:cNvPr id="8" name="Image 0" descr="illust/dekita.png">    </p:cNvPr>
           <p:cNvPicPr>
             <a:picLocks noChangeAspect="1"/>
           </p:cNvPicPr>
@@ -5484,7 +5523,7 @@
         <p:spPr>
           <a:xfrm>
             <a:off x="411480" y="3246120"/>
-            <a:ext cx="1188720" cy="1188720"/>
+            <a:ext cx="1234440" cy="1234440"/>
           </a:xfrm>
           <a:prstGeom prst="rect">
             <a:avLst/>
@@ -5493,7 +5532,7 @@
       </p:pic>
       <p:pic>
         <p:nvPicPr>
-          <p:cNvPr id="8" name="Image 1" descr="illust/matsubokkuri.png">    </p:cNvPr>
+          <p:cNvPr id="9" name="Image 1" descr="illust/matsubokkuri.png">    </p:cNvPr>
           <p:cNvPicPr>
             <a:picLocks noChangeAspect="1"/>
           </p:cNvPicPr>
@@ -5507,7 +5546,7 @@
         </p:blipFill>
         <p:spPr>
           <a:xfrm>
-            <a:off x="1463040" y="320040"/>
+            <a:off x="1051560" y="274320"/>
             <a:ext cx="914400" cy="914400"/>
           </a:xfrm>
           <a:prstGeom prst="rect">
@@ -5517,7 +5556,7 @@
       </p:pic>
       <p:pic>
         <p:nvPicPr>
-          <p:cNvPr id="9" name="Image 2" descr="illust/momiji.png">    </p:cNvPr>
+          <p:cNvPr id="10" name="Image 2" descr="illust/momiji.png">    </p:cNvPr>
           <p:cNvPicPr>
             <a:picLocks noChangeAspect="1"/>
           </p:cNvPicPr>
@@ -5531,7 +5570,7 @@
         </p:blipFill>
         <p:spPr>
           <a:xfrm>
-            <a:off x="6949440" y="274320"/>
+            <a:off x="7223760" y="256032"/>
             <a:ext cx="960120" cy="960120"/>
           </a:xfrm>
           <a:prstGeom prst="rect">
@@ -5541,7 +5580,7 @@
       </p:pic>
       <p:pic>
         <p:nvPicPr>
-          <p:cNvPr id="10" name="Image 3" descr="illust/risu.png">    </p:cNvPr>
+          <p:cNvPr id="11" name="Image 3" descr="illust/risu.png">    </p:cNvPr>
           <p:cNvPicPr>
             <a:picLocks noChangeAspect="1"/>
           </p:cNvPicPr>
@@ -5565,7 +5604,7 @@
       </p:pic>
       <p:pic>
         <p:nvPicPr>
-          <p:cNvPr id="11" name="Image 4" descr="illust/ityou.png">    </p:cNvPr>
+          <p:cNvPr id="12" name="Image 4" descr="illust/komma.png">    </p:cNvPr>
           <p:cNvPicPr>
             <a:picLocks noChangeAspect="1"/>
           </p:cNvPicPr>
@@ -5579,8 +5618,80 @@
         </p:blipFill>
         <p:spPr>
           <a:xfrm>
-            <a:off x="6309360" y="3840480"/>
+            <a:off x="1874520" y="3749040"/>
+            <a:ext cx="914400" cy="914400"/>
+          </a:xfrm>
+          <a:prstGeom prst="rect">
+            <a:avLst/>
+          </a:prstGeom>
+        </p:spPr>
+      </p:pic>
+      <p:pic>
+        <p:nvPicPr>
+          <p:cNvPr id="13" name="Image 5" descr="illust/maracas.png">    </p:cNvPr>
+          <p:cNvPicPr>
+            <a:picLocks noChangeAspect="1"/>
+          </p:cNvPicPr>
+          <p:nvPr/>
+        </p:nvPicPr>
+        <p:blipFill>
+          <a:blip r:embed="rId6"/>
+          <a:stretch>
+            <a:fillRect/>
+          </a:stretch>
+        </p:blipFill>
+        <p:spPr>
+          <a:xfrm>
+            <a:off x="6263640" y="3794760"/>
+            <a:ext cx="868680" cy="868680"/>
+          </a:xfrm>
+          <a:prstGeom prst="rect">
+            <a:avLst/>
+          </a:prstGeom>
+        </p:spPr>
+      </p:pic>
+      <p:pic>
+        <p:nvPicPr>
+          <p:cNvPr id="14" name="Image 6" descr="illust/kinomi.png">    </p:cNvPr>
+          <p:cNvPicPr>
+            <a:picLocks noChangeAspect="1"/>
+          </p:cNvPicPr>
+          <p:nvPr/>
+        </p:nvPicPr>
+        <p:blipFill>
+          <a:blip r:embed="rId7"/>
+          <a:stretch>
+            <a:fillRect/>
+          </a:stretch>
+        </p:blipFill>
+        <p:spPr>
+          <a:xfrm>
+            <a:off x="8092440" y="960120"/>
             <a:ext cx="777240" cy="777240"/>
+          </a:xfrm>
+          <a:prstGeom prst="rect">
+            <a:avLst/>
+          </a:prstGeom>
+        </p:spPr>
+      </p:pic>
+      <p:pic>
+        <p:nvPicPr>
+          <p:cNvPr id="15" name="Image 7" descr="illust/ityou.png">    </p:cNvPr>
+          <p:cNvPicPr>
+            <a:picLocks noChangeAspect="1"/>
+          </p:cNvPicPr>
+          <p:nvPr/>
+        </p:nvPicPr>
+        <p:blipFill>
+          <a:blip r:embed="rId8"/>
+          <a:stretch>
+            <a:fillRect/>
+          </a:stretch>
+        </p:blipFill>
+        <p:spPr>
+          <a:xfrm>
+            <a:off x="320040" y="1371600"/>
+            <a:ext cx="731520" cy="731520"/>
           </a:xfrm>
           <a:prstGeom prst="rect">
             <a:avLst/>

--- a/canva/aki-omocha-template.pptx
+++ b/canva/aki-omocha-template.pptx
@@ -866,7 +866,7 @@
           <a:p>
             <a:r>
               <a:rPr lang="en-US" dirty="0"/>
-              <a:t>終わりのページ。</a:t>
+              <a:t>園児との交流会に向けたページ。「どう遊んでもらいたいか」「何と言ってもらえたら嬉しいか」を考えることで、相手意識が育ちます。</a:t>
             </a:r>
             <a:endParaRPr lang="en-US" dirty="0"/>
           </a:p>
@@ -5050,24 +5050,24 @@
         </p:nvSpPr>
         <p:spPr>
           <a:xfrm>
-            <a:off x="548640" y="1417320"/>
-            <a:ext cx="8046720" cy="1005840"/>
-          </a:xfrm>
-          <a:prstGeom prst="rect">
-            <a:avLst/>
-          </a:prstGeom>
-          <a:noFill/>
-          <a:ln/>
-        </p:spPr>
-        <p:txBody>
-          <a:bodyPr wrap="square" lIns="0" tIns="0" rIns="0" bIns="0" rtlCol="0" anchor="ctr"/>
-          <a:lstStyle/>
-          <a:p>
-            <a:pPr algn="ctr" indent="0" marL="0">
-              <a:buNone/>
-            </a:pPr>
-            <a:r>
-              <a:rPr lang="en-US" sz="4200" b="1" dirty="0">
+            <a:off x="457200" y="320040"/>
+            <a:ext cx="8229600" cy="658368"/>
+          </a:xfrm>
+          <a:prstGeom prst="rect">
+            <a:avLst/>
+          </a:prstGeom>
+          <a:noFill/>
+          <a:ln/>
+        </p:spPr>
+        <p:txBody>
+          <a:bodyPr wrap="square" lIns="0" tIns="0" rIns="0" bIns="0" rtlCol="0" anchor="ctr"/>
+          <a:lstStyle/>
+          <a:p>
+            <a:pPr algn="ctr" indent="0" marL="0">
+              <a:buNone/>
+            </a:pPr>
+            <a:r>
+              <a:rPr lang="en-US" sz="3300" b="1" dirty="0">
                 <a:solidFill>
                   <a:srgbClr val="E65100"/>
                 </a:solidFill>
@@ -5075,9 +5075,9 @@
                 <a:ea typeface="Zen Maru Gothic" pitchFamily="34" charset="-122"/>
                 <a:cs typeface="Zen Maru Gothic" pitchFamily="34" charset="-120"/>
               </a:rPr>
-              <a:t>あそんで みて ね</a:t>
-            </a:r>
-            <a:endParaRPr lang="en-US" sz="4200" dirty="0"/>
+              <a:t>はやく あそんで もらいたいな!</a:t>
+            </a:r>
+            <a:endParaRPr lang="en-US" sz="3300" dirty="0"/>
           </a:p>
         </p:txBody>
       </p:sp>
@@ -5089,40 +5089,40 @@
         </p:nvSpPr>
         <p:spPr>
           <a:xfrm>
-            <a:off x="548640" y="2468880"/>
-            <a:ext cx="8046720" cy="548640"/>
-          </a:xfrm>
-          <a:prstGeom prst="rect">
-            <a:avLst/>
-          </a:prstGeom>
-          <a:noFill/>
-          <a:ln/>
-        </p:spPr>
-        <p:txBody>
-          <a:bodyPr wrap="square" lIns="0" tIns="0" rIns="0" bIns="0" rtlCol="0" anchor="ctr"/>
-          <a:lstStyle/>
-          <a:p>
-            <a:pPr algn="ctr" indent="0" marL="0">
-              <a:buNone/>
-            </a:pPr>
-            <a:r>
-              <a:rPr lang="en-US" sz="2200" dirty="0">
-                <a:solidFill>
-                  <a:srgbClr val="5D4037"/>
-                </a:solidFill>
-                <a:latin typeface="Zen Maru Gothic" pitchFamily="34" charset="0"/>
-                <a:ea typeface="Zen Maru Gothic" pitchFamily="34" charset="-122"/>
-                <a:cs typeface="Zen Maru Gothic" pitchFamily="34" charset="-120"/>
-              </a:rPr>
-              <a:t>きいて くれて ありがとう</a:t>
-            </a:r>
-            <a:endParaRPr lang="en-US" sz="2200" dirty="0"/>
+            <a:off x="457200" y="960120"/>
+            <a:ext cx="8229600" cy="365760"/>
+          </a:xfrm>
+          <a:prstGeom prst="rect">
+            <a:avLst/>
+          </a:prstGeom>
+          <a:noFill/>
+          <a:ln/>
+        </p:spPr>
+        <p:txBody>
+          <a:bodyPr wrap="square" lIns="0" tIns="0" rIns="0" bIns="0" rtlCol="0" anchor="ctr"/>
+          <a:lstStyle/>
+          <a:p>
+            <a:pPr algn="ctr" indent="0" marL="0">
+              <a:buNone/>
+            </a:pPr>
+            <a:r>
+              <a:rPr lang="en-US" sz="1600" b="1" dirty="0">
+                <a:solidFill>
+                  <a:srgbClr val="8D6E63"/>
+                </a:solidFill>
+                <a:latin typeface="Zen Maru Gothic" pitchFamily="34" charset="0"/>
+                <a:ea typeface="Zen Maru Gothic" pitchFamily="34" charset="-122"/>
+                <a:cs typeface="Zen Maru Gothic" pitchFamily="34" charset="-120"/>
+              </a:rPr>
+              <a:t>ようちえん・ほいくえんの おともだちを まねきます</a:t>
+            </a:r>
+            <a:endParaRPr lang="en-US" sz="1600" dirty="0"/>
           </a:p>
         </p:txBody>
       </p:sp>
       <p:pic>
         <p:nvPicPr>
-          <p:cNvPr id="4" name="Image 0" descr="illust/kendama.png">    </p:cNvPr>
+          <p:cNvPr id="4" name="Image 0" descr="illust/dekita.png">    </p:cNvPr>
           <p:cNvPicPr>
             <a:picLocks noChangeAspect="1"/>
           </p:cNvPicPr>
@@ -5136,17 +5136,100 @@
         </p:blipFill>
         <p:spPr>
           <a:xfrm>
-            <a:off x="685800" y="3063240"/>
-            <a:ext cx="1280160" cy="1280160"/>
+            <a:off x="548640" y="2487168"/>
+            <a:ext cx="1463040" cy="1463040"/>
           </a:xfrm>
           <a:prstGeom prst="rect">
             <a:avLst/>
           </a:prstGeom>
         </p:spPr>
       </p:pic>
+      <p:sp>
+        <p:nvSpPr>
+          <p:cNvPr id="5" name="Shape 2"/>
+          <p:cNvSpPr/>
+          <p:nvPr/>
+        </p:nvSpPr>
+        <p:spPr>
+          <a:xfrm>
+            <a:off x="2057400" y="1508760"/>
+            <a:ext cx="2926080" cy="1143000"/>
+          </a:xfrm>
+          <a:prstGeom prst="roundRect">
+            <a:avLst>
+              <a:gd name="adj" fmla="val 17600"/>
+            </a:avLst>
+          </a:prstGeom>
+          <a:solidFill>
+            <a:srgbClr val="FFFFFF"/>
+          </a:solidFill>
+          <a:ln w="31750">
+            <a:solidFill>
+              <a:srgbClr val="FFB74D"/>
+            </a:solidFill>
+            <a:prstDash val="solid"/>
+          </a:ln>
+        </p:spPr>
+      </p:sp>
+      <p:sp>
+        <p:nvSpPr>
+          <p:cNvPr id="6" name="Text 3"/>
+          <p:cNvSpPr/>
+          <p:nvPr/>
+        </p:nvSpPr>
+        <p:spPr>
+          <a:xfrm>
+            <a:off x="2148840" y="1508760"/>
+            <a:ext cx="2743200" cy="1143000"/>
+          </a:xfrm>
+          <a:prstGeom prst="rect">
+            <a:avLst/>
+          </a:prstGeom>
+          <a:noFill/>
+          <a:ln/>
+        </p:spPr>
+        <p:txBody>
+          <a:bodyPr wrap="square" lIns="0" tIns="0" rIns="0" bIns="0" rtlCol="0" anchor="ctr"/>
+          <a:lstStyle/>
+          <a:p>
+            <a:pPr algn="ctr" indent="0" marL="0">
+              <a:buNone/>
+            </a:pPr>
+            <a:r>
+              <a:rPr lang="en-US" sz="1600" dirty="0">
+                <a:solidFill>
+                  <a:srgbClr val="9E9E9E"/>
+                </a:solidFill>
+                <a:latin typeface="Zen Maru Gothic" pitchFamily="34" charset="0"/>
+                <a:ea typeface="Zen Maru Gothic" pitchFamily="34" charset="-122"/>
+                <a:cs typeface="Zen Maru Gothic" pitchFamily="34" charset="-120"/>
+              </a:rPr>
+              <a:t>（　　　　　）って</a:t>
+            </a:r>
+            <a:endParaRPr lang="en-US" sz="1600" dirty="0"/>
+          </a:p>
+          <a:p>
+            <a:pPr algn="ctr" indent="0" marL="0">
+              <a:buNone/>
+            </a:pPr>
+            <a:r>
+              <a:rPr lang="en-US" sz="1600" dirty="0">
+                <a:solidFill>
+                  <a:srgbClr val="9E9E9E"/>
+                </a:solidFill>
+                <a:latin typeface="Zen Maru Gothic" pitchFamily="34" charset="0"/>
+                <a:ea typeface="Zen Maru Gothic" pitchFamily="34" charset="-122"/>
+                <a:cs typeface="Zen Maru Gothic" pitchFamily="34" charset="-120"/>
+              </a:rPr>
+              <a:t>いって もらえるかな</a:t>
+            </a:r>
+            <a:endParaRPr lang="en-US" sz="1600" dirty="0"/>
+          </a:p>
+        </p:txBody>
+      </p:sp>
       <p:pic>
         <p:nvPicPr>
-          <p:cNvPr id="5" name="Image 1" descr="illust/maracas.png">    </p:cNvPr>
+          <p:cNvPr id="7" name="Image 1" descr="illust/chibi.png">    </p:cNvPr>
           <p:cNvPicPr>
             <a:picLocks noChangeAspect="1"/>
           </p:cNvPicPr>
@@ -5160,110 +5243,625 @@
         </p:blipFill>
         <p:spPr>
           <a:xfrm>
-            <a:off x="2194560" y="3291840"/>
-            <a:ext cx="1143000" cy="1143000"/>
+            <a:off x="7360920" y="2697480"/>
+            <a:ext cx="1234440" cy="1234440"/>
           </a:xfrm>
           <a:prstGeom prst="rect">
             <a:avLst/>
           </a:prstGeom>
         </p:spPr>
       </p:pic>
-      <p:pic>
-        <p:nvPicPr>
-          <p:cNvPr id="6" name="Image 2" descr="illust/kinomi.png">    </p:cNvPr>
-          <p:cNvPicPr>
-            <a:picLocks noChangeAspect="1"/>
-          </p:cNvPicPr>
-          <p:nvPr/>
-        </p:nvPicPr>
-        <p:blipFill>
-          <a:blip r:embed="rId3"/>
-          <a:stretch>
-            <a:fillRect/>
-          </a:stretch>
-        </p:blipFill>
-        <p:spPr>
-          <a:xfrm>
-            <a:off x="5760720" y="3383280"/>
-            <a:ext cx="1051560" cy="1051560"/>
-          </a:xfrm>
-          <a:prstGeom prst="rect">
-            <a:avLst/>
-          </a:prstGeom>
-        </p:spPr>
-      </p:pic>
-      <p:pic>
-        <p:nvPicPr>
-          <p:cNvPr id="7" name="Image 3" descr="illust/risu.png">    </p:cNvPr>
-          <p:cNvPicPr>
-            <a:picLocks noChangeAspect="1"/>
-          </p:cNvPicPr>
-          <p:nvPr/>
-        </p:nvPicPr>
-        <p:blipFill>
-          <a:blip r:embed="rId4"/>
-          <a:stretch>
-            <a:fillRect/>
-          </a:stretch>
-        </p:blipFill>
-        <p:spPr>
-          <a:xfrm>
-            <a:off x="7223760" y="3063240"/>
-            <a:ext cx="1280160" cy="1280160"/>
-          </a:xfrm>
-          <a:prstGeom prst="rect">
-            <a:avLst/>
-          </a:prstGeom>
-        </p:spPr>
-      </p:pic>
-      <p:pic>
-        <p:nvPicPr>
-          <p:cNvPr id="8" name="Image 4" descr="illust/ochiba.png">    </p:cNvPr>
-          <p:cNvPicPr>
-            <a:picLocks noChangeAspect="1"/>
-          </p:cNvPicPr>
-          <p:nvPr/>
-        </p:nvPicPr>
-        <p:blipFill>
-          <a:blip r:embed="rId5"/>
-          <a:stretch>
-            <a:fillRect/>
-          </a:stretch>
-        </p:blipFill>
-        <p:spPr>
-          <a:xfrm>
-            <a:off x="914400" y="457200"/>
-            <a:ext cx="822960" cy="822960"/>
-          </a:xfrm>
-          <a:prstGeom prst="rect">
-            <a:avLst/>
-          </a:prstGeom>
-        </p:spPr>
-      </p:pic>
-      <p:pic>
-        <p:nvPicPr>
-          <p:cNvPr id="9" name="Image 5" descr="illust/momiji.png">    </p:cNvPr>
-          <p:cNvPicPr>
-            <a:picLocks noChangeAspect="1"/>
-          </p:cNvPicPr>
-          <p:nvPr/>
-        </p:nvPicPr>
-        <p:blipFill>
-          <a:blip r:embed="rId6"/>
-          <a:stretch>
-            <a:fillRect/>
-          </a:stretch>
-        </p:blipFill>
-        <p:spPr>
-          <a:xfrm>
-            <a:off x="7498080" y="502920"/>
-            <a:ext cx="868680" cy="868680"/>
-          </a:xfrm>
-          <a:prstGeom prst="rect">
-            <a:avLst/>
-          </a:prstGeom>
-        </p:spPr>
-      </p:pic>
+      <p:sp>
+        <p:nvSpPr>
+          <p:cNvPr id="8" name="Shape 4"/>
+          <p:cNvSpPr/>
+          <p:nvPr/>
+        </p:nvSpPr>
+        <p:spPr>
+          <a:xfrm>
+            <a:off x="5212080" y="1508760"/>
+            <a:ext cx="2926080" cy="1143000"/>
+          </a:xfrm>
+          <a:prstGeom prst="roundRect">
+            <a:avLst>
+              <a:gd name="adj" fmla="val 17600"/>
+            </a:avLst>
+          </a:prstGeom>
+          <a:solidFill>
+            <a:srgbClr val="FFF3E0"/>
+          </a:solidFill>
+          <a:ln w="31750">
+            <a:solidFill>
+              <a:srgbClr val="FFCC80"/>
+            </a:solidFill>
+            <a:prstDash val="solid"/>
+          </a:ln>
+        </p:spPr>
+      </p:sp>
+      <p:sp>
+        <p:nvSpPr>
+          <p:cNvPr id="9" name="Text 5"/>
+          <p:cNvSpPr/>
+          <p:nvPr/>
+        </p:nvSpPr>
+        <p:spPr>
+          <a:xfrm>
+            <a:off x="5303520" y="1508760"/>
+            <a:ext cx="2743200" cy="1143000"/>
+          </a:xfrm>
+          <a:prstGeom prst="rect">
+            <a:avLst/>
+          </a:prstGeom>
+          <a:noFill/>
+          <a:ln/>
+        </p:spPr>
+        <p:txBody>
+          <a:bodyPr wrap="square" lIns="0" tIns="0" rIns="0" bIns="0" rtlCol="0" anchor="ctr"/>
+          <a:lstStyle/>
+          <a:p>
+            <a:pPr algn="ctr" indent="0" marL="0">
+              <a:buNone/>
+            </a:pPr>
+            <a:r>
+              <a:rPr lang="en-US" sz="1700" b="1" dirty="0">
+                <a:solidFill>
+                  <a:srgbClr val="E65100"/>
+                </a:solidFill>
+                <a:latin typeface="Zen Maru Gothic" pitchFamily="34" charset="0"/>
+                <a:ea typeface="Zen Maru Gothic" pitchFamily="34" charset="-122"/>
+                <a:cs typeface="Zen Maru Gothic" pitchFamily="34" charset="-120"/>
+              </a:rPr>
+              <a:t>わあ! やって みたい!</a:t>
+            </a:r>
+            <a:endParaRPr lang="en-US" sz="1700" dirty="0"/>
+          </a:p>
+        </p:txBody>
+      </p:sp>
+      <p:sp>
+        <p:nvSpPr>
+          <p:cNvPr id="10" name="Shape 6"/>
+          <p:cNvSpPr/>
+          <p:nvPr/>
+        </p:nvSpPr>
+        <p:spPr>
+          <a:xfrm>
+            <a:off x="2148840" y="2788920"/>
+            <a:ext cx="5029200" cy="1051560"/>
+          </a:xfrm>
+          <a:prstGeom prst="roundRect">
+            <a:avLst>
+              <a:gd name="adj" fmla="val 10435"/>
+            </a:avLst>
+          </a:prstGeom>
+          <a:solidFill>
+            <a:srgbClr val="FFFFFF"/>
+          </a:solidFill>
+          <a:ln w="31750">
+            <a:solidFill>
+              <a:srgbClr val="FFB74D"/>
+            </a:solidFill>
+            <a:prstDash val="dash"/>
+          </a:ln>
+        </p:spPr>
+      </p:sp>
+      <p:sp>
+        <p:nvSpPr>
+          <p:cNvPr id="11" name="Text 7"/>
+          <p:cNvSpPr/>
+          <p:nvPr/>
+        </p:nvSpPr>
+        <p:spPr>
+          <a:xfrm>
+            <a:off x="2258568" y="2788920"/>
+            <a:ext cx="4809744" cy="1051560"/>
+          </a:xfrm>
+          <a:prstGeom prst="rect">
+            <a:avLst/>
+          </a:prstGeom>
+          <a:noFill/>
+          <a:ln/>
+        </p:spPr>
+        <p:txBody>
+          <a:bodyPr wrap="square" lIns="0" tIns="0" rIns="0" bIns="0" rtlCol="0" anchor="ctr"/>
+          <a:lstStyle/>
+          <a:p>
+            <a:pPr algn="ctr" indent="0" marL="0">
+              <a:buNone/>
+            </a:pPr>
+            <a:r>
+              <a:rPr lang="en-US" sz="1700" dirty="0">
+                <a:solidFill>
+                  <a:srgbClr val="9E9E9E"/>
+                </a:solidFill>
+                <a:latin typeface="Zen Maru Gothic" pitchFamily="34" charset="0"/>
+                <a:ea typeface="Zen Maru Gothic" pitchFamily="34" charset="-122"/>
+                <a:cs typeface="Zen Maru Gothic" pitchFamily="34" charset="-120"/>
+              </a:rPr>
+              <a:t>（　　　　　　　）ところを</a:t>
+            </a:r>
+            <a:endParaRPr lang="en-US" sz="1700" dirty="0"/>
+          </a:p>
+          <a:p>
+            <a:pPr algn="ctr" indent="0" marL="0">
+              <a:buNone/>
+            </a:pPr>
+            <a:r>
+              <a:rPr lang="en-US" sz="1700" dirty="0">
+                <a:solidFill>
+                  <a:srgbClr val="9E9E9E"/>
+                </a:solidFill>
+                <a:latin typeface="Zen Maru Gothic" pitchFamily="34" charset="0"/>
+                <a:ea typeface="Zen Maru Gothic" pitchFamily="34" charset="-122"/>
+                <a:cs typeface="Zen Maru Gothic" pitchFamily="34" charset="-120"/>
+              </a:rPr>
+              <a:t>おしえて あげたいな</a:t>
+            </a:r>
+            <a:endParaRPr lang="en-US" sz="1700" dirty="0"/>
+          </a:p>
+        </p:txBody>
+      </p:sp>
+      <p:sp>
+        <p:nvSpPr>
+          <p:cNvPr id="12" name="Shape 8"/>
+          <p:cNvSpPr/>
+          <p:nvPr/>
+        </p:nvSpPr>
+        <p:spPr>
+          <a:xfrm>
+            <a:off x="347472" y="4210812"/>
+            <a:ext cx="8449056" cy="786384"/>
+          </a:xfrm>
+          <a:prstGeom prst="roundRect">
+            <a:avLst>
+              <a:gd name="adj" fmla="val 16279"/>
+            </a:avLst>
+          </a:prstGeom>
+          <a:solidFill>
+            <a:srgbClr val="FFE9C7"/>
+          </a:solidFill>
+          <a:ln w="12700">
+            <a:solidFill>
+              <a:srgbClr val="FFE9C7"/>
+            </a:solidFill>
+            <a:prstDash val="solid"/>
+          </a:ln>
+        </p:spPr>
+      </p:sp>
+      <p:sp>
+        <p:nvSpPr>
+          <p:cNvPr id="13" name="Text 9"/>
+          <p:cNvSpPr/>
+          <p:nvPr/>
+        </p:nvSpPr>
+        <p:spPr>
+          <a:xfrm>
+            <a:off x="457200" y="4238244"/>
+            <a:ext cx="8229600" cy="219456"/>
+          </a:xfrm>
+          <a:prstGeom prst="rect">
+            <a:avLst/>
+          </a:prstGeom>
+          <a:noFill/>
+          <a:ln/>
+        </p:spPr>
+        <p:txBody>
+          <a:bodyPr wrap="square" lIns="0" tIns="0" rIns="0" bIns="0" rtlCol="0" anchor="ctr"/>
+          <a:lstStyle/>
+          <a:p>
+            <a:pPr algn="l" indent="0" marL="0">
+              <a:buNone/>
+            </a:pPr>
+            <a:r>
+              <a:rPr lang="en-US" sz="1100" dirty="0">
+                <a:solidFill>
+                  <a:srgbClr val="8D6E63"/>
+                </a:solidFill>
+                <a:latin typeface="Zen Maru Gothic" pitchFamily="34" charset="0"/>
+                <a:ea typeface="Zen Maru Gothic" pitchFamily="34" charset="-122"/>
+                <a:cs typeface="Zen Maru Gothic" pitchFamily="34" charset="-120"/>
+              </a:rPr>
+              <a:t>ことばカード … つかう ことばを、上の（　）の ところへ ドラッグしよう</a:t>
+            </a:r>
+            <a:endParaRPr lang="en-US" sz="1100" dirty="0"/>
+          </a:p>
+        </p:txBody>
+      </p:sp>
+      <p:sp>
+        <p:nvSpPr>
+          <p:cNvPr id="14" name="Shape 10"/>
+          <p:cNvSpPr/>
+          <p:nvPr/>
+        </p:nvSpPr>
+        <p:spPr>
+          <a:xfrm>
+            <a:off x="457200" y="4503420"/>
+            <a:ext cx="1313688" cy="420624"/>
+          </a:xfrm>
+          <a:prstGeom prst="roundRect">
+            <a:avLst>
+              <a:gd name="adj" fmla="val 43478"/>
+            </a:avLst>
+          </a:prstGeom>
+          <a:solidFill>
+            <a:srgbClr val="FFFFFF"/>
+          </a:solidFill>
+          <a:ln w="25400">
+            <a:solidFill>
+              <a:srgbClr val="FFCC80"/>
+            </a:solidFill>
+            <a:prstDash val="solid"/>
+          </a:ln>
+        </p:spPr>
+      </p:sp>
+      <p:sp>
+        <p:nvSpPr>
+          <p:cNvPr id="15" name="Text 11"/>
+          <p:cNvSpPr/>
+          <p:nvPr/>
+        </p:nvSpPr>
+        <p:spPr>
+          <a:xfrm>
+            <a:off x="484632" y="4503420"/>
+            <a:ext cx="1258824" cy="420624"/>
+          </a:xfrm>
+          <a:prstGeom prst="rect">
+            <a:avLst/>
+          </a:prstGeom>
+          <a:noFill/>
+          <a:ln/>
+        </p:spPr>
+        <p:txBody>
+          <a:bodyPr wrap="square" lIns="0" tIns="0" rIns="0" bIns="0" rtlCol="0" anchor="ctr"/>
+          <a:lstStyle/>
+          <a:p>
+            <a:pPr algn="ctr" indent="0" marL="0">
+              <a:buNone/>
+            </a:pPr>
+            <a:r>
+              <a:rPr lang="en-US" sz="1200" b="1" dirty="0">
+                <a:solidFill>
+                  <a:srgbClr val="6D4C41"/>
+                </a:solidFill>
+                <a:latin typeface="Zen Maru Gothic" pitchFamily="34" charset="0"/>
+                <a:ea typeface="Zen Maru Gothic" pitchFamily="34" charset="-122"/>
+                <a:cs typeface="Zen Maru Gothic" pitchFamily="34" charset="-120"/>
+              </a:rPr>
+              <a:t>たのしい!</a:t>
+            </a:r>
+            <a:endParaRPr lang="en-US" sz="1200" dirty="0"/>
+          </a:p>
+        </p:txBody>
+      </p:sp>
+      <p:sp>
+        <p:nvSpPr>
+          <p:cNvPr id="16" name="Shape 12"/>
+          <p:cNvSpPr/>
+          <p:nvPr/>
+        </p:nvSpPr>
+        <p:spPr>
+          <a:xfrm>
+            <a:off x="1844040" y="4503420"/>
+            <a:ext cx="1313688" cy="420624"/>
+          </a:xfrm>
+          <a:prstGeom prst="roundRect">
+            <a:avLst>
+              <a:gd name="adj" fmla="val 43478"/>
+            </a:avLst>
+          </a:prstGeom>
+          <a:solidFill>
+            <a:srgbClr val="FFFFFF"/>
+          </a:solidFill>
+          <a:ln w="25400">
+            <a:solidFill>
+              <a:srgbClr val="FFCC80"/>
+            </a:solidFill>
+            <a:prstDash val="solid"/>
+          </a:ln>
+        </p:spPr>
+      </p:sp>
+      <p:sp>
+        <p:nvSpPr>
+          <p:cNvPr id="17" name="Text 13"/>
+          <p:cNvSpPr/>
+          <p:nvPr/>
+        </p:nvSpPr>
+        <p:spPr>
+          <a:xfrm>
+            <a:off x="1871472" y="4503420"/>
+            <a:ext cx="1258824" cy="420624"/>
+          </a:xfrm>
+          <a:prstGeom prst="rect">
+            <a:avLst/>
+          </a:prstGeom>
+          <a:noFill/>
+          <a:ln/>
+        </p:spPr>
+        <p:txBody>
+          <a:bodyPr wrap="square" lIns="0" tIns="0" rIns="0" bIns="0" rtlCol="0" anchor="ctr"/>
+          <a:lstStyle/>
+          <a:p>
+            <a:pPr algn="ctr" indent="0" marL="0">
+              <a:buNone/>
+            </a:pPr>
+            <a:r>
+              <a:rPr lang="en-US" sz="1200" b="1" dirty="0">
+                <a:solidFill>
+                  <a:srgbClr val="6D4C41"/>
+                </a:solidFill>
+                <a:latin typeface="Zen Maru Gothic" pitchFamily="34" charset="0"/>
+                <a:ea typeface="Zen Maru Gothic" pitchFamily="34" charset="-122"/>
+                <a:cs typeface="Zen Maru Gothic" pitchFamily="34" charset="-120"/>
+              </a:rPr>
+              <a:t>すごい!</a:t>
+            </a:r>
+            <a:endParaRPr lang="en-US" sz="1200" dirty="0"/>
+          </a:p>
+        </p:txBody>
+      </p:sp>
+      <p:sp>
+        <p:nvSpPr>
+          <p:cNvPr id="18" name="Shape 14"/>
+          <p:cNvSpPr/>
+          <p:nvPr/>
+        </p:nvSpPr>
+        <p:spPr>
+          <a:xfrm>
+            <a:off x="3230880" y="4503420"/>
+            <a:ext cx="1313688" cy="420624"/>
+          </a:xfrm>
+          <a:prstGeom prst="roundRect">
+            <a:avLst>
+              <a:gd name="adj" fmla="val 43478"/>
+            </a:avLst>
+          </a:prstGeom>
+          <a:solidFill>
+            <a:srgbClr val="FFFFFF"/>
+          </a:solidFill>
+          <a:ln w="25400">
+            <a:solidFill>
+              <a:srgbClr val="FFCC80"/>
+            </a:solidFill>
+            <a:prstDash val="solid"/>
+          </a:ln>
+        </p:spPr>
+      </p:sp>
+      <p:sp>
+        <p:nvSpPr>
+          <p:cNvPr id="19" name="Text 15"/>
+          <p:cNvSpPr/>
+          <p:nvPr/>
+        </p:nvSpPr>
+        <p:spPr>
+          <a:xfrm>
+            <a:off x="3258312" y="4503420"/>
+            <a:ext cx="1258824" cy="420624"/>
+          </a:xfrm>
+          <a:prstGeom prst="rect">
+            <a:avLst/>
+          </a:prstGeom>
+          <a:noFill/>
+          <a:ln/>
+        </p:spPr>
+        <p:txBody>
+          <a:bodyPr wrap="square" lIns="0" tIns="0" rIns="0" bIns="0" rtlCol="0" anchor="ctr"/>
+          <a:lstStyle/>
+          <a:p>
+            <a:pPr algn="ctr" indent="0" marL="0">
+              <a:buNone/>
+            </a:pPr>
+            <a:r>
+              <a:rPr lang="en-US" sz="1200" b="1" dirty="0">
+                <a:solidFill>
+                  <a:srgbClr val="6D4C41"/>
+                </a:solidFill>
+                <a:latin typeface="Zen Maru Gothic" pitchFamily="34" charset="0"/>
+                <a:ea typeface="Zen Maru Gothic" pitchFamily="34" charset="-122"/>
+                <a:cs typeface="Zen Maru Gothic" pitchFamily="34" charset="-120"/>
+              </a:rPr>
+              <a:t>もう1かい!</a:t>
+            </a:r>
+            <a:endParaRPr lang="en-US" sz="1200" dirty="0"/>
+          </a:p>
+        </p:txBody>
+      </p:sp>
+      <p:sp>
+        <p:nvSpPr>
+          <p:cNvPr id="20" name="Shape 16"/>
+          <p:cNvSpPr/>
+          <p:nvPr/>
+        </p:nvSpPr>
+        <p:spPr>
+          <a:xfrm>
+            <a:off x="4617720" y="4503420"/>
+            <a:ext cx="1313688" cy="420624"/>
+          </a:xfrm>
+          <a:prstGeom prst="roundRect">
+            <a:avLst>
+              <a:gd name="adj" fmla="val 43478"/>
+            </a:avLst>
+          </a:prstGeom>
+          <a:solidFill>
+            <a:srgbClr val="FFFFFF"/>
+          </a:solidFill>
+          <a:ln w="25400">
+            <a:solidFill>
+              <a:srgbClr val="FFCC80"/>
+            </a:solidFill>
+            <a:prstDash val="solid"/>
+          </a:ln>
+        </p:spPr>
+      </p:sp>
+      <p:sp>
+        <p:nvSpPr>
+          <p:cNvPr id="21" name="Text 17"/>
+          <p:cNvSpPr/>
+          <p:nvPr/>
+        </p:nvSpPr>
+        <p:spPr>
+          <a:xfrm>
+            <a:off x="4645152" y="4503420"/>
+            <a:ext cx="1258824" cy="420624"/>
+          </a:xfrm>
+          <a:prstGeom prst="rect">
+            <a:avLst/>
+          </a:prstGeom>
+          <a:noFill/>
+          <a:ln/>
+        </p:spPr>
+        <p:txBody>
+          <a:bodyPr wrap="square" lIns="0" tIns="0" rIns="0" bIns="0" rtlCol="0" anchor="ctr"/>
+          <a:lstStyle/>
+          <a:p>
+            <a:pPr algn="ctr" indent="0" marL="0">
+              <a:buNone/>
+            </a:pPr>
+            <a:r>
+              <a:rPr lang="en-US" sz="1200" b="1" dirty="0">
+                <a:solidFill>
+                  <a:srgbClr val="6D4C41"/>
+                </a:solidFill>
+                <a:latin typeface="Zen Maru Gothic" pitchFamily="34" charset="0"/>
+                <a:ea typeface="Zen Maru Gothic" pitchFamily="34" charset="-122"/>
+                <a:cs typeface="Zen Maru Gothic" pitchFamily="34" charset="-120"/>
+              </a:rPr>
+              <a:t>じょうずだね</a:t>
+            </a:r>
+            <a:endParaRPr lang="en-US" sz="1200" dirty="0"/>
+          </a:p>
+        </p:txBody>
+      </p:sp>
+      <p:sp>
+        <p:nvSpPr>
+          <p:cNvPr id="22" name="Shape 18"/>
+          <p:cNvSpPr/>
+          <p:nvPr/>
+        </p:nvSpPr>
+        <p:spPr>
+          <a:xfrm>
+            <a:off x="6004560" y="4503420"/>
+            <a:ext cx="1313688" cy="420624"/>
+          </a:xfrm>
+          <a:prstGeom prst="roundRect">
+            <a:avLst>
+              <a:gd name="adj" fmla="val 43478"/>
+            </a:avLst>
+          </a:prstGeom>
+          <a:solidFill>
+            <a:srgbClr val="FFFFFF"/>
+          </a:solidFill>
+          <a:ln w="25400">
+            <a:solidFill>
+              <a:srgbClr val="FFCC80"/>
+            </a:solidFill>
+            <a:prstDash val="solid"/>
+          </a:ln>
+        </p:spPr>
+      </p:sp>
+      <p:sp>
+        <p:nvSpPr>
+          <p:cNvPr id="23" name="Text 19"/>
+          <p:cNvSpPr/>
+          <p:nvPr/>
+        </p:nvSpPr>
+        <p:spPr>
+          <a:xfrm>
+            <a:off x="6031992" y="4503420"/>
+            <a:ext cx="1258824" cy="420624"/>
+          </a:xfrm>
+          <a:prstGeom prst="rect">
+            <a:avLst/>
+          </a:prstGeom>
+          <a:noFill/>
+          <a:ln/>
+        </p:spPr>
+        <p:txBody>
+          <a:bodyPr wrap="square" lIns="0" tIns="0" rIns="0" bIns="0" rtlCol="0" anchor="ctr"/>
+          <a:lstStyle/>
+          <a:p>
+            <a:pPr algn="ctr" indent="0" marL="0">
+              <a:buNone/>
+            </a:pPr>
+            <a:r>
+              <a:rPr lang="en-US" sz="1200" b="1" dirty="0">
+                <a:solidFill>
+                  <a:srgbClr val="6D4C41"/>
+                </a:solidFill>
+                <a:latin typeface="Zen Maru Gothic" pitchFamily="34" charset="0"/>
+                <a:ea typeface="Zen Maru Gothic" pitchFamily="34" charset="-122"/>
+                <a:cs typeface="Zen Maru Gothic" pitchFamily="34" charset="-120"/>
+              </a:rPr>
+              <a:t>おもしろい!</a:t>
+            </a:r>
+            <a:endParaRPr lang="en-US" sz="1200" dirty="0"/>
+          </a:p>
+        </p:txBody>
+      </p:sp>
+      <p:sp>
+        <p:nvSpPr>
+          <p:cNvPr id="24" name="Shape 20"/>
+          <p:cNvSpPr/>
+          <p:nvPr/>
+        </p:nvSpPr>
+        <p:spPr>
+          <a:xfrm>
+            <a:off x="7391400" y="4503420"/>
+            <a:ext cx="1313688" cy="420624"/>
+          </a:xfrm>
+          <a:prstGeom prst="roundRect">
+            <a:avLst>
+              <a:gd name="adj" fmla="val 43478"/>
+            </a:avLst>
+          </a:prstGeom>
+          <a:solidFill>
+            <a:srgbClr val="FFFFFF"/>
+          </a:solidFill>
+          <a:ln w="25400">
+            <a:solidFill>
+              <a:srgbClr val="FFCC80"/>
+            </a:solidFill>
+            <a:prstDash val="solid"/>
+          </a:ln>
+        </p:spPr>
+      </p:sp>
+      <p:sp>
+        <p:nvSpPr>
+          <p:cNvPr id="25" name="Text 21"/>
+          <p:cNvSpPr/>
+          <p:nvPr/>
+        </p:nvSpPr>
+        <p:spPr>
+          <a:xfrm>
+            <a:off x="7418832" y="4503420"/>
+            <a:ext cx="1258824" cy="420624"/>
+          </a:xfrm>
+          <a:prstGeom prst="rect">
+            <a:avLst/>
+          </a:prstGeom>
+          <a:noFill/>
+          <a:ln/>
+        </p:spPr>
+        <p:txBody>
+          <a:bodyPr wrap="square" lIns="0" tIns="0" rIns="0" bIns="0" rtlCol="0" anchor="ctr"/>
+          <a:lstStyle/>
+          <a:p>
+            <a:pPr algn="ctr" indent="0" marL="0">
+              <a:buNone/>
+            </a:pPr>
+            <a:r>
+              <a:rPr lang="en-US" sz="1200" b="1" dirty="0">
+                <a:solidFill>
+                  <a:srgbClr val="6D4C41"/>
+                </a:solidFill>
+                <a:latin typeface="Zen Maru Gothic" pitchFamily="34" charset="0"/>
+                <a:ea typeface="Zen Maru Gothic" pitchFamily="34" charset="-122"/>
+                <a:cs typeface="Zen Maru Gothic" pitchFamily="34" charset="-120"/>
+              </a:rPr>
+              <a:t>ありがとう</a:t>
+            </a:r>
+            <a:endParaRPr lang="en-US" sz="1200" dirty="0"/>
+          </a:p>
+        </p:txBody>
+      </p:sp>
     </p:spTree>
   </p:cSld>
   <p:clrMapOvr>

--- a/canva/aki-omocha-template.pptx
+++ b/canva/aki-omocha-template.pptx
@@ -5325,22 +5325,22 @@
         </p:nvSpPr>
         <p:spPr>
           <a:xfrm>
-            <a:off x="2148840" y="2788920"/>
-            <a:ext cx="5029200" cy="1051560"/>
+            <a:off x="2148840" y="2880360"/>
+            <a:ext cx="5029200" cy="914400"/>
           </a:xfrm>
           <a:prstGeom prst="roundRect">
             <a:avLst>
-              <a:gd name="adj" fmla="val 10435"/>
+              <a:gd name="adj" fmla="val 16000"/>
             </a:avLst>
           </a:prstGeom>
           <a:solidFill>
-            <a:srgbClr val="FFFFFF"/>
+            <a:srgbClr val="FFF3E0"/>
           </a:solidFill>
           <a:ln w="31750">
             <a:solidFill>
-              <a:srgbClr val="FFB74D"/>
-            </a:solidFill>
-            <a:prstDash val="dash"/>
+              <a:srgbClr val="FFCC80"/>
+            </a:solidFill>
+            <a:prstDash val="solid"/>
           </a:ln>
         </p:spPr>
       </p:sp>
@@ -5352,51 +5352,57 @@
         </p:nvSpPr>
         <p:spPr>
           <a:xfrm>
-            <a:off x="2258568" y="2788920"/>
-            <a:ext cx="4809744" cy="1051560"/>
-          </a:xfrm>
-          <a:prstGeom prst="rect">
-            <a:avLst/>
-          </a:prstGeom>
-          <a:noFill/>
-          <a:ln/>
-        </p:spPr>
-        <p:txBody>
-          <a:bodyPr wrap="square" lIns="0" tIns="0" rIns="0" bIns="0" rtlCol="0" anchor="ctr"/>
-          <a:lstStyle/>
-          <a:p>
-            <a:pPr algn="ctr" indent="0" marL="0">
-              <a:buNone/>
-            </a:pPr>
-            <a:r>
-              <a:rPr lang="en-US" sz="1700" dirty="0">
-                <a:solidFill>
-                  <a:srgbClr val="9E9E9E"/>
-                </a:solidFill>
-                <a:latin typeface="Zen Maru Gothic" pitchFamily="34" charset="0"/>
-                <a:ea typeface="Zen Maru Gothic" pitchFamily="34" charset="-122"/>
-                <a:cs typeface="Zen Maru Gothic" pitchFamily="34" charset="-120"/>
-              </a:rPr>
-              <a:t>（　　　　　　　）ところを</a:t>
-            </a:r>
-            <a:endParaRPr lang="en-US" sz="1700" dirty="0"/>
-          </a:p>
-          <a:p>
-            <a:pPr algn="ctr" indent="0" marL="0">
-              <a:buNone/>
-            </a:pPr>
-            <a:r>
-              <a:rPr lang="en-US" sz="1700" dirty="0">
-                <a:solidFill>
-                  <a:srgbClr val="9E9E9E"/>
-                </a:solidFill>
-                <a:latin typeface="Zen Maru Gothic" pitchFamily="34" charset="0"/>
-                <a:ea typeface="Zen Maru Gothic" pitchFamily="34" charset="-122"/>
-                <a:cs typeface="Zen Maru Gothic" pitchFamily="34" charset="-120"/>
-              </a:rPr>
-              <a:t>おしえて あげたいな</a:t>
-            </a:r>
-            <a:endParaRPr lang="en-US" sz="1700" dirty="0"/>
+            <a:off x="2240280" y="2880360"/>
+            <a:ext cx="4846320" cy="914400"/>
+          </a:xfrm>
+          <a:prstGeom prst="rect">
+            <a:avLst/>
+          </a:prstGeom>
+          <a:noFill/>
+          <a:ln/>
+        </p:spPr>
+        <p:txBody>
+          <a:bodyPr wrap="square" lIns="0" tIns="0" rIns="0" bIns="0" rtlCol="0" anchor="ctr"/>
+          <a:lstStyle/>
+          <a:p>
+            <a:pPr algn="ctr" indent="0" marL="0">
+              <a:lnSpc>
+                <a:spcPct val="120000"/>
+              </a:lnSpc>
+              <a:buNone/>
+            </a:pPr>
+            <a:r>
+              <a:rPr lang="en-US" sz="1800" b="1" dirty="0">
+                <a:solidFill>
+                  <a:srgbClr val="E65100"/>
+                </a:solidFill>
+                <a:latin typeface="Zen Maru Gothic" pitchFamily="34" charset="0"/>
+                <a:ea typeface="Zen Maru Gothic" pitchFamily="34" charset="-122"/>
+                <a:cs typeface="Zen Maru Gothic" pitchFamily="34" charset="-120"/>
+              </a:rPr>
+              <a:t>やさしく おしえて あげるね</a:t>
+            </a:r>
+            <a:endParaRPr lang="en-US" sz="1800" dirty="0"/>
+          </a:p>
+          <a:p>
+            <a:pPr algn="ctr" indent="0" marL="0">
+              <a:lnSpc>
+                <a:spcPct val="120000"/>
+              </a:lnSpc>
+              <a:buNone/>
+            </a:pPr>
+            <a:r>
+              <a:rPr lang="en-US" sz="1800" b="1" dirty="0">
+                <a:solidFill>
+                  <a:srgbClr val="E65100"/>
+                </a:solidFill>
+                <a:latin typeface="Zen Maru Gothic" pitchFamily="34" charset="0"/>
+                <a:ea typeface="Zen Maru Gothic" pitchFamily="34" charset="-122"/>
+                <a:cs typeface="Zen Maru Gothic" pitchFamily="34" charset="-120"/>
+              </a:rPr>
+              <a:t>いっしょに あそぼう!</a:t>
+            </a:r>
+            <a:endParaRPr lang="en-US" sz="1800" dirty="0"/>
           </a:p>
         </p:txBody>
       </p:sp>
@@ -5460,7 +5466,7 @@
                 <a:ea typeface="Zen Maru Gothic" pitchFamily="34" charset="-122"/>
                 <a:cs typeface="Zen Maru Gothic" pitchFamily="34" charset="-120"/>
               </a:rPr>
-              <a:t>ことばカード … つかう ことばを、上の（　）の ところへ ドラッグしよう</a:t>
+              <a:t>ことばカード … ひとつ えらんで、うえの（　）に いれよう</a:t>
             </a:r>
             <a:endParaRPr lang="en-US" sz="1100" dirty="0"/>
           </a:p>
